--- a/멀티모달_화재감지_분석서버_설치매뉴얼.pptx
+++ b/멀티모달_화재감지_분석서버_설치매뉴얼.pptx
@@ -38,6 +38,11 @@
     <p:sldId id="286" r:id="rId37"/>
     <p:sldId id="287" r:id="rId38"/>
     <p:sldId id="288" r:id="rId39"/>
+    <p:sldId id="289" r:id="rId40"/>
+    <p:sldId id="290" r:id="rId41"/>
+    <p:sldId id="291" r:id="rId42"/>
+    <p:sldId id="292" r:id="rId43"/>
+    <p:sldId id="293" r:id="rId44"/>
   </p:sldIdLst>
   <p:sldSz cx="12191695" cy="6858000" type="screen4x3"/>
   <p:notesSz cx="6858000" cy="9144000"/>
@@ -3766,7 +3771,7 @@
                 <a:ea typeface="맑은 고딕"/>
                 <a:cs typeface="맑은 고딕"/>
               </a:rPr>
-              <a:t>DB 비밀번호는 env.ini 에 두지 않습니다. 저장소에 올라가지 않도록 별도 파일로 분리했습니다.</a:t>
+              <a:t>DB 비밀번호는 env.ini 에 두지 않음 · 저장소에 올라가지 않도록 별도 파일로 분리했음</a:t>
             </a:r>
           </a:p>
         </p:txBody>
@@ -3857,7 +3862,7 @@
                 <a:ea typeface="Consolas"/>
                 <a:cs typeface="Consolas"/>
               </a:rPr>
-              <a:t># 견본을 복사해 현장 폴더에 만듭니다</a:t>
+              <a:t># 견본을 복사해 현장 폴더에 만듦</a:t>
             </a:r>
           </a:p>
           <a:p>
@@ -4208,7 +4213,7 @@
                 <a:ea typeface="맑은 고딕"/>
                 <a:cs typeface="맑은 고딕"/>
               </a:rPr>
-              <a:t>파이썬은 env.ini 와 db_secrets.ini 를 이어서 읽어 하나로 합칩니다. C++ 은 비밀번호만 db_secrets.ini 에서 읽습니다.</a:t>
+              <a:t>파이썬은 env.ini 와 db_secrets.ini 를 이어서 읽어 하나로 합침 · C++ 은 비밀번호만 db_secrets.ini 에서 읽음</a:t>
             </a:r>
           </a:p>
         </p:txBody>
@@ -4351,7 +4356,7 @@
                 <a:ea typeface="맑은 고딕"/>
                 <a:cs typeface="맑은 고딕"/>
               </a:rPr>
-              <a:t>빠뜨리면 즉시 중단됩니다</a:t>
+              <a:t>빠뜨리면 즉시 중단됨</a:t>
             </a:r>
           </a:p>
         </p:txBody>
@@ -4398,7 +4403,7 @@
                 <a:ea typeface="맑은 고딕"/>
                 <a:cs typeface="맑은 고딕"/>
               </a:rPr>
-              <a:t>db_secrets.ini 가 없으면 파일 경로와 함께 오류가 표시되고 프로그램이 멈춥니다. 조용히 잘못 동작하지 않으므로 원인 파악이 쉽습니다.</a:t>
+              <a:t>db_secrets.ini 가 없으면 파일 경로와 함께 오류가 표시되고 프로그램이 멈춤 · 조용히 잘못 동작하지 않으므로 원인 파악이 쉬움</a:t>
             </a:r>
           </a:p>
         </p:txBody>
@@ -5232,7 +5237,7 @@
                 <a:ea typeface="맑은 고딕"/>
                 <a:cs typeface="맑은 고딕"/>
               </a:rPr>
-              <a:t>제목표시줄에 웹캠 아이콘이 보입니다.</a:t>
+              <a:t>제목표시줄에 웹캠 아이콘이 보임</a:t>
             </a:r>
           </a:p>
         </p:txBody>
@@ -5378,7 +5383,7 @@
                 <a:ea typeface="맑은 고딕"/>
                 <a:cs typeface="맑은 고딕"/>
               </a:rPr>
-              <a:t>콤보박스에서 현장을 고릅니다. 해당 현장의 목록만 표시됩니다.</a:t>
+              <a:t>콤보박스에서 현장을 고름 · 해당 현장의 목록만 표시됨</a:t>
             </a:r>
           </a:p>
         </p:txBody>
@@ -5524,7 +5529,7 @@
                 <a:ea typeface="맑은 고딕"/>
                 <a:cs typeface="맑은 고딕"/>
               </a:rPr>
-              <a:t>약 18초에 걸쳐 프로세스가 차례로 기동합니다.</a:t>
+              <a:t>약 18초에 걸쳐 프로세스가 차례로 기동함</a:t>
             </a:r>
           </a:p>
         </p:txBody>
@@ -5670,7 +5675,7 @@
                 <a:ea typeface="맑은 고딕"/>
                 <a:cs typeface="맑은 고딕"/>
               </a:rPr>
-              <a:t>[3] processes  |  err=0000 이 표시되면 정상입니다.</a:t>
+              <a:t>[3] processes  |  err=0000 이 표시되면 정상임</a:t>
             </a:r>
           </a:p>
         </p:txBody>
@@ -5816,7 +5821,7 @@
                 <a:ea typeface="맑은 고딕"/>
                 <a:cs typeface="맑은 고딕"/>
               </a:rPr>
-              <a:t>debug_logs 폴더에 프로세스별 로그가 쌓입니다.</a:t>
+              <a:t>debug_logs 폴더에 프로세스별 로그가 쌓임</a:t>
             </a:r>
           </a:p>
         </p:txBody>
@@ -6122,7 +6127,7 @@
                 <a:ea typeface="맑은 고딕"/>
                 <a:cs typeface="맑은 고딕"/>
               </a:rPr>
-              <a:t>두 현장의 프로세스 6개를 차례로 기동합니다. 진행바가 뜨고, 이미지 뷰어가 올라오면 사라집니다. 기동 중에는 다시 눌러도 무시됩니다.</a:t>
+              <a:t>두 현장의 프로세스 6개를 차례로 기동함 · 진행바가 뜨고, 이미지 뷰어가 올라오면 사라짐 · 기동 중에는 다시 눌러도 무시됨</a:t>
             </a:r>
           </a:p>
         </p:txBody>
@@ -6270,7 +6275,7 @@
                 <a:ea typeface="맑은 고딕"/>
                 <a:cs typeface="맑은 고딕"/>
               </a:rPr>
-              <a:t>기동한 프로세스를 모두 종료합니다.</a:t>
+              <a:t>기동한 프로세스를 모두 종료함</a:t>
             </a:r>
           </a:p>
         </p:txBody>
@@ -6418,7 +6423,7 @@
                 <a:ea typeface="맑은 고딕"/>
                 <a:cs typeface="맑은 고딕"/>
               </a:rPr>
-              <a:t>설정 영역을 펼칩니다. 목록과 같은 토글이라 펼친 채로 다른 버튼을 쓸 수 있습니다.</a:t>
+              <a:t>설정 영역을 펼침 · 목록과 같은 토글이라 펼친 채로 다른 버튼을 쓸 수 있음</a:t>
             </a:r>
           </a:p>
         </p:txBody>
@@ -6566,7 +6571,7 @@
                 <a:ea typeface="맑은 고딕"/>
                 <a:cs typeface="맑은 고딕"/>
               </a:rPr>
-              <a:t>debug_logs 폴더를 탐색기로 엽니다.</a:t>
+              <a:t>debug_logs 폴더를 탐색기로 엶</a:t>
             </a:r>
           </a:p>
         </p:txBody>
@@ -6714,7 +6719,7 @@
                 <a:ea typeface="맑은 고딕"/>
                 <a:cs typeface="맑은 고딕"/>
               </a:rPr>
-              <a:t>하단 프로세스 목록을 펼칩니다. 펼치면 문구가 접기 로 바뀝니다.</a:t>
+              <a:t>하단 프로세스 목록을 펼침 · 펼치면 문구가 접기 로 바뀜</a:t>
             </a:r>
           </a:p>
         </p:txBody>
@@ -6862,7 +6867,7 @@
                 <a:ea typeface="맑은 고딕"/>
                 <a:cs typeface="맑은 고딕"/>
               </a:rPr>
-              <a:t>프로그램을 종료합니다. 감시 중이면 확인을 한 번 묻습니다.</a:t>
+              <a:t>프로그램을 종료함 · 감시 중이면 확인을 한 번 물음</a:t>
             </a:r>
           </a:p>
         </p:txBody>
@@ -6953,7 +6958,7 @@
                 <a:ea typeface="맑은 고딕"/>
                 <a:cs typeface="맑은 고딕"/>
               </a:rPr>
-              <a:t>선택한 현장의 목록과 이미지 뷰어만 화면에 표시됩니다. 콤보박스에서 현장을 바꾸면 목록도 이미지 창도 함께 교체됩니다.</a:t>
+              <a:t>선택한 현장의 목록과 이미지 뷰어만 화면에 표시됨 · 콤보박스에서 현장을 바꾸면 목록도 이미지 창도 함께 교체됨</a:t>
             </a:r>
           </a:p>
         </p:txBody>
@@ -7155,7 +7160,7 @@
                 <a:ea typeface="맑은 고딕"/>
                 <a:cs typeface="맑은 고딕"/>
               </a:rPr>
-              <a:t>운영 시스템이 쓰는 모델은 별도 폴더 D:\autoencoder 에서 만듭니다. conda 환경도 otg 로 다릅니다.</a:t>
+              <a:t>운영 시스템이 쓰는 모델은 별도 폴더 D:\autoencoder 에서 만듦 · conda 환경도 otg 로 다름</a:t>
             </a:r>
           </a:p>
         </p:txBody>
@@ -7342,7 +7347,7 @@
                 <a:ea typeface="맑은 고딕"/>
                 <a:cs typeface="맑은 고딕"/>
               </a:rPr>
-              <a:t>관제서버에서 raw 파일을 내려받습니다.</a:t>
+              <a:t>관제서버에서 raw 파일을 내려받음</a:t>
             </a:r>
           </a:p>
         </p:txBody>
@@ -7529,7 +7534,7 @@
                 <a:ea typeface="맑은 고딕"/>
                 <a:cs typeface="맑은 고딕"/>
               </a:rPr>
-              <a:t>raw 값을 온도 값으로 변환합니다.</a:t>
+              <a:t>raw 값을 온도 값으로 변환함</a:t>
             </a:r>
           </a:p>
         </p:txBody>
@@ -7716,7 +7721,7 @@
                 <a:ea typeface="맑은 고딕"/>
                 <a:cs typeface="맑은 고딕"/>
               </a:rPr>
-              <a:t>160x120 을 64개 격자 값으로 축약합니다.</a:t>
+              <a:t>160x120 을 64개 격자 값으로 축약함</a:t>
             </a:r>
           </a:p>
         </p:txBody>
@@ -7903,7 +7908,7 @@
                 <a:ea typeface="맑은 고딕"/>
                 <a:cs typeface="맑은 고딕"/>
               </a:rPr>
-              <a:t>median 필터로 노이즈를 제거합니다.</a:t>
+              <a:t>median 필터로 노이즈를 제거함</a:t>
             </a:r>
           </a:p>
         </p:txBody>
@@ -8090,7 +8095,7 @@
                 <a:ea typeface="맑은 고딕"/>
                 <a:cs typeface="맑은 고딕"/>
               </a:rPr>
-              <a:t>마스크 적용 전인 64차원을 그대로 학습합니다.</a:t>
+              <a:t>마스크 적용 전인 64차원을 그대로 학습함</a:t>
             </a:r>
           </a:p>
         </p:txBody>
@@ -8181,7 +8186,7 @@
                 <a:ea typeface="맑은 고딕"/>
                 <a:cs typeface="맑은 고딕"/>
               </a:rPr>
-              <a:t>예전 5단계였던 apply_mask_extract.py (step_2 → step_3) 는 제거했습니다. 마스크는 학습이 아니라 채점에서만 쓰이기 때문입니다.</a:t>
+              <a:t>예전 5단계였던 apply_mask_extract.py (step_2 → step_3) 는 제거했음 · 마스크는 학습이 아니라 채점에서만 쓰이기 때문임</a:t>
             </a:r>
           </a:p>
         </p:txBody>
@@ -8925,7 +8930,7 @@
                 <a:ea typeface="맑은 고딕"/>
                 <a:cs typeface="맑은 고딕"/>
               </a:rPr>
-              <a:t>5단계 파이프라인으로 모델을 만듭니다.</a:t>
+              <a:t>5단계 파이프라인으로 모델을 만듦</a:t>
             </a:r>
           </a:p>
           <a:p>
@@ -8946,7 +8951,7 @@
                 <a:ea typeface="맑은 고딕"/>
                 <a:cs typeface="맑은 고딕"/>
               </a:rPr>
-              <a:t>산출물은 saved_models 에 쌓입니다.</a:t>
+              <a:t>산출물은 saved_models 에 쌓임</a:t>
             </a:r>
           </a:p>
           <a:p>
@@ -8970,7 +8975,7 @@
                 <a:ea typeface="맑은 고딕"/>
                 <a:cs typeface="맑은 고딕"/>
               </a:rPr>
-              <a:t>프로젝트 폴더 밖이라 git 추적 대상이 아닙니다.</a:t>
+              <a:t>프로젝트 폴더 밖이라 git 추적 대상이 아님</a:t>
             </a:r>
           </a:p>
         </p:txBody>
@@ -9178,7 +9183,7 @@
                 <a:ea typeface="맑은 고딕"/>
                 <a:cs typeface="맑은 고딕"/>
               </a:rPr>
-              <a:t>predict_machine.py 가 모델을 읽습니다.</a:t>
+              <a:t>predict_machine.py 가 모델을 읽음</a:t>
             </a:r>
           </a:p>
           <a:p>
@@ -9199,7 +9204,7 @@
                 <a:ea typeface="맑은 고딕"/>
                 <a:cs typeface="맑은 고딕"/>
               </a:rPr>
-              <a:t>users\&lt;user&gt;\ 에 모델을 둡니다.</a:t>
+              <a:t>users\&lt;user&gt;\ 에 모델을 둠</a:t>
             </a:r>
           </a:p>
           <a:p>
@@ -9223,7 +9228,7 @@
                 <a:ea typeface="맑은 고딕"/>
                 <a:cs typeface="맑은 고딕"/>
               </a:rPr>
-              <a:t>git 으로 백업됩니다.</a:t>
+              <a:t>git 으로 백업됨</a:t>
             </a:r>
           </a:p>
         </p:txBody>
@@ -9566,7 +9571,7 @@
                 <a:ea typeface="맑은 고딕"/>
                 <a:cs typeface="맑은 고딕"/>
               </a:rPr>
-              <a:t>scaler 와 autoencoder 는 한 번의 학습에서 함께 나온 것이어야 합니다. 따로 복사하면 점수가 조용히 틀어집니다.</a:t>
+              <a:t>scaler 와 autoencoder 는 한 번의 학습에서 함께 나온 것이어야 함 · 따로 복사하면 점수가 조용히 틀어짐</a:t>
             </a:r>
           </a:p>
         </p:txBody>
@@ -9756,7 +9761,7 @@
                 <a:ea typeface="맑은 고딕"/>
                 <a:cs typeface="맑은 고딕"/>
               </a:rPr>
-              <a:t>otg(2.x)에서 만든 scaler.pkl 은 mmc(1.x)에서 읽히지 않아, 같은 폴더의 scaler.npz 로 대체합니다.</a:t>
+              <a:t>otg(2.x)에서 만든 scaler.pkl 은 mmc(1.x)에서 읽히지 않아, 같은 폴더의 scaler.npz 로 대체함</a:t>
             </a:r>
           </a:p>
         </p:txBody>
@@ -9946,7 +9951,7 @@
                 <a:ea typeface="맑은 고딕"/>
                 <a:cs typeface="맑은 고딕"/>
               </a:rPr>
-              <a:t>D:\autoencoder 는 프로젝트 밖이라 백업에서 빠지기 쉽습니다. 스크립트만이라도 보관하십시오.</a:t>
+              <a:t>D:\autoencoder 는 프로젝트 밖이라 백업에서 빠지기 쉬움 · 스크립트만이라도 보관할 것</a:t>
             </a:r>
           </a:p>
         </p:txBody>
@@ -10104,7 +10109,7 @@
                 <a:ea typeface="맑은 고딕"/>
                 <a:cs typeface="맑은 고딕"/>
               </a:rPr>
-              <a:t>학습을 실행합니다</a:t>
+              <a:t>학습을 실행함</a:t>
             </a:r>
           </a:p>
         </p:txBody>
@@ -10148,7 +10153,7 @@
                 <a:ea typeface="맑은 고딕"/>
                 <a:cs typeface="맑은 고딕"/>
               </a:rPr>
-              <a:t>학습은 운영과 분리된 D:\autoencoder 에서 conda 환경 otg 로 실행합니다. 현장 이름을 인자로 넘깁니다.</a:t>
+              <a:t>학습은 운영과 분리된 D:\autoencoder 에서 conda 환경 otg 로 실행함 · 현장 이름을 인자로 넘긺</a:t>
             </a:r>
           </a:p>
         </p:txBody>
@@ -11274,7 +11279,7 @@
                 <a:ea typeface="맑은 고딕"/>
                 <a:cs typeface="맑은 고딕"/>
               </a:rPr>
-              <a:t>scaler.npz 는 학습이 자동으로 함께 만듭니다. 운영 환경의 numpy 1.x 대비용입니다.</a:t>
+              <a:t>scaler.npz 는 학습이 자동으로 함께 만듦 · 운영 환경의 numpy 1.x 대비용임</a:t>
             </a:r>
           </a:p>
         </p:txBody>
@@ -11476,7 +11481,7 @@
                 <a:ea typeface="맑은 고딕"/>
                 <a:cs typeface="맑은 고딕"/>
               </a:rPr>
-              <a:t>정상 상태만 학습시켜, 처음 보는 열 분포는 복원에 실패하도록 만드는 방식입니다.</a:t>
+              <a:t>정상 상태만 학습시켜, 처음 보는 열 분포는 복원에 실패하도록 만드는 방식임</a:t>
             </a:r>
           </a:p>
         </p:txBody>
@@ -12136,7 +12141,7 @@
                 <a:ea typeface="맑은 고딕"/>
                 <a:cs typeface="맑은 고딕"/>
               </a:rPr>
-              <a:t>인코더가 64개 값을 16개로 압축하고, 디코더가 다시 64개로 되돌립니다.</a:t>
+              <a:t>인코더가 64개 값을 16개로 압축하고, 디코더가 다시 64개로 되돌림</a:t>
             </a:r>
           </a:p>
         </p:txBody>
@@ -12645,7 +12650,7 @@
                 <a:ea typeface="맑은 고딕"/>
                 <a:cs typeface="맑은 고딕"/>
               </a:rPr>
-              <a:t>마스크는 학습에 쓰이지 않습니다 — 가변 패턴 방식</a:t>
+              <a:t>마스크는 학습에 쓰이지 않음 — 가변 패턴 방식</a:t>
             </a:r>
           </a:p>
         </p:txBody>
@@ -12692,7 +12697,7 @@
                 <a:ea typeface="맑은 고딕"/>
                 <a:cs typeface="맑은 고딕"/>
               </a:rPr>
-              <a:t>학습은 64셀 전부를 그대로 씁니다. 마스크는 채점할 때 어느 셀의 오차를 평균낼지 고르는 데만 쓰입니다. 따라서 16셀 지정을 바꾸더라도 hotlist_mask_local.ini 파일만 교체하면 되고, 재학습은 필요 없습니다.</a:t>
+              <a:t>학습은 64셀 전부를 그대로 씀 · 마스크는 채점할 때 어느 셀의 오차를 평균낼지 고르는 데만 쓰임 · 따라서 16셀 지정을 바꾸더라도 hotlist_mask_local.ini 파일만 교체하면 되고, 재학습은 필요 없음</a:t>
             </a:r>
           </a:p>
         </p:txBody>
@@ -12894,7 +12899,7 @@
                 <a:ea typeface="맑은 고딕"/>
                 <a:cs typeface="맑은 고딕"/>
               </a:rPr>
-              <a:t>증상이 비슷해 보여도 원인이 다릅니다. 재학습이 답이 아닌 경우를 먼저 가려내십시오.</a:t>
+              <a:t>증상이 비슷해 보여도 원인이 다름 · 재학습이 답이 아닌 경우를 먼저 가려낼 것</a:t>
             </a:r>
           </a:p>
         </p:txBody>
@@ -12982,7 +12987,7 @@
                 <a:ea typeface="맑은 고딕"/>
                 <a:cs typeface="맑은 고딕"/>
               </a:rPr>
-              <a:t>재학습이 필요합니다</a:t>
+              <a:t>재학습이 필요함</a:t>
             </a:r>
           </a:p>
         </p:txBody>
@@ -13343,7 +13348,7 @@
                 <a:ea typeface="맑은 고딕"/>
                 <a:cs typeface="맑은 고딕"/>
               </a:rPr>
-              <a:t>재학습이 필요 없습니다</a:t>
+              <a:t>재학습이 필요 없음</a:t>
             </a:r>
           </a:p>
         </p:txBody>
@@ -13434,7 +13439,7 @@
                 <a:ea typeface="맑은 고딕"/>
                 <a:cs typeface="맑은 고딕"/>
               </a:rPr>
-              <a:t>마스크 16셀만 바꾼 경우 — 파일 교체로 즉시 반영됩니다</a:t>
+              <a:t>마스크 16셀만 바꾼 경우 — 파일 교체로 즉시 반영됨</a:t>
             </a:r>
           </a:p>
         </p:txBody>
@@ -13525,7 +13530,7 @@
                 <a:ea typeface="맑은 고딕"/>
                 <a:cs typeface="맑은 고딕"/>
               </a:rPr>
-              <a:t>카메라 조준이 틀어진 경우 — 원위치 복원이 정답입니다</a:t>
+              <a:t>카메라 조준이 틀어진 경우 — 원위치 복원이 정답임</a:t>
             </a:r>
           </a:p>
         </p:txBody>
@@ -13616,7 +13621,7 @@
                 <a:ea typeface="맑은 고딕"/>
                 <a:cs typeface="맑은 고딕"/>
               </a:rPr>
-              <a:t>현장 데이터가 끊긴 경우 — 장비 점검이 먼저입니다</a:t>
+              <a:t>현장 데이터가 끊긴 경우 — 장비 점검이 먼저임</a:t>
             </a:r>
           </a:p>
         </p:txBody>
@@ -13759,7 +13764,7 @@
                 <a:ea typeface="맑은 고딕"/>
                 <a:cs typeface="맑은 고딕"/>
               </a:rPr>
-              <a:t>kict1 — 2026-07-13, 점수가 0.003 까지 떨어졌지만 모델은 정상이었습니다</a:t>
+              <a:t>kict1 — 2026-07-13, 점수가 0.003 까지 떨어졌지만 모델은 정상이었음</a:t>
             </a:r>
           </a:p>
         </p:txBody>
@@ -13806,7 +13811,7 @@
                 <a:ea typeface="맑은 고딕"/>
                 <a:cs typeface="맑은 고딕"/>
               </a:rPr>
-              <a:t>설비와 무관하게 늘 뜨거운 고정 열점이 격자 (4,1) 에 있었는데, 13:48~13:56 사이 (3,4) 로 옮겨갔습니다. 카메라가 위 1칸·오른쪽 3칸 밀린 것입니다. 마스크 16셀이 엉뚱한 곳을 보게 되어 점수가 떨어졌을 뿐, 모델과 마스크 자체는 멀쩡했습니다.</a:t>
+              <a:t>설비와 무관하게 늘 뜨거운 고정 열점이 격자 (4,1) 에 있었는데, 13:48~13:56 사이 (3,4) 로 옮겨갔음 · 카메라가 위 1칸·오른쪽 3칸 밀린 것임 · 마스크 16셀이 엉뚱한 곳을 보게 되어 점수가 떨어졌을 뿐, 모델과 마스크 자체는 멀쩡했음</a:t>
             </a:r>
           </a:p>
           <a:p>
@@ -13830,7 +13835,7 @@
                 <a:ea typeface="맑은 고딕"/>
                 <a:cs typeface="맑은 고딕"/>
               </a:rPr>
-              <a:t>점검 방법 — 학습 데이터 평균에서 주변보다 뚜렷이 뜨거운 셀을 기준점으로 정해 두고, 그 셀이 계속 같은 자리인지만 보면 조준 이상을 바로 알 수 있습니다.</a:t>
+              <a:t>점검 방법 — 학습 데이터 평균에서 주변보다 뚜렷이 뜨거운 셀을 기준점으로 정해 두고, 그 셀이 계속 같은 자리인지만 보면 조준 이상을 바로 알 수 있음</a:t>
             </a:r>
           </a:p>
         </p:txBody>
@@ -14035,7 +14040,7 @@
                 <a:ea typeface="맑은 고딕"/>
                 <a:cs typeface="맑은 고딕"/>
               </a:rPr>
-              <a:t>예전에는 모델 파일이 없으면 프로그램이 종료되어, 새 현장은 수 주간 데이터를 모아 오토인코더를 만들기 전까지 감시 자체가 불가능했습니다. 이제는 준비된 만큼만 쓰고 계속 동작하며, 상위 단계가 준비되면 자동으로 올라갑니다.</a:t>
+              <a:t>예전에는 모델 파일이 없으면 프로그램이 종료되어, 새 현장은 수 주간 데이터를 모아 오토인코더를 만들기 전까지 감시 자체가 불가능했음 · 이제는 준비된 만큼만 쓰고 계속 동작하며, 상위 단계가 준비되면 자동으로 올라감</a:t>
             </a:r>
           </a:p>
         </p:txBody>
@@ -14290,7 +14295,7 @@
                 <a:ea typeface="맑은 고딕"/>
                 <a:cs typeface="맑은 고딕"/>
               </a:rPr>
-              <a:t>고정된 온도·상승률 선. 학습 기반 판정이 모두 실패해도 이것만은 남습니다.</a:t>
+              <a:t>고정된 온도·상승률 선. 학습 기반 판정이 모두 실패해도 이것만은 남음</a:t>
             </a:r>
           </a:p>
         </p:txBody>
@@ -14589,7 +14594,7 @@
                 <a:ea typeface="맑은 고딕"/>
                 <a:cs typeface="맑은 고딕"/>
               </a:rPr>
-              <a:t>셀마다 정상 범위를 누적해 그 선을 넘은 만큼 채점합니다.</a:t>
+              <a:t>셀마다 정상 범위를 누적해 그 선을 넘은 만큼 채점함</a:t>
             </a:r>
           </a:p>
         </p:txBody>
@@ -14888,7 +14893,7 @@
                 <a:ea typeface="맑은 고딕"/>
                 <a:cs typeface="맑은 고딕"/>
               </a:rPr>
-              <a:t>셀 사이의 결합 분포까지 봅니다. 2단계가 놓치는 조합 이상을 잡습니다.</a:t>
+              <a:t>셀 사이의 결합 분포까지 봄 · 2단계가 놓치는 조합 이상을 잡음</a:t>
             </a:r>
           </a:p>
         </p:txBody>
@@ -15132,7 +15137,7 @@
                 <a:ea typeface="맑은 고딕"/>
                 <a:cs typeface="맑은 고딕"/>
               </a:rPr>
-              <a:t>쌓인 데이터로 3단계 모델을 스스로 갱신하며, 검증을 통과해야만 교체됩니다.</a:t>
+              <a:t>쌓인 데이터로 3단계 모델을 스스로 갱신하며, 검증을 통과해야만 교체됨</a:t>
             </a:r>
           </a:p>
         </p:txBody>
@@ -15275,7 +15280,7 @@
                 <a:ea typeface="맑은 고딕"/>
                 <a:cs typeface="맑은 고딕"/>
               </a:rPr>
-              <a:t>하위 단계는 상위 단계가 생겨도 계속 살아 있습니다</a:t>
+              <a:t>하위 단계는 상위 단계가 생겨도 계속 살아 있음</a:t>
             </a:r>
           </a:p>
         </p:txBody>
@@ -15322,7 +15327,7 @@
                 <a:ea typeface="맑은 고딕"/>
                 <a:cs typeface="맑은 고딕"/>
               </a:rPr>
-              <a:t>오토인코더나 경험 임계값은 '이 현장의 평소'를 기준으로 판정하므로, 평소가 서서히 변하면 기준도 따라갑니다. 그 특성은 오탐을 줄이지만 서서히 커지는 위험을 놓칠 수 있다는 뜻이기도 합니다. 1단계의 고정선이 그 마지막 안전망입니다.</a:t>
+              <a:t>오토인코더나 경험 임계값은 '이 현장의 평소'를 기준으로 판정하므로, 평소가 서서히 변하면 기준도 따라감 · 그 특성은 오탐을 줄이지만 서서히 커지는 위험을 놓칠 수 있다는 뜻이기도 함 · 1단계의 고정선이 그 마지막 안전망임</a:t>
             </a:r>
           </a:p>
         </p:txBody>
@@ -15571,7 +15576,7 @@
                 <a:ea typeface="맑은 고딕"/>
                 <a:cs typeface="맑은 고딕"/>
               </a:rPr>
-              <a:t>격자 64칸의 최대 온도와 분당 상승률을 고정선과 비교합니다. 학습이 전혀 없어도 동작합니다.</a:t>
+              <a:t>격자 64칸의 최대 온도와 분당 상승률을 고정선과 비교함 · 학습이 전혀 없어도 동작함</a:t>
             </a:r>
           </a:p>
         </p:txBody>
@@ -15659,7 +15664,7 @@
                 <a:ea typeface="맑은 고딕"/>
                 <a:cs typeface="맑은 고딕"/>
               </a:rPr>
-              <a:t>기본값을 두지 않습니다</a:t>
+              <a:t>기본값을 두지 않음</a:t>
             </a:r>
           </a:p>
         </p:txBody>
@@ -15706,7 +15711,7 @@
                 <a:ea typeface="맑은 고딕"/>
                 <a:cs typeface="맑은 고딕"/>
               </a:rPr>
-              <a:t>설비마다 정상 온도가 전혀 다릅니다. 실측 결과입니다.</a:t>
+              <a:t>설비마다 정상 온도가 전혀 다름 · 실측 결과임</a:t>
             </a:r>
           </a:p>
           <a:p>
@@ -15772,7 +15777,7 @@
                 <a:ea typeface="맑은 고딕"/>
                 <a:cs typeface="맑은 고딕"/>
               </a:rPr>
-              <a:t>추측한 기본값은 쉬지 않고 경보를 울립니다. 미지정이면 1단계를 끄고 시작 시 경고합니다.</a:t>
+              <a:t>추측한 기본값은 쉬지 않고 경보를 울림 · 미지정이면 1단계를 끄고 시작 시 경고함</a:t>
             </a:r>
           </a:p>
         </p:txBody>
@@ -16050,7 +16055,7 @@
                 <a:ea typeface="맑은 고딕"/>
                 <a:cs typeface="맑은 고딕"/>
               </a:rPr>
-              <a:t>"이 셀이 지금까지 이렇게 뜨거운 적이 있었는가" 를 봅니다. 평균에서 몇 σ 위인지가 아닙니다.</a:t>
+              <a:t>"이 셀이 지금까지 이렇게 뜨거운 적이 있었는가" 를 봄 · 평균에서 몇 σ 위인지가 아님</a:t>
             </a:r>
           </a:p>
         </p:txBody>
@@ -16185,7 +16190,7 @@
                 <a:ea typeface="맑은 고딕"/>
                 <a:cs typeface="맑은 고딕"/>
               </a:rPr>
-              <a:t>격자 온도가 0~255 정수라 근사가 아니라 정확한 상위 분위수를 얻습니다. 64KB, 저장 시 12KB.</a:t>
+              <a:t>격자 온도가 0~255 정수라 근사가 아니라 정확한 상위 분위수를 얻음 · 64KB, 저장 시 12KB.</a:t>
             </a:r>
           </a:p>
           <a:p>
@@ -16209,7 +16214,7 @@
                 <a:ea typeface="맑은 고딕"/>
                 <a:cs typeface="맑은 고딕"/>
               </a:rPr>
-              <a:t>설비는 가동/정지로 분포가 둘로 갈립니다. 표준편차 기반 판정은 그 사이 거리까지 삼켜 둔해집니다. 분위수는 분포 모양과 무관합니다.</a:t>
+              <a:t>설비는 가동/정지로 분포가 둘로 갈림 · 표준편차 기반 판정은 그 사이 거리까지 삼켜 둔해짐 · 분위수는 분포 모양과 무관함</a:t>
             </a:r>
           </a:p>
         </p:txBody>
@@ -16693,7 +16698,7 @@
                 <a:ea typeface="맑은 고딕"/>
                 <a:cs typeface="맑은 고딕"/>
               </a:rPr>
-              <a:t>경험 임계값은 3단계 이후에도 은퇴하지 않습니다</a:t>
+              <a:t>경험 임계값은 3단계 이후에도 은퇴하지 않음</a:t>
             </a:r>
           </a:p>
         </p:txBody>
@@ -16740,7 +16745,7 @@
                 <a:ea typeface="맑은 고딕"/>
                 <a:cs typeface="맑은 고딕"/>
               </a:rPr>
-              <a:t>오토인코더가 준비되면 두 점수를 함께 내고 낮은 쪽을 씁니다. 한쪽만 이상이라 하면 불일치로 기록해 원인을 가리킵니다. 화면 이동 감시(정상 0.9998 / 이동 시 0.23)와 통계 누적도 계속됩니다.</a:t>
+              <a:t>오토인코더가 준비되면 두 점수를 함께 내고 낮은 쪽을 씀 · 한쪽만 이상이라 하면 불일치로 기록해 원인을 가리킴 · 화면 이동 감시(정상 0.9998 / 이동 시 0.23)와 통계 누적도 계속됨</a:t>
             </a:r>
           </a:p>
         </p:txBody>
@@ -16942,7 +16947,7 @@
                 <a:ea typeface="맑은 고딕"/>
                 <a:cs typeface="맑은 고딕"/>
               </a:rPr>
-              <a:t>감시 프로그램 1개가 현장(user)마다 파이썬 프로세스 3개를 띄워 관리합니다.</a:t>
+              <a:t>감시 프로그램 1개가 현장(user)마다 파이썬 프로세스 3개를 띄워 관리함</a:t>
             </a:r>
           </a:p>
         </p:txBody>
@@ -18158,7 +18163,7 @@
                 <a:ea typeface="맑은 고딕"/>
                 <a:cs typeface="맑은 고딕"/>
               </a:rPr>
-              <a:t>현장이 2곳이므로 정상 가동 시 파이썬 프로세스는 3 x 2 = 6개가 실행됩니다.</a:t>
+              <a:t>현장이 2곳이므로 정상 가동 시 파이썬 프로세스는 3 x 2 = 6개가 실행됨</a:t>
             </a:r>
           </a:p>
         </p:txBody>
@@ -18360,7 +18365,7 @@
                 <a:ea typeface="맑은 고딕"/>
                 <a:cs typeface="맑은 고딕"/>
               </a:rPr>
-              <a:t>세 단계는 차례로 서고, 선 뒤에도 물러나지 않습니다. 조건은 모두 [설정] 창에서 바꿉니다.</a:t>
+              <a:t>세 단계는 차례로 서고, 선 뒤에도 물러나지 않음 · 조건은 모두 [설정] 창에서 바꿈</a:t>
             </a:r>
           </a:p>
         </p:txBody>
@@ -19065,7 +19070,7 @@
                 <a:ea typeface="맑은 고딕"/>
                 <a:cs typeface="맑은 고딕"/>
               </a:rPr>
-              <a:t>네 칸을 모두 채우거나 모두 비웁니다. 섞이면 저장을 막습니다.</a:t>
+              <a:t>네 칸을 모두 채우거나 모두 비움 · 섞이면 저장을 막음</a:t>
             </a:r>
           </a:p>
         </p:txBody>
@@ -19722,7 +19727,7 @@
                 <a:ea typeface="맑은 고딕"/>
                 <a:cs typeface="맑은 고딕"/>
               </a:rPr>
-              <a:t>시간대 조건이 있는 이유: 낮만 모은 임계값은 밤을 모릅니다.</a:t>
+              <a:t>시간대 조건이 있는 이유: 낮만 모은 임계값은 밤을 모름</a:t>
             </a:r>
           </a:p>
         </p:txBody>
@@ -20335,7 +20340,7 @@
                 <a:ea typeface="맑은 고딕"/>
                 <a:cs typeface="맑은 고딕"/>
               </a:rPr>
-              <a:t>승격해도 2단계는 함께 돕니다. 두 점수 중 낮은 쪽을 씁니다.</a:t>
+              <a:t>승격해도 2단계는 함께 돎 · 두 점수 중 낮은 쪽을 씀</a:t>
             </a:r>
           </a:p>
         </p:txBody>
@@ -20537,7 +20542,7 @@
                 <a:ea typeface="맑은 고딕"/>
                 <a:cs typeface="맑은 고딕"/>
               </a:rPr>
-              <a:t>경험 임계값이 세는 것은 모델의 오차가 아니라 칸의 온도 그 자체입니다. 그래서 모델을 갈아도 그대로 맞습니다.</a:t>
+              <a:t>경험 임계값이 세는 것은 모델의 오차가 아니라 칸의 온도 그 자체임 · 그래서 모델을 갈아도 그대로 맞음</a:t>
             </a:r>
           </a:p>
         </p:txBody>
@@ -20672,7 +20677,7 @@
                 <a:ea typeface="맑은 고딕"/>
                 <a:cs typeface="맑은 고딕"/>
               </a:rPr>
-              <a:t>두 가지가 모두 맞을 때만 한 프레임이 들어갑니다.</a:t>
+              <a:t>두 가지가 모두 맞을 때만 한 프레임이 들어감</a:t>
             </a:r>
           </a:p>
           <a:p>
@@ -20738,7 +20743,7 @@
                 <a:ea typeface="맑은 고딕"/>
                 <a:cs typeface="맑은 고딕"/>
               </a:rPr>
-              <a:t>이상으로 본 프레임을 넣으면 서서히 커지는 열점을 "요즘의 정상" 으로 흡수합니다.</a:t>
+              <a:t>이상으로 본 프레임을 넣으면 서서히 커지는 열점을 "요즘의 정상" 으로 흡수함</a:t>
             </a:r>
           </a:p>
         </p:txBody>
@@ -20782,7 +20787,7 @@
                 <a:ea typeface="맑은 고딕"/>
                 <a:cs typeface="맑은 고딕"/>
               </a:rPr>
-              <a:t>창은 최근 것만 듭니다 (고리 버퍼)</a:t>
+              <a:t>창은 최근 것만 듦 (고리 버퍼)</a:t>
             </a:r>
           </a:p>
         </p:txBody>
@@ -20873,7 +20878,7 @@
                 <a:ea typeface="맑은 고딕"/>
                 <a:cs typeface="맑은 고딕"/>
               </a:rPr>
-              <a:t>최소 조건(3,000건 · 18시간대)을 지키는 선까지만 들고, 그 위로는 오래된 것부터 밀어냅니다. 상한 50,000건.</a:t>
+              <a:t>최소 조건(3,000건 · 18시간대)을 지키는 선까지만 들고, 그 위로는 오래된 것부터 밀어냄 · 상한 50,000건.</a:t>
             </a:r>
           </a:p>
           <a:p>
@@ -20897,7 +20902,7 @@
                 <a:ea typeface="맑은 고딕"/>
                 <a:cs typeface="맑은 고딕"/>
               </a:rPr>
-              <a:t>그래서 기간을 길게 잡아도 내용은 같습니다. 7월부터 넣든 최근 5일만 넣든 남는 것은 최근 3,000건입니다.</a:t>
+              <a:t>그래서 기간을 길게 잡아도 내용은 같음 · 7월부터 넣든 최근 5일만 넣든 남는 것은 최근 3,000건임</a:t>
             </a:r>
           </a:p>
           <a:p>
@@ -20921,7 +20926,7 @@
                 <a:ea typeface="맑은 고딕"/>
                 <a:cs typeface="맑은 고딕"/>
               </a:rPr>
-              <a:t>200건마다 저장합니다. 비정상 종료 시 최대 199건을 잃습니다.</a:t>
+              <a:t>200건마다 저장함 · 비정상 종료 시 최대 199건을 잃음</a:t>
             </a:r>
           </a:p>
         </p:txBody>
@@ -21593,7 +21598,7 @@
                 <a:ea typeface="맑은 고딕"/>
                 <a:cs typeface="맑은 고딕"/>
               </a:rPr>
-              <a:t>되돌리기는 경험 임계값을 건드리지 않습니다</a:t>
+              <a:t>되돌리기는 경험 임계값을 건드리지 않음</a:t>
             </a:r>
           </a:p>
         </p:txBody>
@@ -21640,7 +21645,7 @@
                 <a:ea typeface="맑은 고딕"/>
                 <a:cs typeface="맑은 고딕"/>
               </a:rPr>
-              <a:t>[되돌리기] 는 오토인코더 모델만 세대 단위로 돌립니다. 치운 임계값은 지우지 않고 _retired_baseline 에 보관합니다.</a:t>
+              <a:t>[되돌리기] 는 오토인코더 모델만 세대 단위로 돌림 · 치운 임계값은 지우지 않고 _retired_baseline 에 보관함</a:t>
             </a:r>
           </a:p>
         </p:txBody>
@@ -21684,7 +21689,7 @@
                 <a:ea typeface="맑은 고딕"/>
                 <a:cs typeface="맑은 고딕"/>
               </a:rPr>
-              <a:t>사유는 baseline_reset.ini 에 남고 [설정] 창 [현재 진행] 에 나옵니다.</a:t>
+              <a:t>사유는 baseline_reset.ini 에 남고 [설정] 창 [현재 진행] 에 나옴</a:t>
             </a:r>
           </a:p>
         </p:txBody>
@@ -21816,7 +21821,7 @@
                 <a:ea typeface="맑은 고딕"/>
                 <a:cs typeface="맑은 고딕"/>
               </a:rPr>
-              <a:t>python retrain/rebuild_baseline.py &lt;user&gt;   — 히스토리 DB 의 프레임으로 한 번에 다시 쌓습니다 (하루 대기 불필요)</a:t>
+              <a:t>python retrain/rebuild_baseline.py &lt;user&gt;   — 히스토리 DB 의 프레임으로 한 번에 다시 쌓음 (하루 대기 불필요)</a:t>
             </a:r>
           </a:p>
         </p:txBody>
@@ -21974,7 +21979,7 @@
                 <a:ea typeface="맑은 고딕"/>
                 <a:cs typeface="맑은 고딕"/>
               </a:rPr>
-              <a:t>재학습 - 창에서 눌러 돌립니다</a:t>
+              <a:t>재학습 - 창에서 눌러 돌림</a:t>
             </a:r>
           </a:p>
         </p:txBody>
@@ -22018,7 +22023,7 @@
                 <a:ea typeface="맑은 고딕"/>
                 <a:cs typeface="맑은 고딕"/>
               </a:rPr>
-              <a:t>히스토리 DB 에 이미 64셀 값이 쌓이고 있어, 별도 수집 장치 없이 갱신합니다. 정해진 시각에 저절로 돌지는 않습니다 - [재학습] 창에서 눌러야 돌고, 가운데에 진행 판이 떠 경과 시간과 단계를 보여 줍니다.</a:t>
+              <a:t>히스토리 DB 에 이미 64셀 값이 쌓이고 있어, 별도 수집 장치 없이 갱신함 · 정해진 시각에 저절로 돌지는 않음 - [재학습] 창에서 눌러야 돌고, 가운데에 진행 판이 떠 경과 시간과 단계를 보여 줌</a:t>
             </a:r>
           </a:p>
         </p:txBody>
@@ -22164,7 +22169,7 @@
                 <a:ea typeface="맑은 고딕"/>
                 <a:cs typeface="맑은 고딕"/>
               </a:rPr>
-              <a:t>날짜마다 같은 몫으로, 하루 안에서는 시각 24칸에 고르게 표집합니다. 최근 것만 쓰면 여름에 겨울 패턴을 잊습니다.</a:t>
+              <a:t>날짜마다 같은 몫으로, 하루 안에서는 시각 24칸에 고르게 표집함 · 최근 것만 쓰면 여름에 겨울 패턴을 잊음</a:t>
             </a:r>
           </a:p>
         </p:txBody>
@@ -22310,7 +22315,7 @@
                 <a:ea typeface="맑은 고딕"/>
                 <a:cs typeface="맑은 고딕"/>
               </a:rPr>
-              <a:t>서빙과 같은 환경에서 학습하므로 numpy 버전 문제가 없습니다. 모델이 작아 CPU 로 수 분입니다. 다음 장에 전체 흐름도가 있습니다.</a:t>
+              <a:t>서빙과 같은 환경에서 학습하므로 numpy 버전 문제가 없음 · 모델이 작아 CPU 로 수 분임 · 다음 장에 전체 흐름도가 있음</a:t>
             </a:r>
           </a:p>
         </p:txBody>
@@ -22456,7 +22461,7 @@
                 <a:ea typeface="맑은 고딕"/>
                 <a:cs typeface="맑은 고딕"/>
               </a:rPr>
-              <a:t>정상 적합도만 보면 절반만 본 것입니다. 합성 이상을 주입해 여전히 잡아내는지 함께 봅니다.</a:t>
+              <a:t>정상 적합도만 보면 절반만 본 것임 · 합성 이상을 주입해 여전히 잡아내는지 함께 봄</a:t>
             </a:r>
           </a:p>
         </p:txBody>
@@ -22602,7 +22607,7 @@
                 <a:ea typeface="맑은 고딕"/>
                 <a:cs typeface="맑은 고딕"/>
               </a:rPr>
-              <a:t>재학습을 실제로 돌린 경우만 보관합니다(10세대). 예행연습은 아무것도 남기지 않습니다. 되돌리기는 다음 장에서 다룹니다.</a:t>
+              <a:t>재학습을 실제로 돌린 경우만 보관함(10세대). 예행연습은 아무것도 남기지 않음 · 되돌리기는 다음 장에서 다룸</a:t>
             </a:r>
           </a:p>
         </p:txBody>
@@ -23608,7 +23613,7 @@
                 <a:ea typeface="맑은 고딕"/>
                 <a:cs typeface="맑은 고딕"/>
               </a:rPr>
-              <a:t>검증 구간이 최근이라 후보에 유리한 비교입니다. "지금 데이터에 어느 쪽이 맞는가" 로 보십시오.</a:t>
+              <a:t>검증 구간이 최근이라 후보에 유리한 비교임 · "지금 데이터에 어느 쪽이 맞는가" 로 볼 것</a:t>
             </a:r>
           </a:p>
         </p:txBody>
@@ -23766,7 +23771,7 @@
                 <a:ea typeface="맑은 고딕"/>
                 <a:cs typeface="맑은 고딕"/>
               </a:rPr>
-              <a:t>재학습은 이렇게 흐릅니다</a:t>
+              <a:t>재학습은 이렇게 흐름</a:t>
             </a:r>
           </a:p>
         </p:txBody>
@@ -23810,7 +23815,7 @@
                 <a:ea typeface="맑은 고딕"/>
                 <a:cs typeface="맑은 고딕"/>
               </a:rPr>
-              <a:t>[재학습] 창에서 [예행연습] 이나 [재학습 적용] 을 눌러 시작합니다. 위 줄은 준비, 아래 줄은 학습과 승격입니다.</a:t>
+              <a:t>[재학습] 창에서 [예행연습] 이나 [재학습 적용] 을 눌러 시작함 · 위 줄은 준비, 아래 줄은 학습과 승격임</a:t>
             </a:r>
           </a:p>
         </p:txBody>
@@ -24312,7 +24317,7 @@
                 <a:ea typeface="맑은 고딕"/>
                 <a:cs typeface="맑은 고딕"/>
               </a:rPr>
-              <a:t>점수와 표본 선별에 씁니다</a:t>
+              <a:t>점수와 표본 선별에 씀</a:t>
             </a:r>
           </a:p>
           <a:p>
@@ -25521,7 +25526,7 @@
                 <a:ea typeface="맑은 고딕"/>
                 <a:cs typeface="맑은 고딕"/>
               </a:rPr>
-              <a:t>10세대까지 남깁니다</a:t>
+              <a:t>10세대까지 남긺</a:t>
             </a:r>
           </a:p>
         </p:txBody>
@@ -26040,7 +26045,7 @@
                 <a:ea typeface="맑은 고딕"/>
                 <a:cs typeface="맑은 고딕"/>
               </a:rPr>
-              <a:t>둥근 칸은 갈림길입니다. 보류로 끝나도 운용 모델은 그대로이고, 적용 중 시험에서 막힌 후보는 세대로 남아 왜 막혔는지 보고서로 볼 수 있습니다. 예행연습은 세대를 만들지 않습니다.</a:t>
+              <a:t>둥근 칸은 갈림길임 · 보류로 끝나도 운용 모델은 그대로이고, 적용 중 시험에서 막힌 후보는 세대로 남아 왜 막혔는지 보고서로 볼 수 있음 · 예행연습은 세대를 만들지 않음</a:t>
             </a:r>
           </a:p>
           <a:p>
@@ -26064,7 +26069,7 @@
                 <a:ea typeface="맑은 고딕"/>
                 <a:cs typeface="맑은 고딕"/>
               </a:rPr>
-              <a:t>[자동 재학습] 을 켜 두면 감시가 기여 w &lt; 1.00 일 때 이 흐름을 스스로 시작하고, 시험을 통과하면 바로 승격합니다. 간격(기본 24시간)을 두고 돌며 결과는 auto_retrain_history.txt 에 쌓입니다. 켜고 끄는 것은 [저장] 으로 확인한 뒤 반영됩니다.</a:t>
+              <a:t>[자동 재학습] 을 켜 두면 감시가 기여 w &lt; 1.00 일 때 이 흐름을 스스로 시작하고, 시험을 통과하면 바로 승격함 · 간격(기본 24시간)을 두고 돌며 결과는 auto_retrain_history.txt 에 쌓임 · 켜고 끄는 것은 [저장] 으로 확인한 뒤 반영됨</a:t>
             </a:r>
           </a:p>
         </p:txBody>
@@ -26266,7 +26271,7 @@
                 <a:ea typeface="맑은 고딕"/>
                 <a:cs typeface="맑은 고딕"/>
               </a:rPr>
-              <a:t>이동은 재서 알려 주기만 합니다. 이미지도 마스크도 자동으로 되돌리지 않습니다.</a:t>
+              <a:t>이동은 재서 알려 주기만 함 · 이미지도 마스크도 자동으로 되돌리지 않음</a:t>
             </a:r>
           </a:p>
         </p:txBody>
@@ -26492,7 +26497,7 @@
                 <a:ea typeface="맑은 고딕"/>
                 <a:cs typeface="맑은 고딕"/>
               </a:rPr>
-              <a:t>64칸의 느린 EWMA 와 장기 평균의 상관. 0.95 미만이면 누적을 멈춥니다.</a:t>
+              <a:t>64칸의 느린 EWMA 와 장기 평균의 상관. 0.95 미만이면 누적을 멈춤</a:t>
             </a:r>
           </a:p>
         </p:txBody>
@@ -26583,7 +26588,7 @@
                 <a:ea typeface="맑은 고딕"/>
                 <a:cs typeface="맑은 고딕"/>
               </a:rPr>
-              <a:t>response 가 0.30 미만이면 '판정 불가'. 거짓말보다 낫습니다.</a:t>
+              <a:t>response 가 0.30 미만이면 '판정 불가'. 거짓말보다 나음</a:t>
             </a:r>
           </a:p>
         </p:txBody>
@@ -26718,7 +26723,7 @@
                 <a:ea typeface="맑은 고딕"/>
                 <a:cs typeface="맑은 고딕"/>
               </a:rPr>
-              <a:t>되돌려도 score 가 0.088 에서 0.365 까지밖에 오르지 않습니다(정상 0.952). 게다가 가장자리에 공백이 생기고, 무엇으로 채우든 지어낸 값이 64차원 입력 전체를 흐립니다.</a:t>
+              <a:t>되돌려도 score 가 0.088 에서 0.365 까지밖에 오르지 않음(정상 0.952). 게다가 가장자리에 공백이 생기고, 무엇으로 채우든 지어낸 값이 64차원 입력 전체를 흐림</a:t>
             </a:r>
           </a:p>
         </p:txBody>
@@ -27337,7 +27342,7 @@
                 <a:ea typeface="맑은 고딕"/>
                 <a:cs typeface="맑은 고딕"/>
               </a:rPr>
-              <a:t>7월 자료를 일부러 밀어 잰 값입니다. 3칸을 밀어도 0.890 인데 kict1 은 1.3칸에 0.088 입니다. 칸 수는 모델 손상을 예측하지 못합니다.</a:t>
+              <a:t>7월 자료를 일부러 밀어 잰 값임 · 3칸을 밀어도 0.890 인데 kict1 은 1.3칸에 0.088 임 · 칸 수는 모델 손상을 예측하지 못함</a:t>
             </a:r>
           </a:p>
         </p:txBody>
@@ -27428,7 +27433,7 @@
                 <a:ea typeface="맑은 고딕"/>
                 <a:cs typeface="맑은 고딕"/>
               </a:rPr>
-              <a:t>그래서 2칸 이상이면 [설정] 화면에 '현장 조준 확인' 을 띄웁니다. 자동 보정이 아니라 사람에게 알리는 용도입니다.</a:t>
+              <a:t>그래서 2칸 이상이면 [설정] 화면에 '현장 조준 확인' 을 띄움 · 자동 보정이 아니라 사람에게 알리는 용도임</a:t>
             </a:r>
           </a:p>
         </p:txBody>
@@ -27630,7 +27635,7 @@
                 <a:ea typeface="맑은 고딕"/>
                 <a:cs typeface="맑은 고딕"/>
               </a:rPr>
-              <a:t>몇 칸 밀렸는지가 아니라 지금 몇 점을 내고 있는지로 정합니다. 점수는 표본을 지금 모델로 다시 매겨 구합니다.</a:t>
+              <a:t>몇 칸 밀렸는지가 아니라 지금 몇 점을 내고 있는지로 정함 · 점수는 표본을 지금 모델로 다시 매겨 구함</a:t>
             </a:r>
           </a:p>
         </p:txBody>
@@ -27721,7 +27726,7 @@
                 <a:ea typeface="맑은 고딕"/>
                 <a:cs typeface="맑은 고딕"/>
               </a:rPr>
-              <a:t>판단 구간(다음 장)에서 최대 2,000건을 뽑아 지금 모델로 다시 매긴 점수의 중앙값입니다. DB 에 적힌 점수는 그때 돌던 모델의 것이라 쓰지 않습니다. 순간값 대신 중앙값을 쓰는 것은, 서서히 뜨거워지는 설비의 점수 하락을 그대로 재학습하면 경보가 사라지기 때문입니다.</a:t>
+              <a:t>판단 구간(다음 장)에서 최대 2,000건을 뽑아 지금 모델로 다시 매긴 점수의 중앙값임 · DB 에 적힌 점수는 그때 돌던 모델의 것이라 쓰지 않음 · 순간값 대신 중앙값을 쓰는 것은, 서서히 뜨거워지는 설비의 점수 하락을 그대로 재학습하면 경보가 사라지기 때문임</a:t>
             </a:r>
           </a:p>
         </p:txBody>
@@ -27765,7 +27770,7 @@
                 <a:ea typeface="맑은 고딕"/>
                 <a:cs typeface="맑은 고딕"/>
               </a:rPr>
-              <a:t>다음 프레임은 빼고 셉니다</a:t>
+              <a:t>다음 프레임은 빼고 셈</a:t>
             </a:r>
           </a:p>
         </p:txBody>
@@ -27856,7 +27861,7 @@
                 <a:ea typeface="맑은 고딕"/>
                 <a:cs typeface="맑은 고딕"/>
               </a:rPr>
-              <a:t>절대 임계값이 걸린 프레임 — 이상일 수 있는 구간은 근거가 못 됩니다</a:t>
+              <a:t>절대 임계값이 걸린 프레임 — 이상일 수 있는 구간은 근거가 못 됨</a:t>
             </a:r>
           </a:p>
         </p:txBody>
@@ -27947,7 +27952,7 @@
                 <a:ea typeface="맑은 고딕"/>
                 <a:cs typeface="맑은 고딕"/>
               </a:rPr>
-              <a:t>열화상이 멈춘 프레임 — 같은 값이 반복되면 점수도 가짜입니다</a:t>
+              <a:t>열화상이 멈춘 프레임 — 같은 값이 반복되면 점수도 가짜임</a:t>
             </a:r>
           </a:p>
         </p:txBody>
@@ -28387,7 +28392,7 @@
                 <a:ea typeface="맑은 고딕"/>
                 <a:cs typeface="맑은 고딕"/>
               </a:rPr>
-              <a:t>두 끝 사이는 직선으로 잇습니다</a:t>
+              <a:t>두 끝 사이는 직선으로 이음</a:t>
             </a:r>
           </a:p>
         </p:txBody>
@@ -28698,7 +28703,7 @@
                 <a:ea typeface="맑은 고딕"/>
                 <a:cs typeface="맑은 고딕"/>
               </a:rPr>
-              <a:t>두 끝 사이는 직선으로 이어 0.849 와 0.851 이 딴 학습이 되지 않게 합니다. 값은 [설정] 창에서, 기여 문턱은 [재학습] 창의 재생버퍼 동적구성 줄에서 바꿉니다.</a:t>
+              <a:t>두 끝 사이는 직선으로 이어 0.849 와 0.851 이 딴 학습이 되지 않게 함 · 값은 [설정] 창에서, 기여 문턱은 [재학습] 창의 재생버퍼 동적구성 줄에서 바꿈</a:t>
             </a:r>
           </a:p>
         </p:txBody>
@@ -28786,7 +28791,7 @@
                 <a:ea typeface="맑은 고딕"/>
                 <a:cs typeface="맑은 고딕"/>
               </a:rPr>
-              <a:t>w = 0 이어도 옛 모델을 잊지는 않습니다</a:t>
+              <a:t>w = 0 이어도 옛 모델을 잊지는 않음</a:t>
             </a:r>
           </a:p>
         </p:txBody>
@@ -28833,7 +28838,7 @@
                 <a:ea typeface="맑은 고딕"/>
                 <a:cs typeface="맑은 고딕"/>
               </a:rPr>
-              <a:t>가중치를 물려받지 않을 뿐, 감도 회귀 게이트의 비교 대상으로는 계속 씁니다. 새 모델이 옛 모델보다 둔해지면 승격을 막는 장치인데, 비교 대상이 없으면 그 장치가 무력해집니다.  또한 모델을 못 믿기로 했으면 그 모델의 점수로 학습 표본을 고르지도 않습니다 — 1단계 절대 임계값으로 거릅니다.</a:t>
+              <a:t>가중치를 물려받지 않을 뿐, 감도 회귀 게이트의 비교 대상으로는 계속 씀 · 새 모델이 옛 모델보다 둔해지면 승격을 막는 장치인데, 비교 대상이 없으면 그 장치가 무력해짐 · 또한 모델을 못 믿기로 했으면 그 모델의 점수로 학습 표본을 고르지도 않음 — 1단계 절대 임계값으로 거름</a:t>
             </a:r>
           </a:p>
         </p:txBody>
@@ -28921,7 +28926,7 @@
                 <a:ea typeface="맑은 고딕"/>
                 <a:cs typeface="맑은 고딕"/>
               </a:rPr>
-              <a:t>기여 문턱과 w 는 재생버퍼 동적구성을 켰을 때만 쓰입니다. 끄면 늘 웜스타트하고 옛/새를 가르지 않습니다. 학습률은 w 와 무관하게 고정입니다.</a:t>
+              <a:t>기여 문턱과 w 는 재생버퍼 동적구성을 켰을 때만 쓰임 · 끄면 늘 웜스타트하고 옛/새를 가르지 않음 · 학습률은 w 와 무관하게 고정임</a:t>
             </a:r>
           </a:p>
         </p:txBody>
@@ -29123,7 +29128,7 @@
                 <a:ea typeface="맑은 고딕"/>
                 <a:cs typeface="맑은 고딕"/>
               </a:rPr>
-              <a:t>지금 모델이 최근 변화를 잘 받아들이는지 보는 구간입니다. 학습 표본을 뽑는 구간과 같을 필요가 없습니다.</a:t>
+              <a:t>지금 모델이 최근 변화를 잘 받아들이는지 보는 구간임 · 학습 표본을 뽑는 구간과 같을 필요가 없음</a:t>
             </a:r>
           </a:p>
         </p:txBody>
@@ -29313,7 +29318,7 @@
                 <a:ea typeface="맑은 고딕"/>
                 <a:cs typeface="맑은 고딕"/>
               </a:rPr>
-              <a:t>N 은 [설정] 창의 판단 최소 일수입니다. 날짜별 테이블(results_history_YYYYMMDD)을 새것부터 N개 가져옵니다.</a:t>
+              <a:t>N 은 [설정] 창의 판단 최소 일수임 · 날짜별 테이블(results_history_YYYYMMDD)을 새것부터 N개 가져옴</a:t>
             </a:r>
           </a:p>
         </p:txBody>
@@ -29459,7 +29464,7 @@
                 <a:ea typeface="맑은 고딕"/>
                 <a:cs typeface="맑은 고딕"/>
               </a:rPr>
-              <a:t>가장 새 테이블 날짜에서 N-1일보다 앞선 것을 버립니다. 시계가 아니라 테이블 이름끼리 견주고, 빈 날이 있으면 N개보다 적게 남습니다.</a:t>
+              <a:t>가장 새 테이블 날짜에서 N-1일보다 앞선 것을 버림 · 시계가 아니라 테이블 이름끼리 견주고, 빈 날이 있으면 N개보다 적게 남음</a:t>
             </a:r>
           </a:p>
         </p:txBody>
@@ -29605,7 +29610,7 @@
                 <a:ea typeface="맑은 고딕"/>
                 <a:cs typeface="맑은 고딕"/>
               </a:rPr>
-              <a:t>동적구성을 켜면 재생 버퍼가 이 구간을 새 시기, 그 앞을 옛 시기로 가르고 w : 1-w 로 섞습니다. 표본이 모자라면 판단을 보류합니다.</a:t>
+              <a:t>동적구성을 켜면 재생 버퍼가 이 구간을 새 시기, 그 앞을 옛 시기로 가르고 w : 1-w 로 섞음 · 표본이 모자라면 판단을 보류함</a:t>
             </a:r>
           </a:p>
         </p:txBody>
@@ -31534,7 +31539,7 @@
                 <a:ea typeface="맑은 고딕"/>
                 <a:cs typeface="맑은 고딕"/>
               </a:rPr>
-              <a:t>켬 / 끔 = 재생버퍼 동적구성 (기본 끔). 끄면 옛/새를 가르지 않고 전체에서 뽑습니다.</a:t>
+              <a:t>켬 / 끔 = 재생버퍼 동적구성 (기본 끔). 끄면 옛/새를 가르지 않고 전체에서 뽑음</a:t>
             </a:r>
           </a:p>
         </p:txBody>
@@ -31669,7 +31674,7 @@
                 <a:ea typeface="맑은 고딕"/>
                 <a:cs typeface="맑은 고딕"/>
               </a:rPr>
-              <a:t>기여도는 '최근 변화를 받아들이나' 를 재므로 짧고 최근이어야 합니다. 재생 버퍼는 '무엇을 배울까' 라서 계절·가동 패턴을 잊지 않도록 수집 일수(기본 전체) 만큼 넓게 뽑습니다.</a:t>
+              <a:t>기여도는 '최근 변화를 받아들이나' 를 재므로 짧고 최근이어야 함 · 재생 버퍼는 '무엇을 배울까' 라서 계절·가동 패턴을 잊지 않도록 수집 일수(기본 전체) 만큼 넓게 뽑음</a:t>
             </a:r>
           </a:p>
           <a:p>
@@ -31693,7 +31698,7 @@
                 <a:ea typeface="맑은 고딕"/>
                 <a:cs typeface="맑은 고딕"/>
               </a:rPr>
-              <a:t>동적구성을 켜면 판단 구간이 재생 버퍼의 새 시기가 되어 w : 1-w 로 섞이고, 끄면 구간과 상관없이 전체에서 뽑습니다.</a:t>
+              <a:t>동적구성을 켜면 판단 구간이 재생 버퍼의 새 시기가 되어 w : 1-w 로 섞이고, 끄면 구간과 상관없이 전체에서 뽑음</a:t>
             </a:r>
           </a:p>
         </p:txBody>
@@ -31828,7 +31833,7 @@
                 <a:ea typeface="맑은 고딕"/>
                 <a:cs typeface="맑은 고딕"/>
               </a:rPr>
-              <a:t>재학습은 사람이 [재학습] 창에서 시작하거나, [자동 재학습] 을 켜면 w &lt; 1.00 일 때 감시가 시작합니다. 동적구성을 켜면 w 가 웜스타트 여부(w=0 이면 새로 초기화)와 옛 : 새 비율을 정하고, 끄면 늘 웜스타트합니다. 학습률은 고정입니다.</a:t>
+              <a:t>재학습은 사람이 [재학습] 창에서 시작하거나, [자동 재학습] 을 켜면 w &lt; 1.00 일 때 감시가 시작함 · 동적구성을 켜면 w 가 웜스타트 여부(w=0 이면 새로 초기화)와 옛 : 새 비율을 정하고, 끄면 늘 웜스타트함 · 학습률은 고정임</a:t>
             </a:r>
           </a:p>
           <a:p>
@@ -31852,7 +31857,7 @@
                 <a:ea typeface="맑은 고딕"/>
                 <a:cs typeface="맑은 고딕"/>
               </a:rPr>
-              <a:t>구간 안에 근거가 모자라면(표본 500건 미만) 판단을 보류하고 w 는 1.00 으로 둡니다. 모르는 것을 이유로 모델을 버리지 않기 위해서입니다.</a:t>
+              <a:t>구간 안에 근거가 모자라면(표본 500건 미만) 판단을 보류하고 w 는 1.00 으로 둠 · 모르는 것을 이유로 모델을 버리지 않기 위해서임</a:t>
             </a:r>
           </a:p>
         </p:txBody>
@@ -32054,7 +32059,7 @@
                 <a:ea typeface="맑은 고딕"/>
                 <a:cs typeface="맑은 고딕"/>
               </a:rPr>
-              <a:t>감도 시험을 통과한 모델도 현장에서 겪어 보면 아닐 수 있습니다. [재학습] 창에서 세대를 골라 되돌립니다.</a:t>
+              <a:t>감도 시험을 통과한 모델도 현장에서 겪어 보면 아닐 수 있음 · [재학습] 창에서 세대를 골라 되돌림</a:t>
             </a:r>
           </a:p>
         </p:txBody>
@@ -32313,7 +32318,7 @@
                 <a:ea typeface="Consolas"/>
                 <a:cs typeface="Consolas"/>
               </a:rPr>
-              <a:t>   20260923_145111   운용된 적 있음       승격과 되돌림을 남깁니다. 목록에</a:t>
+              <a:t>   20260923_145111   운용된 적 있음       승격과 되돌림을 남긺 · 목록에</a:t>
             </a:r>
           </a:p>
           <a:p>
@@ -32337,7 +32342,7 @@
                 <a:ea typeface="Consolas"/>
                 <a:cs typeface="Consolas"/>
               </a:rPr>
-              <a:t>   20260924_121452   운용된 적 있음       담는 것은 여기 있는 세대뿐입니다.</a:t>
+              <a:t>   20260924_121452   운용된 적 있음       담는 것은 여기 있는 세대뿐임</a:t>
             </a:r>
           </a:p>
           <a:p>
@@ -32520,7 +32525,7 @@
                 <a:ea typeface="맑은 고딕"/>
                 <a:cs typeface="맑은 고딕"/>
               </a:rPr>
-              <a:t>되돌리기도 승격으로 기록되므로, 늘 한 걸음 뒤로만 가면 두 세대 사이를 왕복할 뿐 더 앞으로는 못 갑니다. 그래서 목록에서 고릅니다.</a:t>
+              <a:t>되돌리기도 승격으로 기록되므로, 늘 한 걸음 뒤로만 가면 두 세대 사이를 왕복할 뿐 더 앞으로는 못 감 · 그래서 목록에서 고름</a:t>
             </a:r>
           </a:p>
           <a:p>
@@ -32544,7 +32549,7 @@
                 <a:ea typeface="맑은 고딕"/>
                 <a:cs typeface="맑은 고딕"/>
               </a:rPr>
-              <a:t>목록에는 운용에 올라간 적이 있는 세대만 담깁니다. 예행연습은 아무것도 남기지 않고, 시험에서 막힌 후보는 운용된 적이 없습니다.</a:t>
+              <a:t>목록에는 운용에 올라간 적이 있는 세대만 담긺 · 예행연습은 아무것도 남기지 않고, 시험에서 막힌 후보는 운용된 적이 없음</a:t>
             </a:r>
           </a:p>
         </p:txBody>
@@ -32632,7 +32637,7 @@
                 <a:ea typeface="맑은 고딕"/>
                 <a:cs typeface="맑은 고딕"/>
               </a:rPr>
-              <a:t>되돌려도 경험 임계값은 그대로 둡니다</a:t>
+              <a:t>되돌려도 경험 임계값은 그대로 둠</a:t>
             </a:r>
           </a:p>
         </p:txBody>
@@ -32679,7 +32684,7 @@
                 <a:ea typeface="맑은 고딕"/>
                 <a:cs typeface="맑은 고딕"/>
               </a:rPr>
-              <a:t>경험 임계값이 세는 것은 모델의 오차가 아니라 칸의 온도 그 자체라, 모델을 되돌려도 그대로 맞습니다.</a:t>
+              <a:t>경험 임계값이 세는 것은 모델의 오차가 아니라 칸의 온도 그 자체라, 모델을 되돌려도 그대로 맞음</a:t>
             </a:r>
           </a:p>
           <a:p>
@@ -32703,7 +32708,7 @@
                 <a:ea typeface="맑은 고딕"/>
                 <a:cs typeface="맑은 고딕"/>
               </a:rPr>
-              <a:t>되돌리기는 오토인코더 모델만 세대 단위로 돌립니다. 되돌린 뒤 [정지] -&gt; [시작] 이 필요합니다.</a:t>
+              <a:t>되돌리기는 오토인코더 모델만 세대 단위로 돌림 · 되돌린 뒤 [정지] -&gt; [시작] 이 필요함</a:t>
             </a:r>
           </a:p>
         </p:txBody>
@@ -32905,7 +32910,7 @@
                 <a:ea typeface="맑은 고딕"/>
                 <a:cs typeface="맑은 고딕"/>
               </a:rPr>
-              <a:t>[설정] 버튼을 누르면 창 아래가 펼쳐집니다. 값은 users\&lt;현장&gt;\continual_learning.ini 에 저장됩니다.</a:t>
+              <a:t>[설정] 버튼을 누르면 창 아래가 펼쳐짐 · 값은 users\&lt;현장&gt;\continual_learning.ini 에 저장됨</a:t>
             </a:r>
           </a:p>
         </p:txBody>
@@ -33807,7 +33812,7 @@
                 <a:ea typeface="맑은 고딕"/>
                 <a:cs typeface="맑은 고딕"/>
               </a:rPr>
-              <a:t>메인 창 현장 콤보 앞의 등은 이 셋을 접은 것입니다. 노랑이 하나라도 있으면 노랑, 셋 다 회색일 때만 회색, 그 밖에는 초록입니다. 프로세스가 죽었거나 DB 가 끊기면 그쪽이 이겨 빨강이 됩니다.</a:t>
+              <a:t>메인 창 현장 콤보 앞의 등은 이 셋을 접은 것임 · 노랑이 하나라도 있으면 노랑, 셋 다 회색일 때만 회색, 그 밖에는 초록임 · 프로세스가 죽었거나 DB 가 끊기면 그쪽이 이겨 빨강이 됨</a:t>
             </a:r>
           </a:p>
           <a:p>
@@ -33831,7 +33836,7 @@
                 <a:ea typeface="맑은 고딕"/>
                 <a:cs typeface="맑은 고딕"/>
               </a:rPr>
-              <a:t>네 묶음은 [설정 저장] 하나로 함께 저장하고, 값이 하나라도 잘못되면 아무것도 쓰지 않습니다. 동적구성·문턱·자동 재학습은 [재학습] 창의 [저장] 으로 저장합니다.</a:t>
+              <a:t>네 묶음은 [설정 저장] 하나로 함께 저장하고, 값이 하나라도 잘못되면 아무것도 쓰지 않음 · 동적구성·문턱·자동 재학습은 [재학습] 창의 [저장] 으로 저장함</a:t>
             </a:r>
           </a:p>
         </p:txBody>
@@ -34033,7 +34038,7 @@
                 <a:ea typeface="맑은 고딕"/>
                 <a:cs typeface="맑은 고딕"/>
               </a:rPr>
-              <a:t>히스토리 DB 에서 학습에 쓸 프레임을 골라 모읍니다. 앞쪽 [3단계·기여도] 이 '기존 모델을 믿을지' 라면, 여기는 '무엇으로 학습할지' 입니다.</a:t>
+              <a:t>히스토리 DB 에서 학습에 쓸 프레임을 골라 모음 · 앞쪽 [3단계·기여도] 이 '기존 모델을 믿을지' 라면, 여기는 '무엇으로 학습할지' 임</a:t>
             </a:r>
           </a:p>
         </p:txBody>
@@ -34223,7 +34228,7 @@
                 <a:ea typeface="맑은 고딕"/>
                 <a:cs typeface="맑은 고딕"/>
               </a:rPr>
-              <a:t>results_history_YYYYMMDD 를 훑습니다 (수집 일수가 있으면 그 안의 것만)</a:t>
+              <a:t>results_history_YYYYMMDD 를 훑음 (수집 일수가 있으면 그 안의 것만)</a:t>
             </a:r>
           </a:p>
         </p:txBody>
@@ -34369,7 +34374,7 @@
                 <a:ea typeface="맑은 고딕"/>
                 <a:cs typeface="맑은 고딕"/>
               </a:rPr>
-              <a:t>모델 점수로 거르면 모델이 못 맞히는 구간이 학습에서 빠져 맹점이 고착됩니다</a:t>
+              <a:t>모델 점수로 거르면 모델이 못 맞히는 구간이 학습에서 빠져 맹점이 고착됨</a:t>
             </a:r>
           </a:p>
         </p:txBody>
@@ -34515,7 +34520,7 @@
                 <a:ea typeface="맑은 고딕"/>
                 <a:cs typeface="맑은 고딕"/>
               </a:rPr>
-              <a:t>하루 몫 = 최대 표본 수 / 일수. 모자란 날의 몫은 다른 날로 넘깁니다</a:t>
+              <a:t>하루 몫 = 최대 표본 수 / 일수. 모자란 날의 몫은 다른 날로 넘긺</a:t>
             </a:r>
           </a:p>
         </p:txBody>
@@ -34661,7 +34666,7 @@
                 <a:ea typeface="맑은 고딕"/>
                 <a:cs typeface="맑은 고딕"/>
               </a:rPr>
-              <a:t>하루 몫을 24개 시각에 같게 나눕니다. 모자라면 복제하지 않고 있는 만큼만</a:t>
+              <a:t>하루 몫을 24개 시각에 같게 나눔 · 모자라면 복제하지 않고 있는 만큼만</a:t>
             </a:r>
           </a:p>
         </p:txBody>
@@ -34705,7 +34710,7 @@
                 <a:ea typeface="맑은 고딕"/>
                 <a:cs typeface="맑은 고딕"/>
               </a:rPr>
-              <a:t>[설정] · [재학습] 창에서 정합니다</a:t>
+              <a:t>[설정] · [재학습] 창에서 정함</a:t>
             </a:r>
           </a:p>
         </p:txBody>
@@ -34969,7 +34974,7 @@
                 <a:ea typeface="맑은 고딕"/>
                 <a:cs typeface="맑은 고딕"/>
               </a:rPr>
-              <a:t>최대 이만큼 모읍니다</a:t>
+              <a:t>최대 이만큼 모음</a:t>
             </a:r>
           </a:p>
         </p:txBody>
@@ -35280,7 +35285,7 @@
                 <a:ea typeface="맑은 고딕"/>
                 <a:cs typeface="맑은 고딕"/>
               </a:rPr>
-              <a:t>가동/정지는 따로 나누지 않습니다. 온도로 갈라 보니 가동과 정지가 아니라 드문 고온 구간만 떨어져 나왔고(cj_busan_1: 98도, 고온 프레임이 자료의 6.6% -&gt; 표본의 6.0%), 표본 구성도 거의 바뀌지 않았습니다. 날짜와 시각만 고르게 맞춥니다.</a:t>
+              <a:t>가동/정지는 따로 나누지 않음 · 온도로 갈라 보니 가동과 정지가 아니라 드문 고온 구간만 떨어져 나왔고(cj_busan_1: 98도, 고온 프레임이 자료의 6.6% -&gt; 표본의 6.0%), 표본 구성도 거의 바뀌지 않았음 · 날짜와 시각만 고르게 맞춤</a:t>
             </a:r>
           </a:p>
         </p:txBody>
@@ -35368,7 +35373,7 @@
                 <a:ea typeface="맑은 고딕"/>
                 <a:cs typeface="맑은 고딕"/>
               </a:rPr>
-              <a:t>날짜마다 같은 몫이고, 하루 안에서는 시각마다 고르게 뽑습니다</a:t>
+              <a:t>날짜마다 같은 몫이고, 하루 안에서는 시각마다 고르게 뽑음</a:t>
             </a:r>
           </a:p>
         </p:txBody>
@@ -35415,7 +35420,7 @@
                 <a:ea typeface="맑은 고딕"/>
                 <a:cs typeface="맑은 고딕"/>
               </a:rPr>
-              <a:t>하루에 프레임이 몇 건 쌓였든 하루의 비중은 같습니다. 그날 몫 안에서는 시각 24칸이 같은 몫을 받고, 칸 안에서는 모든 프레임이 같은 확률입니다.</a:t>
+              <a:t>하루에 프레임이 몇 건 쌓였든 하루의 비중은 같음 · 그날 몫 안에서는 시각 24칸이 같은 몫을 받고, 칸 안에서는 모든 프레임이 같은 확률임</a:t>
             </a:r>
           </a:p>
           <a:p>
@@ -35439,7 +35444,7 @@
                 <a:ea typeface="맑은 고딕"/>
                 <a:cs typeface="맑은 고딕"/>
               </a:rPr>
-              <a:t>기간이 길수록 하루의 몫이 작아집니다(180일이면 하루 약 110건). 오래된 자료의 비중을 줄이려면 재학습 수집 일수로 기간을 자르거나 재생버퍼 동적구성을 쓰십시오.</a:t>
+              <a:t>기간이 길수록 하루의 몫이 작아짐(180일이면 하루 약 110건). 오래된 자료의 비중을 줄이려면 재학습 수집 일수로 기간을 자르거나 재생버퍼 동적구성을 쓸 것</a:t>
             </a:r>
           </a:p>
         </p:txBody>
@@ -35597,7 +35602,7 @@
                 <a:ea typeface="맑은 고딕"/>
                 <a:cs typeface="맑은 고딕"/>
               </a:rPr>
-              <a:t>데이터는 이렇게 흐릅니다</a:t>
+              <a:t>데이터는 이렇게 흐름</a:t>
             </a:r>
           </a:p>
         </p:txBody>
@@ -37001,7 +37006,7 @@
                 <a:ea typeface="맑은 고딕"/>
                 <a:cs typeface="맑은 고딕"/>
               </a:rPr>
-              <a:t>수집 주기는 현장마다 다릅니다</a:t>
+              <a:t>수집 주기는 현장마다 다름</a:t>
             </a:r>
           </a:p>
           <a:p>
@@ -37025,7 +37030,7 @@
                 <a:ea typeface="맑은 고딕"/>
                 <a:cs typeface="맑은 고딕"/>
               </a:rPr>
-              <a:t>관제서버의 파일이 갱신되지 않으면 같은 값이 반복 입력되어 점수가 고정됩니다. 센서 타임스탬프(ts)가 최신인지 debug_logs 에서 확인하십시오.</a:t>
+              <a:t>관제서버의 파일이 갱신되지 않으면 같은 값이 반복 입력되어 점수가 고정됨 · 센서 타임스탬프(ts)가 최신인지 debug_logs 에서 확인할 것</a:t>
             </a:r>
           </a:p>
         </p:txBody>
@@ -37116,7 +37121,7 @@
                 <a:ea typeface="맑은 고딕"/>
                 <a:cs typeface="맑은 고딕"/>
               </a:rPr>
-              <a:t>분석 결과는 관제서버로 올라가지 않습니다</a:t>
+              <a:t>분석 결과는 관제서버로 올라가지 않음</a:t>
             </a:r>
           </a:p>
           <a:p>
@@ -37140,7 +37145,7 @@
                 <a:ea typeface="맑은 고딕"/>
                 <a:cs typeface="맑은 고딕"/>
               </a:rPr>
-              <a:t>점수와 판정 이력은 분석서버의 MySQL 에만 쌓입니다. 밖으로 나가는 것은 화재 감지 시의 SMS 발송뿐입니다. 관제서버에는 raw 원본이 남으므로 분석서버 이력이 사라져도 재분석은 가능합니다.</a:t>
+              <a:t>점수와 판정 이력은 분석서버의 MySQL 에만 쌓임 · 밖으로 나가는 것은 화재 감지 시의 SMS 발송뿐임 · 관제서버에는 raw 원본이 남으므로 분석서버 이력이 사라져도 재분석은 가능함</a:t>
             </a:r>
           </a:p>
         </p:txBody>
@@ -37342,7 +37347,7 @@
                 <a:ea typeface="맑은 고딕"/>
                 <a:cs typeface="맑은 고딕"/>
               </a:rPr>
-              <a:t>적응(무엇이 정상인가 배우기)과 탐지(이상을 알리기)는 반드시 분리되어야 합니다.</a:t>
+              <a:t>적응(무엇이 정상인가 배우기)과 탐지(이상을 알리기)는 반드시 분리되어야 함</a:t>
             </a:r>
           </a:p>
         </p:txBody>
@@ -37532,7 +37537,7 @@
                 <a:ea typeface="맑은 고딕"/>
                 <a:cs typeface="맑은 고딕"/>
               </a:rPr>
-              <a:t>서서히 커지는 열점을 '요즘의 정상' 으로 흡수하면, 정작 위험할 때 경보가 나오지 않습니다.</a:t>
+              <a:t>서서히 커지는 열점을 '요즘의 정상' 으로 흡수하면, 정작 위험할 때 경보가 나오지 않음</a:t>
             </a:r>
           </a:p>
         </p:txBody>
@@ -37722,7 +37727,7 @@
                 <a:ea typeface="맑은 고딕"/>
                 <a:cs typeface="맑은 고딕"/>
               </a:rPr>
-              <a:t>평소가 무엇이든 상관없이 고정된 선을 지킵니다. 학습 기반 판정이 모두 실패해도 남습니다.</a:t>
+              <a:t>평소가 무엇이든 상관없이 고정된 선을 지킴 · 학습 기반 판정이 모두 실패해도 남음</a:t>
             </a:r>
           </a:p>
         </p:txBody>
@@ -37912,7 +37917,7 @@
                 <a:ea typeface="맑은 고딕"/>
                 <a:cs typeface="맑은 고딕"/>
               </a:rPr>
-              <a:t>카메라가 밀리면 학습을 멈추고 경보합니다. 조준을 되돌리면 자동으로 해제됩니다.</a:t>
+              <a:t>카메라가 밀리면 학습을 멈추고 경보함 · 조준을 되돌리면 자동으로 해제됨</a:t>
             </a:r>
           </a:p>
         </p:txBody>
@@ -38102,7 +38107,7 @@
                 <a:ea typeface="맑은 고딕"/>
                 <a:cs typeface="맑은 고딕"/>
               </a:rPr>
-              <a:t>절대 기준만으로는 세대마다 조금씩 나빠지는 것을 못 잡습니다.</a:t>
+              <a:t>절대 기준만으로는 세대마다 조금씩 나빠지는 것을 못 잡음</a:t>
             </a:r>
           </a:p>
         </p:txBody>
@@ -38190,7 +38195,7 @@
                 <a:ea typeface="맑은 고딕"/>
                 <a:cs typeface="맑은 고딕"/>
               </a:rPr>
-              <a:t>kict1 사례 — 카메라가 틀어진 뒤 모든 프레임이 이상으로 판정되어, 재생 버퍼가 비고 재학습이 자동 보류되었습니다. 규칙 1이 동작한 것입니다.</a:t>
+              <a:t>kict1 사례 — 카메라가 틀어진 뒤 모든 프레임이 이상으로 판정되어, 재생 버퍼가 비고 재학습이 자동 보류되었음 · 규칙 1이 동작한 것임</a:t>
             </a:r>
           </a:p>
         </p:txBody>
@@ -38392,7 +38397,7 @@
                 <a:ea typeface="맑은 고딕"/>
                 <a:cs typeface="맑은 고딕"/>
               </a:rPr>
-              <a:t>오토인코더는 그 현장을 본 적이 있어야 만들 수 있습니다. 첫날부터 3단계로 시작하려면 시운전 기간을 학습 기간으로 함께 쓰십시오.</a:t>
+              <a:t>오토인코더는 그 현장을 본 적이 있어야 만들 수 있음 · 첫날부터 3단계로 시작하려면 시운전 기간을 학습 기간으로 함께 쓸 것</a:t>
             </a:r>
           </a:p>
         </p:txBody>
@@ -40639,7 +40644,7 @@
                 <a:ea typeface="맑은 고딕"/>
                 <a:cs typeface="맑은 고딕"/>
               </a:rPr>
-              <a:t>다른 현장의 모델을 복사하지 마십시오</a:t>
+              <a:t>다른 현장의 모델을 복사하지 말 것</a:t>
             </a:r>
           </a:p>
         </p:txBody>
@@ -40686,7 +40691,7 @@
                 <a:ea typeface="맑은 고딕"/>
                 <a:cs typeface="맑은 고딕"/>
               </a:rPr>
-              <a:t>모델이 아는 것은 "22번 칸은 보통 60도" 같은 칸 번호와 온도의 대응입니다. 같은 번호라도 현장마다 가리키는 실제 위치가 다릅니다.</a:t>
+              <a:t>모델이 아는 것은 "22번 칸은 보통 60도" 같은 칸 번호와 온도의 대응임 · 같은 번호라도 현장마다 가리키는 실제 위치가 다름</a:t>
             </a:r>
           </a:p>
           <a:p>
@@ -40710,7 +40715,7 @@
                 <a:ea typeface="맑은 고딕"/>
                 <a:cs typeface="맑은 고딕"/>
               </a:rPr>
-              <a:t>복사해도 오류 없이 돌아가고 점수도 나옵니다. 다만 그 값에 의미가 없습니다 — 조용히 틀린 답을 자신 있게 내놓는 상태입니다. 같은 카메라·같은 설비에서 PC만 교체하는 경우만 예외입니다.</a:t>
+              <a:t>복사해도 오류 없이 돌아가고 점수도 나옴 · 다만 그 값에 의미가 없음 — 조용히 틀린 답을 자신 있게 내놓는 상태임 · 같은 카메라·같은 설비에서 PC만 교체하는 경우만 예외임</a:t>
             </a:r>
           </a:p>
         </p:txBody>
@@ -40853,7 +40858,7 @@
                 <a:ea typeface="맑은 고딕"/>
                 <a:cs typeface="맑은 고딕"/>
               </a:rPr>
-              <a:t>시운전 기간과 겹쳐 쓰십시오</a:t>
+              <a:t>시운전 기간과 겹쳐 쓸 것</a:t>
             </a:r>
           </a:p>
         </p:txBody>
@@ -40900,7 +40905,7 @@
                 <a:ea typeface="맑은 고딕"/>
                 <a:cs typeface="맑은 고딕"/>
               </a:rPr>
-              <a:t>현장 배선과 시험 운전에 어차피 며칠이 듭니다. 카메라를 먼저 올려 두면 그 기간에 학습이 끝나, 정식 가동 시점에는 이미 3단계로 시작할 수 있습니다.</a:t>
+              <a:t>현장 배선과 시험 운전에 어차피 며칠이 듦 · 카메라를 먼저 올려 두면 그 기간에 학습이 끝나, 정식 가동 시점에는 이미 3단계로 시작할 수 있음</a:t>
             </a:r>
           </a:p>
           <a:p>
@@ -40924,7 +40929,7 @@
                 <a:ea typeface="맑은 고딕"/>
                 <a:cs typeface="맑은 고딕"/>
               </a:rPr>
-              <a:t>시운전 중 설비를 세워 두면 '정지 상태' 만 배웁니다. 가동과 정지를 모두 겪게 하십시오.</a:t>
+              <a:t>시운전 중 설비를 세워 두면 '정지 상태' 만 배움 · 가동과 정지를 모두 겪게 할 것</a:t>
             </a:r>
           </a:p>
         </p:txBody>
@@ -41272,7 +41277,7 @@
                 <a:ea typeface="맑은 고딕"/>
                 <a:cs typeface="맑은 고딕"/>
               </a:rPr>
-              <a:t>관제서버의 파일이 갱신되지 않는 경우입니다.</a:t>
+              <a:t>관제서버의 파일이 갱신되지 않는 경우임</a:t>
             </a:r>
           </a:p>
         </p:txBody>
@@ -41319,7 +41324,7 @@
                 <a:ea typeface="맑은 고딕"/>
                 <a:cs typeface="맑은 고딕"/>
               </a:rPr>
-              <a:t>debug_logs 의 ts 값을 확인하십시오. 며칠 전 날짜라면 현장 장비의 업로드를 점검합니다.</a:t>
+              <a:t>debug_logs 의 ts 값을 확인할 것 · 며칠 전 날짜라면 현장 장비의 업로드를 점검함</a:t>
             </a:r>
           </a:p>
         </p:txBody>
@@ -41509,7 +41514,7 @@
                 <a:ea typeface="맑은 고딕"/>
                 <a:cs typeface="맑은 고딕"/>
               </a:rPr>
-              <a:t>카메라 조준이 틀어진 경우입니다.</a:t>
+              <a:t>카메라 조준이 틀어진 경우임</a:t>
             </a:r>
           </a:p>
         </p:txBody>
@@ -41556,7 +41561,7 @@
                 <a:ea typeface="맑은 고딕"/>
                 <a:cs typeface="맑은 고딕"/>
               </a:rPr>
-              <a:t>학습 데이터에서 늘 뜨거웠던 고정 셀이 같은 자리인지 확인합니다. 자리가 옮겨졌다면 재학습이 아니라 조준 복원이 필요합니다.</a:t>
+              <a:t>학습 데이터에서 늘 뜨거웠던 고정 셀이 같은 자리인지 확인함 · 자리가 옮겨졌다면 재학습이 아니라 조준 복원이 필요함</a:t>
             </a:r>
           </a:p>
         </p:txBody>
@@ -41746,7 +41751,7 @@
                 <a:ea typeface="맑은 고딕"/>
                 <a:cs typeface="맑은 고딕"/>
               </a:rPr>
-              <a:t>PyPI 의 동명 패키지가 대신 잡힌 경우입니다.</a:t>
+              <a:t>PyPI 의 동명 패키지가 대신 잡힌 경우임</a:t>
             </a:r>
           </a:p>
         </p:txBody>
@@ -41793,7 +41798,7 @@
                 <a:ea typeface="맑은 고딕"/>
                 <a:cs typeface="맑은 고딕"/>
               </a:rPr>
-              <a:t>pip uninstall db_utils 로 제거하고, ROOT_PATH 가 올바른지 확인합니다.</a:t>
+              <a:t>pip uninstall db_utils 로 제거하고, ROOT_PATH 가 올바른지 확인함</a:t>
             </a:r>
           </a:p>
         </p:txBody>
@@ -41983,7 +41988,7 @@
                 <a:ea typeface="맑은 고딕"/>
                 <a:cs typeface="맑은 고딕"/>
               </a:rPr>
-              <a:t>otg_monitoring.ini 의 ROOT_PATH 가 잘못된 경우입니다.</a:t>
+              <a:t>otg_monitoring.ini 의 ROOT_PATH 가 잘못된 경우임</a:t>
             </a:r>
           </a:p>
         </p:txBody>
@@ -42030,7 +42035,7 @@
                 <a:ea typeface="맑은 고딕"/>
                 <a:cs typeface="맑은 고딕"/>
               </a:rPr>
-              <a:t>메시지에 표시된 경로와 실제 폴더를 대조합니다.</a:t>
+              <a:t>메시지에 표시된 경로와 실제 폴더를 대조함</a:t>
             </a:r>
           </a:p>
         </p:txBody>
@@ -42220,7 +42225,7 @@
                 <a:ea typeface="맑은 고딕"/>
                 <a:cs typeface="맑은 고딕"/>
               </a:rPr>
-              <a:t>특정 스크립트만 기동 직후 종료된 경우입니다.</a:t>
+              <a:t>특정 스크립트만 기동 직후 종료된 경우임</a:t>
             </a:r>
           </a:p>
         </p:txBody>
@@ -42267,7 +42272,7 @@
                 <a:ea typeface="맑은 고딕"/>
                 <a:cs typeface="맑은 고딕"/>
               </a:rPr>
-              <a:t>debug_logs 에서 해당 프로세스 로그의 마지막 줄을 확인합니다.</a:t>
+              <a:t>debug_logs 에서 해당 프로세스 로그의 마지막 줄을 확인함</a:t>
             </a:r>
           </a:p>
         </p:txBody>
@@ -43748,7 +43753,7 @@
                 <a:ea typeface="맑은 고딕"/>
                 <a:cs typeface="맑은 고딕"/>
               </a:rPr>
-              <a:t>모두 완료되면 현장 두 곳 합쳐 6개가 기동하고, 상태줄에는 선택한 현장 기준으로 [3] processes | err=0000 이 표시됩니다.</a:t>
+              <a:t>모두 완료되면 현장 두 곳 합쳐 6개가 기동하고, 상태줄에는 선택한 현장 기준으로 [3] processes | err=0000 이 표시됨</a:t>
             </a:r>
           </a:p>
         </p:txBody>
@@ -43793,6 +43798,6903 @@
                 <a:cs typeface="맑은 고딕"/>
               </a:rPr>
               <a:t>32</a:t>
+            </a:r>
+          </a:p>
+        </p:txBody>
+      </p:sp>
+    </p:spTree>
+  </p:cSld>
+  <p:clrMapOvr>
+    <a:masterClrMapping/>
+  </p:clrMapOvr>
+</p:sld>
+</file>
+
+<file path=ppt/slides/slide34.xml><?xml version="1.0" encoding="utf-8"?>
+<p:sld xmlns:a="http://schemas.openxmlformats.org/drawingml/2006/main" xmlns:p="http://schemas.openxmlformats.org/presentationml/2006/main" xmlns:r="http://schemas.openxmlformats.org/officeDocument/2006/relationships">
+  <p:cSld>
+    <p:bg>
+      <p:bgPr>
+        <a:solidFill>
+          <a:srgbClr val="FFFFFF"/>
+        </a:solidFill>
+        <a:effectLst/>
+      </p:bgPr>
+    </p:bg>
+    <p:spTree>
+      <p:nvGrpSpPr>
+        <p:cNvPr id="1" name=""/>
+        <p:cNvGrpSpPr/>
+        <p:nvPr/>
+      </p:nvGrpSpPr>
+      <p:grpSpPr/>
+      <p:sp>
+        <p:nvSpPr>
+          <p:cNvPr id="2" name="TextBox 1"/>
+          <p:cNvSpPr txBox="1"/>
+          <p:nvPr/>
+        </p:nvSpPr>
+        <p:spPr>
+          <a:xfrm>
+            <a:off x="658368" y="475488"/>
+            <a:ext cx="10874959" cy="310896"/>
+          </a:xfrm>
+          <a:prstGeom prst="rect">
+            <a:avLst/>
+          </a:prstGeom>
+          <a:noFill/>
+        </p:spPr>
+        <p:txBody>
+          <a:bodyPr wrap="square" lIns="0" rIns="0" tIns="0" bIns="0" anchor="t">
+            <a:spAutoFit/>
+          </a:bodyPr>
+          <a:lstStyle/>
+          <a:p>
+            <a:pPr algn="l">
+              <a:spcBef>
+                <a:spcPts val="0"/>
+              </a:spcBef>
+              <a:spcAft>
+                <a:spcPts val="0"/>
+              </a:spcAft>
+            </a:pPr>
+            <a:r>
+              <a:rPr sz="1250" b="1" i="0">
+                <a:solidFill>
+                  <a:srgbClr val="E4572E"/>
+                </a:solidFill>
+                <a:latin typeface="맑은 고딕"/>
+                <a:ea typeface="맑은 고딕"/>
+                <a:cs typeface="맑은 고딕"/>
+              </a:rPr>
+              <a:t>33  SERVERS</a:t>
+            </a:r>
+          </a:p>
+        </p:txBody>
+      </p:sp>
+      <p:sp>
+        <p:nvSpPr>
+          <p:cNvPr id="3" name="TextBox 2"/>
+          <p:cNvSpPr txBox="1"/>
+          <p:nvPr/>
+        </p:nvSpPr>
+        <p:spPr>
+          <a:xfrm>
+            <a:off x="658368" y="804672"/>
+            <a:ext cx="10874959" cy="621792"/>
+          </a:xfrm>
+          <a:prstGeom prst="rect">
+            <a:avLst/>
+          </a:prstGeom>
+          <a:noFill/>
+        </p:spPr>
+        <p:txBody>
+          <a:bodyPr wrap="square" lIns="0" rIns="0" tIns="0" bIns="0" anchor="t">
+            <a:spAutoFit/>
+          </a:bodyPr>
+          <a:lstStyle/>
+          <a:p>
+            <a:pPr algn="l">
+              <a:spcBef>
+                <a:spcPts val="0"/>
+              </a:spcBef>
+              <a:spcAft>
+                <a:spcPts val="0"/>
+              </a:spcAft>
+            </a:pPr>
+            <a:r>
+              <a:rPr sz="3000" b="1" i="0">
+                <a:solidFill>
+                  <a:srgbClr val="1A2435"/>
+                </a:solidFill>
+                <a:latin typeface="맑은 고딕"/>
+                <a:ea typeface="맑은 고딕"/>
+                <a:cs typeface="맑은 고딕"/>
+              </a:rPr>
+              <a:t>세 서버와 역할</a:t>
+            </a:r>
+          </a:p>
+        </p:txBody>
+      </p:sp>
+      <p:sp>
+        <p:nvSpPr>
+          <p:cNvPr id="4" name="Rounded Rectangle 3"/>
+          <p:cNvSpPr/>
+          <p:nvPr/>
+        </p:nvSpPr>
+        <p:spPr>
+          <a:xfrm>
+            <a:off x="658368" y="1783080"/>
+            <a:ext cx="2514600" cy="1600200"/>
+          </a:xfrm>
+          <a:prstGeom prst="roundRect">
+            <a:avLst>
+              <a:gd name="adj" fmla="val 6000"/>
+            </a:avLst>
+          </a:prstGeom>
+          <a:solidFill>
+            <a:srgbClr val="F2F4F7"/>
+          </a:solidFill>
+          <a:ln>
+            <a:noFill/>
+          </a:ln>
+          <a:effectLst/>
+        </p:spPr>
+        <p:style>
+          <a:lnRef idx="1">
+            <a:schemeClr val="accent1"/>
+          </a:lnRef>
+          <a:fillRef idx="3">
+            <a:schemeClr val="accent1"/>
+          </a:fillRef>
+          <a:effectRef idx="2">
+            <a:schemeClr val="accent1"/>
+          </a:effectRef>
+          <a:fontRef idx="minor">
+            <a:schemeClr val="lt1"/>
+          </a:fontRef>
+        </p:style>
+        <p:txBody>
+          <a:bodyPr rtlCol="0" anchor="ctr"/>
+          <a:lstStyle/>
+          <a:p/>
+        </p:txBody>
+      </p:sp>
+      <p:sp>
+        <p:nvSpPr>
+          <p:cNvPr id="5" name="Oval 4"/>
+          <p:cNvSpPr/>
+          <p:nvPr/>
+        </p:nvSpPr>
+        <p:spPr>
+          <a:xfrm>
+            <a:off x="1732787" y="1572768"/>
+            <a:ext cx="365760" cy="365760"/>
+          </a:xfrm>
+          <a:prstGeom prst="ellipse">
+            <a:avLst/>
+          </a:prstGeom>
+          <a:solidFill>
+            <a:srgbClr val="888780"/>
+          </a:solidFill>
+          <a:ln>
+            <a:noFill/>
+          </a:ln>
+          <a:effectLst/>
+        </p:spPr>
+        <p:style>
+          <a:lnRef idx="1">
+            <a:schemeClr val="accent1"/>
+          </a:lnRef>
+          <a:fillRef idx="3">
+            <a:schemeClr val="accent1"/>
+          </a:fillRef>
+          <a:effectRef idx="2">
+            <a:schemeClr val="accent1"/>
+          </a:effectRef>
+          <a:fontRef idx="minor">
+            <a:schemeClr val="lt1"/>
+          </a:fontRef>
+        </p:style>
+        <p:txBody>
+          <a:bodyPr rtlCol="0" anchor="ctr"/>
+          <a:lstStyle/>
+          <a:p>
+            <a:pPr algn="ctr"/>
+          </a:p>
+        </p:txBody>
+      </p:sp>
+      <p:sp>
+        <p:nvSpPr>
+          <p:cNvPr id="6" name="TextBox 5"/>
+          <p:cNvSpPr txBox="1"/>
+          <p:nvPr/>
+        </p:nvSpPr>
+        <p:spPr>
+          <a:xfrm>
+            <a:off x="795528" y="2103120"/>
+            <a:ext cx="2240280" cy="320040"/>
+          </a:xfrm>
+          <a:prstGeom prst="rect">
+            <a:avLst/>
+          </a:prstGeom>
+          <a:noFill/>
+        </p:spPr>
+        <p:txBody>
+          <a:bodyPr wrap="square" lIns="0" rIns="0" tIns="0" bIns="0" anchor="t">
+            <a:spAutoFit/>
+          </a:bodyPr>
+          <a:lstStyle/>
+          <a:p>
+            <a:pPr algn="ctr">
+              <a:spcBef>
+                <a:spcPts val="0"/>
+              </a:spcBef>
+              <a:spcAft>
+                <a:spcPts val="0"/>
+              </a:spcAft>
+            </a:pPr>
+            <a:r>
+              <a:rPr sz="1500" b="1" i="0">
+                <a:solidFill>
+                  <a:srgbClr val="1A2435"/>
+                </a:solidFill>
+                <a:latin typeface="맑은 고딕"/>
+                <a:ea typeface="맑은 고딕"/>
+                <a:cs typeface="맑은 고딕"/>
+              </a:rPr>
+              <a:t>현장 장비</a:t>
+            </a:r>
+          </a:p>
+        </p:txBody>
+      </p:sp>
+      <p:sp>
+        <p:nvSpPr>
+          <p:cNvPr id="7" name="TextBox 6"/>
+          <p:cNvSpPr txBox="1"/>
+          <p:nvPr/>
+        </p:nvSpPr>
+        <p:spPr>
+          <a:xfrm>
+            <a:off x="795528" y="2468880"/>
+            <a:ext cx="2240280" cy="274320"/>
+          </a:xfrm>
+          <a:prstGeom prst="rect">
+            <a:avLst/>
+          </a:prstGeom>
+          <a:noFill/>
+        </p:spPr>
+        <p:txBody>
+          <a:bodyPr wrap="square" lIns="0" rIns="0" tIns="0" bIns="0" anchor="t">
+            <a:spAutoFit/>
+          </a:bodyPr>
+          <a:lstStyle/>
+          <a:p>
+            <a:pPr algn="ctr">
+              <a:spcBef>
+                <a:spcPts val="0"/>
+              </a:spcBef>
+              <a:spcAft>
+                <a:spcPts val="0"/>
+              </a:spcAft>
+            </a:pPr>
+            <a:r>
+              <a:rPr sz="1000" b="0" i="0">
+                <a:solidFill>
+                  <a:srgbClr val="888780"/>
+                </a:solidFill>
+                <a:latin typeface="Consolas"/>
+                <a:ea typeface="Consolas"/>
+                <a:cs typeface="Consolas"/>
+              </a:rPr>
+              <a:t>열화상 · RGB · 센서</a:t>
+            </a:r>
+          </a:p>
+        </p:txBody>
+      </p:sp>
+      <p:sp>
+        <p:nvSpPr>
+          <p:cNvPr id="8" name="TextBox 7"/>
+          <p:cNvSpPr txBox="1"/>
+          <p:nvPr/>
+        </p:nvSpPr>
+        <p:spPr>
+          <a:xfrm>
+            <a:off x="795528" y="2834640"/>
+            <a:ext cx="2240280" cy="457200"/>
+          </a:xfrm>
+          <a:prstGeom prst="rect">
+            <a:avLst/>
+          </a:prstGeom>
+          <a:noFill/>
+        </p:spPr>
+        <p:txBody>
+          <a:bodyPr wrap="square" lIns="0" rIns="0" tIns="0" bIns="0" anchor="t">
+            <a:spAutoFit/>
+          </a:bodyPr>
+          <a:lstStyle/>
+          <a:p>
+            <a:pPr algn="ctr">
+              <a:spcBef>
+                <a:spcPts val="0"/>
+              </a:spcBef>
+              <a:spcAft>
+                <a:spcPts val="0"/>
+              </a:spcAft>
+            </a:pPr>
+            <a:r>
+              <a:rPr sz="1100" b="0" i="0">
+                <a:solidFill>
+                  <a:srgbClr val="667085"/>
+                </a:solidFill>
+                <a:latin typeface="맑은 고딕"/>
+                <a:ea typeface="맑은 고딕"/>
+                <a:cs typeface="맑은 고딕"/>
+              </a:rPr>
+              <a:t>관제서버로 원본 업로드</a:t>
+            </a:r>
+          </a:p>
+        </p:txBody>
+      </p:sp>
+      <p:sp>
+        <p:nvSpPr>
+          <p:cNvPr id="9" name="Rounded Rectangle 8"/>
+          <p:cNvSpPr/>
+          <p:nvPr/>
+        </p:nvSpPr>
+        <p:spPr>
+          <a:xfrm>
+            <a:off x="3474720" y="1783080"/>
+            <a:ext cx="2514600" cy="1600200"/>
+          </a:xfrm>
+          <a:prstGeom prst="roundRect">
+            <a:avLst>
+              <a:gd name="adj" fmla="val 6000"/>
+            </a:avLst>
+          </a:prstGeom>
+          <a:solidFill>
+            <a:srgbClr val="F2F4F7"/>
+          </a:solidFill>
+          <a:ln>
+            <a:noFill/>
+          </a:ln>
+          <a:effectLst/>
+        </p:spPr>
+        <p:style>
+          <a:lnRef idx="1">
+            <a:schemeClr val="accent1"/>
+          </a:lnRef>
+          <a:fillRef idx="3">
+            <a:schemeClr val="accent1"/>
+          </a:fillRef>
+          <a:effectRef idx="2">
+            <a:schemeClr val="accent1"/>
+          </a:effectRef>
+          <a:fontRef idx="minor">
+            <a:schemeClr val="lt1"/>
+          </a:fontRef>
+        </p:style>
+        <p:txBody>
+          <a:bodyPr rtlCol="0" anchor="ctr"/>
+          <a:lstStyle/>
+          <a:p/>
+        </p:txBody>
+      </p:sp>
+      <p:sp>
+        <p:nvSpPr>
+          <p:cNvPr id="10" name="Oval 9"/>
+          <p:cNvSpPr/>
+          <p:nvPr/>
+        </p:nvSpPr>
+        <p:spPr>
+          <a:xfrm>
+            <a:off x="4549140" y="1572768"/>
+            <a:ext cx="365760" cy="365760"/>
+          </a:xfrm>
+          <a:prstGeom prst="ellipse">
+            <a:avLst/>
+          </a:prstGeom>
+          <a:solidFill>
+            <a:srgbClr val="E4572E"/>
+          </a:solidFill>
+          <a:ln>
+            <a:noFill/>
+          </a:ln>
+          <a:effectLst/>
+        </p:spPr>
+        <p:style>
+          <a:lnRef idx="1">
+            <a:schemeClr val="accent1"/>
+          </a:lnRef>
+          <a:fillRef idx="3">
+            <a:schemeClr val="accent1"/>
+          </a:fillRef>
+          <a:effectRef idx="2">
+            <a:schemeClr val="accent1"/>
+          </a:effectRef>
+          <a:fontRef idx="minor">
+            <a:schemeClr val="lt1"/>
+          </a:fontRef>
+        </p:style>
+        <p:txBody>
+          <a:bodyPr rtlCol="0" anchor="ctr"/>
+          <a:lstStyle/>
+          <a:p>
+            <a:pPr algn="ctr"/>
+          </a:p>
+        </p:txBody>
+      </p:sp>
+      <p:sp>
+        <p:nvSpPr>
+          <p:cNvPr id="11" name="TextBox 10"/>
+          <p:cNvSpPr txBox="1"/>
+          <p:nvPr/>
+        </p:nvSpPr>
+        <p:spPr>
+          <a:xfrm>
+            <a:off x="3611879" y="2103120"/>
+            <a:ext cx="2240280" cy="320040"/>
+          </a:xfrm>
+          <a:prstGeom prst="rect">
+            <a:avLst/>
+          </a:prstGeom>
+          <a:noFill/>
+        </p:spPr>
+        <p:txBody>
+          <a:bodyPr wrap="square" lIns="0" rIns="0" tIns="0" bIns="0" anchor="t">
+            <a:spAutoFit/>
+          </a:bodyPr>
+          <a:lstStyle/>
+          <a:p>
+            <a:pPr algn="ctr">
+              <a:spcBef>
+                <a:spcPts val="0"/>
+              </a:spcBef>
+              <a:spcAft>
+                <a:spcPts val="0"/>
+              </a:spcAft>
+            </a:pPr>
+            <a:r>
+              <a:rPr sz="1500" b="1" i="0">
+                <a:solidFill>
+                  <a:srgbClr val="1A2435"/>
+                </a:solidFill>
+                <a:latin typeface="맑은 고딕"/>
+                <a:ea typeface="맑은 고딕"/>
+                <a:cs typeface="맑은 고딕"/>
+              </a:rPr>
+              <a:t>관제서버</a:t>
+            </a:r>
+          </a:p>
+        </p:txBody>
+      </p:sp>
+      <p:sp>
+        <p:nvSpPr>
+          <p:cNvPr id="12" name="TextBox 11"/>
+          <p:cNvSpPr txBox="1"/>
+          <p:nvPr/>
+        </p:nvSpPr>
+        <p:spPr>
+          <a:xfrm>
+            <a:off x="3611879" y="2468880"/>
+            <a:ext cx="2240280" cy="274320"/>
+          </a:xfrm>
+          <a:prstGeom prst="rect">
+            <a:avLst/>
+          </a:prstGeom>
+          <a:noFill/>
+        </p:spPr>
+        <p:txBody>
+          <a:bodyPr wrap="square" lIns="0" rIns="0" tIns="0" bIns="0" anchor="t">
+            <a:spAutoFit/>
+          </a:bodyPr>
+          <a:lstStyle/>
+          <a:p>
+            <a:pPr algn="ctr">
+              <a:spcBef>
+                <a:spcPts val="0"/>
+              </a:spcBef>
+              <a:spcAft>
+                <a:spcPts val="0"/>
+              </a:spcAft>
+            </a:pPr>
+            <a:r>
+              <a:rPr sz="1000" b="0" i="0">
+                <a:solidFill>
+                  <a:srgbClr val="E4572E"/>
+                </a:solidFill>
+                <a:latin typeface="Consolas"/>
+                <a:ea typeface="Consolas"/>
+                <a:cs typeface="Consolas"/>
+              </a:rPr>
+              <a:t>sangchoo.com</a:t>
+            </a:r>
+          </a:p>
+        </p:txBody>
+      </p:sp>
+      <p:sp>
+        <p:nvSpPr>
+          <p:cNvPr id="13" name="TextBox 12"/>
+          <p:cNvSpPr txBox="1"/>
+          <p:nvPr/>
+        </p:nvSpPr>
+        <p:spPr>
+          <a:xfrm>
+            <a:off x="3611879" y="2834640"/>
+            <a:ext cx="2240280" cy="457200"/>
+          </a:xfrm>
+          <a:prstGeom prst="rect">
+            <a:avLst/>
+          </a:prstGeom>
+          <a:noFill/>
+        </p:spPr>
+        <p:txBody>
+          <a:bodyPr wrap="square" lIns="0" rIns="0" tIns="0" bIns="0" anchor="t">
+            <a:spAutoFit/>
+          </a:bodyPr>
+          <a:lstStyle/>
+          <a:p>
+            <a:pPr algn="ctr">
+              <a:spcBef>
+                <a:spcPts val="0"/>
+              </a:spcBef>
+              <a:spcAft>
+                <a:spcPts val="0"/>
+              </a:spcAft>
+            </a:pPr>
+            <a:r>
+              <a:rPr sz="1100" b="0" i="0">
+                <a:solidFill>
+                  <a:srgbClr val="667085"/>
+                </a:solidFill>
+                <a:latin typeface="맑은 고딕"/>
+                <a:ea typeface="맑은 고딕"/>
+                <a:cs typeface="맑은 고딕"/>
+              </a:rPr>
+              <a:t>원본 저장 · 웹 화면 · 문자 발송</a:t>
+            </a:r>
+          </a:p>
+        </p:txBody>
+      </p:sp>
+      <p:sp>
+        <p:nvSpPr>
+          <p:cNvPr id="14" name="Rounded Rectangle 13"/>
+          <p:cNvSpPr/>
+          <p:nvPr/>
+        </p:nvSpPr>
+        <p:spPr>
+          <a:xfrm>
+            <a:off x="6291072" y="1783080"/>
+            <a:ext cx="2514600" cy="1600200"/>
+          </a:xfrm>
+          <a:prstGeom prst="roundRect">
+            <a:avLst>
+              <a:gd name="adj" fmla="val 6000"/>
+            </a:avLst>
+          </a:prstGeom>
+          <a:solidFill>
+            <a:srgbClr val="F2F4F7"/>
+          </a:solidFill>
+          <a:ln>
+            <a:noFill/>
+          </a:ln>
+          <a:effectLst/>
+        </p:spPr>
+        <p:style>
+          <a:lnRef idx="1">
+            <a:schemeClr val="accent1"/>
+          </a:lnRef>
+          <a:fillRef idx="3">
+            <a:schemeClr val="accent1"/>
+          </a:fillRef>
+          <a:effectRef idx="2">
+            <a:schemeClr val="accent1"/>
+          </a:effectRef>
+          <a:fontRef idx="minor">
+            <a:schemeClr val="lt1"/>
+          </a:fontRef>
+        </p:style>
+        <p:txBody>
+          <a:bodyPr rtlCol="0" anchor="ctr"/>
+          <a:lstStyle/>
+          <a:p/>
+        </p:txBody>
+      </p:sp>
+      <p:sp>
+        <p:nvSpPr>
+          <p:cNvPr id="15" name="Oval 14"/>
+          <p:cNvSpPr/>
+          <p:nvPr/>
+        </p:nvSpPr>
+        <p:spPr>
+          <a:xfrm>
+            <a:off x="7365492" y="1572768"/>
+            <a:ext cx="365760" cy="365760"/>
+          </a:xfrm>
+          <a:prstGeom prst="ellipse">
+            <a:avLst/>
+          </a:prstGeom>
+          <a:solidFill>
+            <a:srgbClr val="2A9D8F"/>
+          </a:solidFill>
+          <a:ln>
+            <a:noFill/>
+          </a:ln>
+          <a:effectLst/>
+        </p:spPr>
+        <p:style>
+          <a:lnRef idx="1">
+            <a:schemeClr val="accent1"/>
+          </a:lnRef>
+          <a:fillRef idx="3">
+            <a:schemeClr val="accent1"/>
+          </a:fillRef>
+          <a:effectRef idx="2">
+            <a:schemeClr val="accent1"/>
+          </a:effectRef>
+          <a:fontRef idx="minor">
+            <a:schemeClr val="lt1"/>
+          </a:fontRef>
+        </p:style>
+        <p:txBody>
+          <a:bodyPr rtlCol="0" anchor="ctr"/>
+          <a:lstStyle/>
+          <a:p>
+            <a:pPr algn="ctr"/>
+          </a:p>
+        </p:txBody>
+      </p:sp>
+      <p:sp>
+        <p:nvSpPr>
+          <p:cNvPr id="16" name="TextBox 15"/>
+          <p:cNvSpPr txBox="1"/>
+          <p:nvPr/>
+        </p:nvSpPr>
+        <p:spPr>
+          <a:xfrm>
+            <a:off x="6428232" y="2103120"/>
+            <a:ext cx="2240280" cy="320040"/>
+          </a:xfrm>
+          <a:prstGeom prst="rect">
+            <a:avLst/>
+          </a:prstGeom>
+          <a:noFill/>
+        </p:spPr>
+        <p:txBody>
+          <a:bodyPr wrap="square" lIns="0" rIns="0" tIns="0" bIns="0" anchor="t">
+            <a:spAutoFit/>
+          </a:bodyPr>
+          <a:lstStyle/>
+          <a:p>
+            <a:pPr algn="ctr">
+              <a:spcBef>
+                <a:spcPts val="0"/>
+              </a:spcBef>
+              <a:spcAft>
+                <a:spcPts val="0"/>
+              </a:spcAft>
+            </a:pPr>
+            <a:r>
+              <a:rPr sz="1500" b="1" i="0">
+                <a:solidFill>
+                  <a:srgbClr val="1A2435"/>
+                </a:solidFill>
+                <a:latin typeface="맑은 고딕"/>
+                <a:ea typeface="맑은 고딕"/>
+                <a:cs typeface="맑은 고딕"/>
+              </a:rPr>
+              <a:t>분석서버</a:t>
+            </a:r>
+          </a:p>
+        </p:txBody>
+      </p:sp>
+      <p:sp>
+        <p:nvSpPr>
+          <p:cNvPr id="17" name="TextBox 16"/>
+          <p:cNvSpPr txBox="1"/>
+          <p:nvPr/>
+        </p:nvSpPr>
+        <p:spPr>
+          <a:xfrm>
+            <a:off x="6428232" y="2468880"/>
+            <a:ext cx="2240280" cy="274320"/>
+          </a:xfrm>
+          <a:prstGeom prst="rect">
+            <a:avLst/>
+          </a:prstGeom>
+          <a:noFill/>
+        </p:spPr>
+        <p:txBody>
+          <a:bodyPr wrap="square" lIns="0" rIns="0" tIns="0" bIns="0" anchor="t">
+            <a:spAutoFit/>
+          </a:bodyPr>
+          <a:lstStyle/>
+          <a:p>
+            <a:pPr algn="ctr">
+              <a:spcBef>
+                <a:spcPts val="0"/>
+              </a:spcBef>
+              <a:spcAft>
+                <a:spcPts val="0"/>
+              </a:spcAft>
+            </a:pPr>
+            <a:r>
+              <a:rPr sz="1000" b="0" i="0">
+                <a:solidFill>
+                  <a:srgbClr val="2A9D8F"/>
+                </a:solidFill>
+                <a:latin typeface="Consolas"/>
+                <a:ea typeface="Consolas"/>
+                <a:cs typeface="Consolas"/>
+              </a:rPr>
+              <a:t>이 PC</a:t>
+            </a:r>
+          </a:p>
+        </p:txBody>
+      </p:sp>
+      <p:sp>
+        <p:nvSpPr>
+          <p:cNvPr id="18" name="TextBox 17"/>
+          <p:cNvSpPr txBox="1"/>
+          <p:nvPr/>
+        </p:nvSpPr>
+        <p:spPr>
+          <a:xfrm>
+            <a:off x="6428232" y="2834640"/>
+            <a:ext cx="2240280" cy="457200"/>
+          </a:xfrm>
+          <a:prstGeom prst="rect">
+            <a:avLst/>
+          </a:prstGeom>
+          <a:noFill/>
+        </p:spPr>
+        <p:txBody>
+          <a:bodyPr wrap="square" lIns="0" rIns="0" tIns="0" bIns="0" anchor="t">
+            <a:spAutoFit/>
+          </a:bodyPr>
+          <a:lstStyle/>
+          <a:p>
+            <a:pPr algn="ctr">
+              <a:spcBef>
+                <a:spcPts val="0"/>
+              </a:spcBef>
+              <a:spcAft>
+                <a:spcPts val="0"/>
+              </a:spcAft>
+            </a:pPr>
+            <a:r>
+              <a:rPr sz="1100" b="0" i="0">
+                <a:solidFill>
+                  <a:srgbClr val="667085"/>
+                </a:solidFill>
+                <a:latin typeface="맑은 고딕"/>
+                <a:ea typeface="맑은 고딕"/>
+                <a:cs typeface="맑은 고딕"/>
+              </a:rPr>
+              <a:t>판정 · 학습 · 운전 상태</a:t>
+            </a:r>
+          </a:p>
+        </p:txBody>
+      </p:sp>
+      <p:sp>
+        <p:nvSpPr>
+          <p:cNvPr id="19" name="Rounded Rectangle 18"/>
+          <p:cNvSpPr/>
+          <p:nvPr/>
+        </p:nvSpPr>
+        <p:spPr>
+          <a:xfrm>
+            <a:off x="9107424" y="1783080"/>
+            <a:ext cx="2514600" cy="1600200"/>
+          </a:xfrm>
+          <a:prstGeom prst="roundRect">
+            <a:avLst>
+              <a:gd name="adj" fmla="val 6000"/>
+            </a:avLst>
+          </a:prstGeom>
+          <a:solidFill>
+            <a:srgbClr val="F2F4F7"/>
+          </a:solidFill>
+          <a:ln>
+            <a:noFill/>
+          </a:ln>
+          <a:effectLst/>
+        </p:spPr>
+        <p:style>
+          <a:lnRef idx="1">
+            <a:schemeClr val="accent1"/>
+          </a:lnRef>
+          <a:fillRef idx="3">
+            <a:schemeClr val="accent1"/>
+          </a:fillRef>
+          <a:effectRef idx="2">
+            <a:schemeClr val="accent1"/>
+          </a:effectRef>
+          <a:fontRef idx="minor">
+            <a:schemeClr val="lt1"/>
+          </a:fontRef>
+        </p:style>
+        <p:txBody>
+          <a:bodyPr rtlCol="0" anchor="ctr"/>
+          <a:lstStyle/>
+          <a:p/>
+        </p:txBody>
+      </p:sp>
+      <p:sp>
+        <p:nvSpPr>
+          <p:cNvPr id="20" name="Oval 19"/>
+          <p:cNvSpPr/>
+          <p:nvPr/>
+        </p:nvSpPr>
+        <p:spPr>
+          <a:xfrm>
+            <a:off x="10181844" y="1572768"/>
+            <a:ext cx="365760" cy="365760"/>
+          </a:xfrm>
+          <a:prstGeom prst="ellipse">
+            <a:avLst/>
+          </a:prstGeom>
+          <a:solidFill>
+            <a:srgbClr val="F4A261"/>
+          </a:solidFill>
+          <a:ln>
+            <a:noFill/>
+          </a:ln>
+          <a:effectLst/>
+        </p:spPr>
+        <p:style>
+          <a:lnRef idx="1">
+            <a:schemeClr val="accent1"/>
+          </a:lnRef>
+          <a:fillRef idx="3">
+            <a:schemeClr val="accent1"/>
+          </a:fillRef>
+          <a:effectRef idx="2">
+            <a:schemeClr val="accent1"/>
+          </a:effectRef>
+          <a:fontRef idx="minor">
+            <a:schemeClr val="lt1"/>
+          </a:fontRef>
+        </p:style>
+        <p:txBody>
+          <a:bodyPr rtlCol="0" anchor="ctr"/>
+          <a:lstStyle/>
+          <a:p>
+            <a:pPr algn="ctr"/>
+          </a:p>
+        </p:txBody>
+      </p:sp>
+      <p:sp>
+        <p:nvSpPr>
+          <p:cNvPr id="21" name="TextBox 20"/>
+          <p:cNvSpPr txBox="1"/>
+          <p:nvPr/>
+        </p:nvSpPr>
+        <p:spPr>
+          <a:xfrm>
+            <a:off x="9244584" y="2103120"/>
+            <a:ext cx="2240280" cy="320040"/>
+          </a:xfrm>
+          <a:prstGeom prst="rect">
+            <a:avLst/>
+          </a:prstGeom>
+          <a:noFill/>
+        </p:spPr>
+        <p:txBody>
+          <a:bodyPr wrap="square" lIns="0" rIns="0" tIns="0" bIns="0" anchor="t">
+            <a:spAutoFit/>
+          </a:bodyPr>
+          <a:lstStyle/>
+          <a:p>
+            <a:pPr algn="ctr">
+              <a:spcBef>
+                <a:spcPts val="0"/>
+              </a:spcBef>
+              <a:spcAft>
+                <a:spcPts val="0"/>
+              </a:spcAft>
+            </a:pPr>
+            <a:r>
+              <a:rPr sz="1500" b="1" i="0">
+                <a:solidFill>
+                  <a:srgbClr val="1A2435"/>
+                </a:solidFill>
+                <a:latin typeface="맑은 고딕"/>
+                <a:ea typeface="맑은 고딕"/>
+                <a:cs typeface="맑은 고딕"/>
+              </a:rPr>
+              <a:t>DB 서버</a:t>
+            </a:r>
+          </a:p>
+        </p:txBody>
+      </p:sp>
+      <p:sp>
+        <p:nvSpPr>
+          <p:cNvPr id="22" name="TextBox 21"/>
+          <p:cNvSpPr txBox="1"/>
+          <p:nvPr/>
+        </p:nvSpPr>
+        <p:spPr>
+          <a:xfrm>
+            <a:off x="9244584" y="2468880"/>
+            <a:ext cx="2240280" cy="274320"/>
+          </a:xfrm>
+          <a:prstGeom prst="rect">
+            <a:avLst/>
+          </a:prstGeom>
+          <a:noFill/>
+        </p:spPr>
+        <p:txBody>
+          <a:bodyPr wrap="square" lIns="0" rIns="0" tIns="0" bIns="0" anchor="t">
+            <a:spAutoFit/>
+          </a:bodyPr>
+          <a:lstStyle/>
+          <a:p>
+            <a:pPr algn="ctr">
+              <a:spcBef>
+                <a:spcPts val="0"/>
+              </a:spcBef>
+              <a:spcAft>
+                <a:spcPts val="0"/>
+              </a:spcAft>
+            </a:pPr>
+            <a:r>
+              <a:rPr sz="1000" b="0" i="0">
+                <a:solidFill>
+                  <a:srgbClr val="F4A261"/>
+                </a:solidFill>
+                <a:latin typeface="Consolas"/>
+                <a:ea typeface="Consolas"/>
+                <a:cs typeface="Consolas"/>
+              </a:rPr>
+              <a:t>221.160.250.120:8833</a:t>
+            </a:r>
+          </a:p>
+        </p:txBody>
+      </p:sp>
+      <p:sp>
+        <p:nvSpPr>
+          <p:cNvPr id="23" name="TextBox 22"/>
+          <p:cNvSpPr txBox="1"/>
+          <p:nvPr/>
+        </p:nvSpPr>
+        <p:spPr>
+          <a:xfrm>
+            <a:off x="9244584" y="2834640"/>
+            <a:ext cx="2240280" cy="457200"/>
+          </a:xfrm>
+          <a:prstGeom prst="rect">
+            <a:avLst/>
+          </a:prstGeom>
+          <a:noFill/>
+        </p:spPr>
+        <p:txBody>
+          <a:bodyPr wrap="square" lIns="0" rIns="0" tIns="0" bIns="0" anchor="t">
+            <a:spAutoFit/>
+          </a:bodyPr>
+          <a:lstStyle/>
+          <a:p>
+            <a:pPr algn="ctr">
+              <a:spcBef>
+                <a:spcPts val="0"/>
+              </a:spcBef>
+              <a:spcAft>
+                <a:spcPts val="0"/>
+              </a:spcAft>
+            </a:pPr>
+            <a:r>
+              <a:rPr sz="1100" b="0" i="0">
+                <a:solidFill>
+                  <a:srgbClr val="667085"/>
+                </a:solidFill>
+                <a:latin typeface="맑은 고딕"/>
+                <a:ea typeface="맑은 고딕"/>
+                <a:cs typeface="맑은 고딕"/>
+              </a:rPr>
+              <a:t>관제서버에 값 제공 (API)</a:t>
+            </a:r>
+          </a:p>
+        </p:txBody>
+      </p:sp>
+      <p:sp>
+        <p:nvSpPr>
+          <p:cNvPr id="24" name="Rounded Rectangle 23"/>
+          <p:cNvSpPr/>
+          <p:nvPr/>
+        </p:nvSpPr>
+        <p:spPr>
+          <a:xfrm>
+            <a:off x="658368" y="3703320"/>
+            <a:ext cx="10874959" cy="896112"/>
+          </a:xfrm>
+          <a:prstGeom prst="roundRect">
+            <a:avLst>
+              <a:gd name="adj" fmla="val 6000"/>
+            </a:avLst>
+          </a:prstGeom>
+          <a:solidFill>
+            <a:srgbClr val="ECF6F4"/>
+          </a:solidFill>
+          <a:ln>
+            <a:noFill/>
+          </a:ln>
+          <a:effectLst/>
+        </p:spPr>
+        <p:style>
+          <a:lnRef idx="1">
+            <a:schemeClr val="accent1"/>
+          </a:lnRef>
+          <a:fillRef idx="3">
+            <a:schemeClr val="accent1"/>
+          </a:fillRef>
+          <a:effectRef idx="2">
+            <a:schemeClr val="accent1"/>
+          </a:effectRef>
+          <a:fontRef idx="minor">
+            <a:schemeClr val="lt1"/>
+          </a:fontRef>
+        </p:style>
+        <p:txBody>
+          <a:bodyPr rtlCol="0" anchor="ctr"/>
+          <a:lstStyle/>
+          <a:p/>
+        </p:txBody>
+      </p:sp>
+      <p:sp>
+        <p:nvSpPr>
+          <p:cNvPr id="25" name="TextBox 24"/>
+          <p:cNvSpPr txBox="1"/>
+          <p:nvPr/>
+        </p:nvSpPr>
+        <p:spPr>
+          <a:xfrm>
+            <a:off x="932688" y="3849624"/>
+            <a:ext cx="10326319" cy="667512"/>
+          </a:xfrm>
+          <a:prstGeom prst="rect">
+            <a:avLst/>
+          </a:prstGeom>
+          <a:noFill/>
+        </p:spPr>
+        <p:txBody>
+          <a:bodyPr wrap="square" lIns="0" rIns="0" tIns="0" bIns="0" anchor="t">
+            <a:spAutoFit/>
+          </a:bodyPr>
+          <a:lstStyle/>
+          <a:p>
+            <a:pPr algn="l">
+              <a:spcBef>
+                <a:spcPts val="0"/>
+              </a:spcBef>
+              <a:spcAft>
+                <a:spcPts val="400"/>
+              </a:spcAft>
+            </a:pPr>
+            <a:r>
+              <a:rPr sz="1250" b="1" i="0">
+                <a:solidFill>
+                  <a:srgbClr val="2A9D8F"/>
+                </a:solidFill>
+                <a:latin typeface="맑은 고딕"/>
+                <a:ea typeface="맑은 고딕"/>
+                <a:cs typeface="맑은 고딕"/>
+              </a:rPr>
+              <a:t>연결은 늘 분석서버가 먼저 검</a:t>
+            </a:r>
+          </a:p>
+          <a:p>
+            <a:pPr algn="l">
+              <a:lnSpc>
+                <a:spcPct val="125000"/>
+              </a:lnSpc>
+              <a:spcBef>
+                <a:spcPts val="0"/>
+              </a:spcBef>
+              <a:spcAft>
+                <a:spcPts val="0"/>
+              </a:spcAft>
+            </a:pPr>
+            <a:r>
+              <a:rPr sz="1150" b="0" i="0">
+                <a:solidFill>
+                  <a:srgbClr val="1A2435"/>
+                </a:solidFill>
+                <a:latin typeface="맑은 고딕"/>
+                <a:ea typeface="맑은 고딕"/>
+                <a:cs typeface="맑은 고딕"/>
+              </a:rPr>
+              <a:t>관제서버는 인터넷에 열려 있고 분석서버는 아님 · 분석서버가 관제서버에서 받아 오고(GET) 보낼 것을 보냄(POST)</a:t>
+            </a:r>
+          </a:p>
+        </p:txBody>
+      </p:sp>
+      <p:sp>
+        <p:nvSpPr>
+          <p:cNvPr id="26" name="Rounded Rectangle 25"/>
+          <p:cNvSpPr/>
+          <p:nvPr/>
+        </p:nvSpPr>
+        <p:spPr>
+          <a:xfrm>
+            <a:off x="658368" y="4727448"/>
+            <a:ext cx="10874959" cy="896112"/>
+          </a:xfrm>
+          <a:prstGeom prst="roundRect">
+            <a:avLst>
+              <a:gd name="adj" fmla="val 6000"/>
+            </a:avLst>
+          </a:prstGeom>
+          <a:solidFill>
+            <a:srgbClr val="ECF6F4"/>
+          </a:solidFill>
+          <a:ln>
+            <a:noFill/>
+          </a:ln>
+          <a:effectLst/>
+        </p:spPr>
+        <p:style>
+          <a:lnRef idx="1">
+            <a:schemeClr val="accent1"/>
+          </a:lnRef>
+          <a:fillRef idx="3">
+            <a:schemeClr val="accent1"/>
+          </a:fillRef>
+          <a:effectRef idx="2">
+            <a:schemeClr val="accent1"/>
+          </a:effectRef>
+          <a:fontRef idx="minor">
+            <a:schemeClr val="lt1"/>
+          </a:fontRef>
+        </p:style>
+        <p:txBody>
+          <a:bodyPr rtlCol="0" anchor="ctr"/>
+          <a:lstStyle/>
+          <a:p/>
+        </p:txBody>
+      </p:sp>
+      <p:sp>
+        <p:nvSpPr>
+          <p:cNvPr id="27" name="TextBox 26"/>
+          <p:cNvSpPr txBox="1"/>
+          <p:nvPr/>
+        </p:nvSpPr>
+        <p:spPr>
+          <a:xfrm>
+            <a:off x="932688" y="4873752"/>
+            <a:ext cx="10326319" cy="667512"/>
+          </a:xfrm>
+          <a:prstGeom prst="rect">
+            <a:avLst/>
+          </a:prstGeom>
+          <a:noFill/>
+        </p:spPr>
+        <p:txBody>
+          <a:bodyPr wrap="square" lIns="0" rIns="0" tIns="0" bIns="0" anchor="t">
+            <a:spAutoFit/>
+          </a:bodyPr>
+          <a:lstStyle/>
+          <a:p>
+            <a:pPr algn="l">
+              <a:spcBef>
+                <a:spcPts val="0"/>
+              </a:spcBef>
+              <a:spcAft>
+                <a:spcPts val="400"/>
+              </a:spcAft>
+            </a:pPr>
+            <a:r>
+              <a:rPr sz="1250" b="1" i="0">
+                <a:solidFill>
+                  <a:srgbClr val="2A9D8F"/>
+                </a:solidFill>
+                <a:latin typeface="맑은 고딕"/>
+                <a:ea typeface="맑은 고딕"/>
+                <a:cs typeface="맑은 고딕"/>
+              </a:rPr>
+              <a:t>관제 화면 · 문자 판단 값은 DB 서버 API 에서 옴</a:t>
+            </a:r>
+          </a:p>
+          <a:p>
+            <a:pPr algn="l">
+              <a:lnSpc>
+                <a:spcPct val="125000"/>
+              </a:lnSpc>
+              <a:spcBef>
+                <a:spcPts val="0"/>
+              </a:spcBef>
+              <a:spcAft>
+                <a:spcPts val="0"/>
+              </a:spcAft>
+            </a:pPr>
+            <a:r>
+              <a:rPr sz="1150" b="0" i="0">
+                <a:solidFill>
+                  <a:srgbClr val="1A2435"/>
+                </a:solidFill>
+                <a:latin typeface="맑은 고딕"/>
+                <a:ea typeface="맑은 고딕"/>
+                <a:cs typeface="맑은 고딕"/>
+              </a:rPr>
+              <a:t>관제서버는 DB 에 직접 접속하지 않고 DB 서버의 웹 API 를 HTTP 로 불러 값을 받음 · 그 API 가 어느 DB 를 읽는지(분석서버 MySQL 여부)는 API 코드가 없어 미확인</a:t>
+            </a:r>
+          </a:p>
+        </p:txBody>
+      </p:sp>
+      <p:sp>
+        <p:nvSpPr>
+          <p:cNvPr id="28" name="TextBox 27"/>
+          <p:cNvSpPr txBox="1"/>
+          <p:nvPr/>
+        </p:nvSpPr>
+        <p:spPr>
+          <a:xfrm>
+            <a:off x="10618927" y="6291072"/>
+            <a:ext cx="914400" cy="274320"/>
+          </a:xfrm>
+          <a:prstGeom prst="rect">
+            <a:avLst/>
+          </a:prstGeom>
+          <a:noFill/>
+        </p:spPr>
+        <p:txBody>
+          <a:bodyPr wrap="square" lIns="0" rIns="0" tIns="0" bIns="0" anchor="t">
+            <a:spAutoFit/>
+          </a:bodyPr>
+          <a:lstStyle/>
+          <a:p>
+            <a:pPr algn="r">
+              <a:spcBef>
+                <a:spcPts val="0"/>
+              </a:spcBef>
+              <a:spcAft>
+                <a:spcPts val="0"/>
+              </a:spcAft>
+            </a:pPr>
+            <a:r>
+              <a:rPr sz="1050" b="0" i="0">
+                <a:solidFill>
+                  <a:srgbClr val="667085"/>
+                </a:solidFill>
+                <a:latin typeface="맑은 고딕"/>
+                <a:ea typeface="맑은 고딕"/>
+                <a:cs typeface="맑은 고딕"/>
+              </a:rPr>
+              <a:t>33</a:t>
+            </a:r>
+          </a:p>
+        </p:txBody>
+      </p:sp>
+    </p:spTree>
+  </p:cSld>
+  <p:clrMapOvr>
+    <a:masterClrMapping/>
+  </p:clrMapOvr>
+</p:sld>
+</file>
+
+<file path=ppt/slides/slide35.xml><?xml version="1.0" encoding="utf-8"?>
+<p:sld xmlns:a="http://schemas.openxmlformats.org/drawingml/2006/main" xmlns:p="http://schemas.openxmlformats.org/presentationml/2006/main" xmlns:r="http://schemas.openxmlformats.org/officeDocument/2006/relationships">
+  <p:cSld>
+    <p:bg>
+      <p:bgPr>
+        <a:solidFill>
+          <a:srgbClr val="FFFFFF"/>
+        </a:solidFill>
+        <a:effectLst/>
+      </p:bgPr>
+    </p:bg>
+    <p:spTree>
+      <p:nvGrpSpPr>
+        <p:cNvPr id="1" name=""/>
+        <p:cNvGrpSpPr/>
+        <p:nvPr/>
+      </p:nvGrpSpPr>
+      <p:grpSpPr/>
+      <p:sp>
+        <p:nvSpPr>
+          <p:cNvPr id="2" name="TextBox 1"/>
+          <p:cNvSpPr txBox="1"/>
+          <p:nvPr/>
+        </p:nvSpPr>
+        <p:spPr>
+          <a:xfrm>
+            <a:off x="658368" y="475488"/>
+            <a:ext cx="10874959" cy="310896"/>
+          </a:xfrm>
+          <a:prstGeom prst="rect">
+            <a:avLst/>
+          </a:prstGeom>
+          <a:noFill/>
+        </p:spPr>
+        <p:txBody>
+          <a:bodyPr wrap="square" lIns="0" rIns="0" tIns="0" bIns="0" anchor="t">
+            <a:spAutoFit/>
+          </a:bodyPr>
+          <a:lstStyle/>
+          <a:p>
+            <a:pPr algn="l">
+              <a:spcBef>
+                <a:spcPts val="0"/>
+              </a:spcBef>
+              <a:spcAft>
+                <a:spcPts val="0"/>
+              </a:spcAft>
+            </a:pPr>
+            <a:r>
+              <a:rPr sz="1250" b="1" i="0">
+                <a:solidFill>
+                  <a:srgbClr val="E4572E"/>
+                </a:solidFill>
+                <a:latin typeface="맑은 고딕"/>
+                <a:ea typeface="맑은 고딕"/>
+                <a:cs typeface="맑은 고딕"/>
+              </a:rPr>
+              <a:t>34  ANALYSIS ↔ CONTROL</a:t>
+            </a:r>
+          </a:p>
+        </p:txBody>
+      </p:sp>
+      <p:sp>
+        <p:nvSpPr>
+          <p:cNvPr id="3" name="TextBox 2"/>
+          <p:cNvSpPr txBox="1"/>
+          <p:nvPr/>
+        </p:nvSpPr>
+        <p:spPr>
+          <a:xfrm>
+            <a:off x="658368" y="804672"/>
+            <a:ext cx="10874959" cy="621792"/>
+          </a:xfrm>
+          <a:prstGeom prst="rect">
+            <a:avLst/>
+          </a:prstGeom>
+          <a:noFill/>
+        </p:spPr>
+        <p:txBody>
+          <a:bodyPr wrap="square" lIns="0" rIns="0" tIns="0" bIns="0" anchor="t">
+            <a:spAutoFit/>
+          </a:bodyPr>
+          <a:lstStyle/>
+          <a:p>
+            <a:pPr algn="l">
+              <a:spcBef>
+                <a:spcPts val="0"/>
+              </a:spcBef>
+              <a:spcAft>
+                <a:spcPts val="0"/>
+              </a:spcAft>
+            </a:pPr>
+            <a:r>
+              <a:rPr sz="3000" b="1" i="0">
+                <a:solidFill>
+                  <a:srgbClr val="1A2435"/>
+                </a:solidFill>
+                <a:latin typeface="맑은 고딕"/>
+                <a:ea typeface="맑은 고딕"/>
+                <a:cs typeface="맑은 고딕"/>
+              </a:rPr>
+              <a:t>분석서버와 관제서버가 주고받는 것</a:t>
+            </a:r>
+          </a:p>
+        </p:txBody>
+      </p:sp>
+      <p:sp>
+        <p:nvSpPr>
+          <p:cNvPr id="4" name="Rounded Rectangle 3"/>
+          <p:cNvSpPr/>
+          <p:nvPr/>
+        </p:nvSpPr>
+        <p:spPr>
+          <a:xfrm>
+            <a:off x="658368" y="1691640"/>
+            <a:ext cx="10872216" cy="457200"/>
+          </a:xfrm>
+          <a:prstGeom prst="roundRect">
+            <a:avLst>
+              <a:gd name="adj" fmla="val 4000"/>
+            </a:avLst>
+          </a:prstGeom>
+          <a:solidFill>
+            <a:srgbClr val="1C2B45"/>
+          </a:solidFill>
+          <a:ln>
+            <a:noFill/>
+          </a:ln>
+          <a:effectLst/>
+        </p:spPr>
+        <p:style>
+          <a:lnRef idx="1">
+            <a:schemeClr val="accent1"/>
+          </a:lnRef>
+          <a:fillRef idx="3">
+            <a:schemeClr val="accent1"/>
+          </a:fillRef>
+          <a:effectRef idx="2">
+            <a:schemeClr val="accent1"/>
+          </a:effectRef>
+          <a:fontRef idx="minor">
+            <a:schemeClr val="lt1"/>
+          </a:fontRef>
+        </p:style>
+        <p:txBody>
+          <a:bodyPr rtlCol="0" anchor="ctr"/>
+          <a:lstStyle/>
+          <a:p/>
+        </p:txBody>
+      </p:sp>
+      <p:sp>
+        <p:nvSpPr>
+          <p:cNvPr id="5" name="TextBox 4"/>
+          <p:cNvSpPr txBox="1"/>
+          <p:nvPr/>
+        </p:nvSpPr>
+        <p:spPr>
+          <a:xfrm>
+            <a:off x="786384" y="1792224"/>
+            <a:ext cx="1554480" cy="347472"/>
+          </a:xfrm>
+          <a:prstGeom prst="rect">
+            <a:avLst/>
+          </a:prstGeom>
+          <a:noFill/>
+        </p:spPr>
+        <p:txBody>
+          <a:bodyPr wrap="square" lIns="0" rIns="0" tIns="0" bIns="0" anchor="t">
+            <a:spAutoFit/>
+          </a:bodyPr>
+          <a:lstStyle/>
+          <a:p>
+            <a:pPr algn="l">
+              <a:spcBef>
+                <a:spcPts val="0"/>
+              </a:spcBef>
+              <a:spcAft>
+                <a:spcPts val="0"/>
+              </a:spcAft>
+            </a:pPr>
+            <a:r>
+              <a:rPr sz="1150" b="1" i="0">
+                <a:solidFill>
+                  <a:srgbClr val="FFFFFF"/>
+                </a:solidFill>
+                <a:latin typeface="맑은 고딕"/>
+                <a:ea typeface="맑은 고딕"/>
+                <a:cs typeface="맑은 고딕"/>
+              </a:rPr>
+              <a:t>방향</a:t>
+            </a:r>
+          </a:p>
+        </p:txBody>
+      </p:sp>
+      <p:sp>
+        <p:nvSpPr>
+          <p:cNvPr id="6" name="TextBox 5"/>
+          <p:cNvSpPr txBox="1"/>
+          <p:nvPr/>
+        </p:nvSpPr>
+        <p:spPr>
+          <a:xfrm>
+            <a:off x="2523744" y="1792224"/>
+            <a:ext cx="4023359" cy="347472"/>
+          </a:xfrm>
+          <a:prstGeom prst="rect">
+            <a:avLst/>
+          </a:prstGeom>
+          <a:noFill/>
+        </p:spPr>
+        <p:txBody>
+          <a:bodyPr wrap="square" lIns="0" rIns="0" tIns="0" bIns="0" anchor="t">
+            <a:spAutoFit/>
+          </a:bodyPr>
+          <a:lstStyle/>
+          <a:p>
+            <a:pPr algn="l">
+              <a:spcBef>
+                <a:spcPts val="0"/>
+              </a:spcBef>
+              <a:spcAft>
+                <a:spcPts val="0"/>
+              </a:spcAft>
+            </a:pPr>
+            <a:r>
+              <a:rPr sz="1150" b="1" i="0">
+                <a:solidFill>
+                  <a:srgbClr val="FFFFFF"/>
+                </a:solidFill>
+                <a:latin typeface="맑은 고딕"/>
+                <a:ea typeface="맑은 고딕"/>
+                <a:cs typeface="맑은 고딕"/>
+              </a:rPr>
+              <a:t>내용</a:t>
+            </a:r>
+          </a:p>
+        </p:txBody>
+      </p:sp>
+      <p:sp>
+        <p:nvSpPr>
+          <p:cNvPr id="7" name="TextBox 6"/>
+          <p:cNvSpPr txBox="1"/>
+          <p:nvPr/>
+        </p:nvSpPr>
+        <p:spPr>
+          <a:xfrm>
+            <a:off x="6729983" y="1792224"/>
+            <a:ext cx="2194560" cy="347472"/>
+          </a:xfrm>
+          <a:prstGeom prst="rect">
+            <a:avLst/>
+          </a:prstGeom>
+          <a:noFill/>
+        </p:spPr>
+        <p:txBody>
+          <a:bodyPr wrap="square" lIns="0" rIns="0" tIns="0" bIns="0" anchor="t">
+            <a:spAutoFit/>
+          </a:bodyPr>
+          <a:lstStyle/>
+          <a:p>
+            <a:pPr algn="l">
+              <a:spcBef>
+                <a:spcPts val="0"/>
+              </a:spcBef>
+              <a:spcAft>
+                <a:spcPts val="0"/>
+              </a:spcAft>
+            </a:pPr>
+            <a:r>
+              <a:rPr sz="1150" b="1" i="0">
+                <a:solidFill>
+                  <a:srgbClr val="FFFFFF"/>
+                </a:solidFill>
+                <a:latin typeface="맑은 고딕"/>
+                <a:ea typeface="맑은 고딕"/>
+                <a:cs typeface="맑은 고딕"/>
+              </a:rPr>
+              <a:t>언제</a:t>
+            </a:r>
+          </a:p>
+        </p:txBody>
+      </p:sp>
+      <p:sp>
+        <p:nvSpPr>
+          <p:cNvPr id="8" name="TextBox 7"/>
+          <p:cNvSpPr txBox="1"/>
+          <p:nvPr/>
+        </p:nvSpPr>
+        <p:spPr>
+          <a:xfrm>
+            <a:off x="9107424" y="1792224"/>
+            <a:ext cx="2368296" cy="347472"/>
+          </a:xfrm>
+          <a:prstGeom prst="rect">
+            <a:avLst/>
+          </a:prstGeom>
+          <a:noFill/>
+        </p:spPr>
+        <p:txBody>
+          <a:bodyPr wrap="square" lIns="0" rIns="0" tIns="0" bIns="0" anchor="t">
+            <a:spAutoFit/>
+          </a:bodyPr>
+          <a:lstStyle/>
+          <a:p>
+            <a:pPr algn="l">
+              <a:spcBef>
+                <a:spcPts val="0"/>
+              </a:spcBef>
+              <a:spcAft>
+                <a:spcPts val="0"/>
+              </a:spcAft>
+            </a:pPr>
+            <a:r>
+              <a:rPr sz="1150" b="1" i="0">
+                <a:solidFill>
+                  <a:srgbClr val="FFFFFF"/>
+                </a:solidFill>
+                <a:latin typeface="맑은 고딕"/>
+                <a:ea typeface="맑은 고딕"/>
+                <a:cs typeface="맑은 고딕"/>
+              </a:rPr>
+              <a:t>지금 상태</a:t>
+            </a:r>
+          </a:p>
+        </p:txBody>
+      </p:sp>
+      <p:sp>
+        <p:nvSpPr>
+          <p:cNvPr id="9" name="Rounded Rectangle 8"/>
+          <p:cNvSpPr/>
+          <p:nvPr/>
+        </p:nvSpPr>
+        <p:spPr>
+          <a:xfrm>
+            <a:off x="658368" y="2203704"/>
+            <a:ext cx="10872216" cy="457200"/>
+          </a:xfrm>
+          <a:prstGeom prst="roundRect">
+            <a:avLst>
+              <a:gd name="adj" fmla="val 4000"/>
+            </a:avLst>
+          </a:prstGeom>
+          <a:solidFill>
+            <a:srgbClr val="F2F4F7"/>
+          </a:solidFill>
+          <a:ln>
+            <a:noFill/>
+          </a:ln>
+          <a:effectLst/>
+        </p:spPr>
+        <p:style>
+          <a:lnRef idx="1">
+            <a:schemeClr val="accent1"/>
+          </a:lnRef>
+          <a:fillRef idx="3">
+            <a:schemeClr val="accent1"/>
+          </a:fillRef>
+          <a:effectRef idx="2">
+            <a:schemeClr val="accent1"/>
+          </a:effectRef>
+          <a:fontRef idx="minor">
+            <a:schemeClr val="lt1"/>
+          </a:fontRef>
+        </p:style>
+        <p:txBody>
+          <a:bodyPr rtlCol="0" anchor="ctr"/>
+          <a:lstStyle/>
+          <a:p/>
+        </p:txBody>
+      </p:sp>
+      <p:sp>
+        <p:nvSpPr>
+          <p:cNvPr id="10" name="TextBox 9"/>
+          <p:cNvSpPr txBox="1"/>
+          <p:nvPr/>
+        </p:nvSpPr>
+        <p:spPr>
+          <a:xfrm>
+            <a:off x="786384" y="2304288"/>
+            <a:ext cx="1554480" cy="347472"/>
+          </a:xfrm>
+          <a:prstGeom prst="rect">
+            <a:avLst/>
+          </a:prstGeom>
+          <a:noFill/>
+        </p:spPr>
+        <p:txBody>
+          <a:bodyPr wrap="square" lIns="0" rIns="0" tIns="0" bIns="0" anchor="t">
+            <a:spAutoFit/>
+          </a:bodyPr>
+          <a:lstStyle/>
+          <a:p>
+            <a:pPr algn="l">
+              <a:spcBef>
+                <a:spcPts val="0"/>
+              </a:spcBef>
+              <a:spcAft>
+                <a:spcPts val="0"/>
+              </a:spcAft>
+            </a:pPr>
+            <a:r>
+              <a:rPr sz="1150" b="1" i="0">
+                <a:solidFill>
+                  <a:srgbClr val="1A2435"/>
+                </a:solidFill>
+                <a:latin typeface="맑은 고딕"/>
+                <a:ea typeface="맑은 고딕"/>
+                <a:cs typeface="맑은 고딕"/>
+              </a:rPr>
+              <a:t>관제 → 분석</a:t>
+            </a:r>
+          </a:p>
+        </p:txBody>
+      </p:sp>
+      <p:sp>
+        <p:nvSpPr>
+          <p:cNvPr id="11" name="TextBox 10"/>
+          <p:cNvSpPr txBox="1"/>
+          <p:nvPr/>
+        </p:nvSpPr>
+        <p:spPr>
+          <a:xfrm>
+            <a:off x="2523744" y="2304288"/>
+            <a:ext cx="4023359" cy="347472"/>
+          </a:xfrm>
+          <a:prstGeom prst="rect">
+            <a:avLst/>
+          </a:prstGeom>
+          <a:noFill/>
+        </p:spPr>
+        <p:txBody>
+          <a:bodyPr wrap="square" lIns="0" rIns="0" tIns="0" bIns="0" anchor="t">
+            <a:spAutoFit/>
+          </a:bodyPr>
+          <a:lstStyle/>
+          <a:p>
+            <a:pPr algn="l">
+              <a:spcBef>
+                <a:spcPts val="0"/>
+              </a:spcBef>
+              <a:spcAft>
+                <a:spcPts val="0"/>
+              </a:spcAft>
+            </a:pPr>
+            <a:r>
+              <a:rPr sz="1150" b="0" i="0">
+                <a:solidFill>
+                  <a:srgbClr val="1A2435"/>
+                </a:solidFill>
+                <a:latin typeface="맑은 고딕"/>
+                <a:ea typeface="맑은 고딕"/>
+                <a:cs typeface="맑은 고딕"/>
+              </a:rPr>
+              <a:t>현장 데이터 (열화상 · 센서 · RGB)</a:t>
+            </a:r>
+          </a:p>
+        </p:txBody>
+      </p:sp>
+      <p:sp>
+        <p:nvSpPr>
+          <p:cNvPr id="12" name="TextBox 11"/>
+          <p:cNvSpPr txBox="1"/>
+          <p:nvPr/>
+        </p:nvSpPr>
+        <p:spPr>
+          <a:xfrm>
+            <a:off x="6729983" y="2304288"/>
+            <a:ext cx="2194560" cy="347472"/>
+          </a:xfrm>
+          <a:prstGeom prst="rect">
+            <a:avLst/>
+          </a:prstGeom>
+          <a:noFill/>
+        </p:spPr>
+        <p:txBody>
+          <a:bodyPr wrap="square" lIns="0" rIns="0" tIns="0" bIns="0" anchor="t">
+            <a:spAutoFit/>
+          </a:bodyPr>
+          <a:lstStyle/>
+          <a:p>
+            <a:pPr algn="l">
+              <a:spcBef>
+                <a:spcPts val="0"/>
+              </a:spcBef>
+              <a:spcAft>
+                <a:spcPts val="0"/>
+              </a:spcAft>
+            </a:pPr>
+            <a:r>
+              <a:rPr sz="1150" b="0" i="0">
+                <a:solidFill>
+                  <a:srgbClr val="1A2435"/>
+                </a:solidFill>
+                <a:latin typeface="맑은 고딕"/>
+                <a:ea typeface="맑은 고딕"/>
+                <a:cs typeface="맑은 고딕"/>
+              </a:rPr>
+              <a:t>계속</a:t>
+            </a:r>
+          </a:p>
+        </p:txBody>
+      </p:sp>
+      <p:sp>
+        <p:nvSpPr>
+          <p:cNvPr id="13" name="TextBox 12"/>
+          <p:cNvSpPr txBox="1"/>
+          <p:nvPr/>
+        </p:nvSpPr>
+        <p:spPr>
+          <a:xfrm>
+            <a:off x="9107424" y="2304288"/>
+            <a:ext cx="2368296" cy="347472"/>
+          </a:xfrm>
+          <a:prstGeom prst="rect">
+            <a:avLst/>
+          </a:prstGeom>
+          <a:noFill/>
+        </p:spPr>
+        <p:txBody>
+          <a:bodyPr wrap="square" lIns="0" rIns="0" tIns="0" bIns="0" anchor="t">
+            <a:spAutoFit/>
+          </a:bodyPr>
+          <a:lstStyle/>
+          <a:p>
+            <a:pPr algn="l">
+              <a:spcBef>
+                <a:spcPts val="0"/>
+              </a:spcBef>
+              <a:spcAft>
+                <a:spcPts val="0"/>
+              </a:spcAft>
+            </a:pPr>
+            <a:r>
+              <a:rPr sz="1150" b="0" i="0">
+                <a:solidFill>
+                  <a:srgbClr val="2A9D8F"/>
+                </a:solidFill>
+                <a:latin typeface="맑은 고딕"/>
+                <a:ea typeface="맑은 고딕"/>
+                <a:cs typeface="맑은 고딕"/>
+              </a:rPr>
+              <a:t>동작</a:t>
+            </a:r>
+          </a:p>
+        </p:txBody>
+      </p:sp>
+      <p:sp>
+        <p:nvSpPr>
+          <p:cNvPr id="14" name="TextBox 13"/>
+          <p:cNvSpPr txBox="1"/>
+          <p:nvPr/>
+        </p:nvSpPr>
+        <p:spPr>
+          <a:xfrm>
+            <a:off x="786384" y="2798064"/>
+            <a:ext cx="1554480" cy="347472"/>
+          </a:xfrm>
+          <a:prstGeom prst="rect">
+            <a:avLst/>
+          </a:prstGeom>
+          <a:noFill/>
+        </p:spPr>
+        <p:txBody>
+          <a:bodyPr wrap="square" lIns="0" rIns="0" tIns="0" bIns="0" anchor="t">
+            <a:spAutoFit/>
+          </a:bodyPr>
+          <a:lstStyle/>
+          <a:p>
+            <a:pPr algn="l">
+              <a:spcBef>
+                <a:spcPts val="0"/>
+              </a:spcBef>
+              <a:spcAft>
+                <a:spcPts val="0"/>
+              </a:spcAft>
+            </a:pPr>
+            <a:r>
+              <a:rPr sz="1150" b="1" i="0">
+                <a:solidFill>
+                  <a:srgbClr val="1A2435"/>
+                </a:solidFill>
+                <a:latin typeface="맑은 고딕"/>
+                <a:ea typeface="맑은 고딕"/>
+                <a:cs typeface="맑은 고딕"/>
+              </a:rPr>
+              <a:t>관제 → 분석</a:t>
+            </a:r>
+          </a:p>
+        </p:txBody>
+      </p:sp>
+      <p:sp>
+        <p:nvSpPr>
+          <p:cNvPr id="15" name="TextBox 14"/>
+          <p:cNvSpPr txBox="1"/>
+          <p:nvPr/>
+        </p:nvSpPr>
+        <p:spPr>
+          <a:xfrm>
+            <a:off x="2523744" y="2798064"/>
+            <a:ext cx="4023359" cy="347472"/>
+          </a:xfrm>
+          <a:prstGeom prst="rect">
+            <a:avLst/>
+          </a:prstGeom>
+          <a:noFill/>
+        </p:spPr>
+        <p:txBody>
+          <a:bodyPr wrap="square" lIns="0" rIns="0" tIns="0" bIns="0" anchor="t">
+            <a:spAutoFit/>
+          </a:bodyPr>
+          <a:lstStyle/>
+          <a:p>
+            <a:pPr algn="l">
+              <a:spcBef>
+                <a:spcPts val="0"/>
+              </a:spcBef>
+              <a:spcAft>
+                <a:spcPts val="0"/>
+              </a:spcAft>
+            </a:pPr>
+            <a:r>
+              <a:rPr sz="1150" b="0" i="0">
+                <a:solidFill>
+                  <a:srgbClr val="1A2435"/>
+                </a:solidFill>
+                <a:latin typeface="맑은 고딕"/>
+                <a:ea typeface="맑은 고딕"/>
+                <a:cs typeface="맑은 고딕"/>
+              </a:rPr>
+              <a:t>분석마스크 (hotlist_mask_svr.ini)</a:t>
+            </a:r>
+          </a:p>
+        </p:txBody>
+      </p:sp>
+      <p:sp>
+        <p:nvSpPr>
+          <p:cNvPr id="16" name="TextBox 15"/>
+          <p:cNvSpPr txBox="1"/>
+          <p:nvPr/>
+        </p:nvSpPr>
+        <p:spPr>
+          <a:xfrm>
+            <a:off x="6729983" y="2798064"/>
+            <a:ext cx="2194560" cy="347472"/>
+          </a:xfrm>
+          <a:prstGeom prst="rect">
+            <a:avLst/>
+          </a:prstGeom>
+          <a:noFill/>
+        </p:spPr>
+        <p:txBody>
+          <a:bodyPr wrap="square" lIns="0" rIns="0" tIns="0" bIns="0" anchor="t">
+            <a:spAutoFit/>
+          </a:bodyPr>
+          <a:lstStyle/>
+          <a:p>
+            <a:pPr algn="l">
+              <a:spcBef>
+                <a:spcPts val="0"/>
+              </a:spcBef>
+              <a:spcAft>
+                <a:spcPts val="0"/>
+              </a:spcAft>
+            </a:pPr>
+            <a:r>
+              <a:rPr sz="1150" b="0" i="0">
+                <a:solidFill>
+                  <a:srgbClr val="1A2435"/>
+                </a:solidFill>
+                <a:latin typeface="맑은 고딕"/>
+                <a:ea typeface="맑은 고딕"/>
+                <a:cs typeface="맑은 고딕"/>
+              </a:rPr>
+              <a:t>[관제서버 분석마스크 받기]</a:t>
+            </a:r>
+          </a:p>
+        </p:txBody>
+      </p:sp>
+      <p:sp>
+        <p:nvSpPr>
+          <p:cNvPr id="17" name="TextBox 16"/>
+          <p:cNvSpPr txBox="1"/>
+          <p:nvPr/>
+        </p:nvSpPr>
+        <p:spPr>
+          <a:xfrm>
+            <a:off x="9107424" y="2798064"/>
+            <a:ext cx="2368296" cy="347472"/>
+          </a:xfrm>
+          <a:prstGeom prst="rect">
+            <a:avLst/>
+          </a:prstGeom>
+          <a:noFill/>
+        </p:spPr>
+        <p:txBody>
+          <a:bodyPr wrap="square" lIns="0" rIns="0" tIns="0" bIns="0" anchor="t">
+            <a:spAutoFit/>
+          </a:bodyPr>
+          <a:lstStyle/>
+          <a:p>
+            <a:pPr algn="l">
+              <a:spcBef>
+                <a:spcPts val="0"/>
+              </a:spcBef>
+              <a:spcAft>
+                <a:spcPts val="0"/>
+              </a:spcAft>
+            </a:pPr>
+            <a:r>
+              <a:rPr sz="1150" b="0" i="0">
+                <a:solidFill>
+                  <a:srgbClr val="2A9D8F"/>
+                </a:solidFill>
+                <a:latin typeface="맑은 고딕"/>
+                <a:ea typeface="맑은 고딕"/>
+                <a:cs typeface="맑은 고딕"/>
+              </a:rPr>
+              <a:t>동작</a:t>
+            </a:r>
+          </a:p>
+        </p:txBody>
+      </p:sp>
+      <p:sp>
+        <p:nvSpPr>
+          <p:cNvPr id="18" name="Rounded Rectangle 17"/>
+          <p:cNvSpPr/>
+          <p:nvPr/>
+        </p:nvSpPr>
+        <p:spPr>
+          <a:xfrm>
+            <a:off x="658368" y="3191256"/>
+            <a:ext cx="10872216" cy="457200"/>
+          </a:xfrm>
+          <a:prstGeom prst="roundRect">
+            <a:avLst>
+              <a:gd name="adj" fmla="val 4000"/>
+            </a:avLst>
+          </a:prstGeom>
+          <a:solidFill>
+            <a:srgbClr val="F2F4F7"/>
+          </a:solidFill>
+          <a:ln>
+            <a:noFill/>
+          </a:ln>
+          <a:effectLst/>
+        </p:spPr>
+        <p:style>
+          <a:lnRef idx="1">
+            <a:schemeClr val="accent1"/>
+          </a:lnRef>
+          <a:fillRef idx="3">
+            <a:schemeClr val="accent1"/>
+          </a:fillRef>
+          <a:effectRef idx="2">
+            <a:schemeClr val="accent1"/>
+          </a:effectRef>
+          <a:fontRef idx="minor">
+            <a:schemeClr val="lt1"/>
+          </a:fontRef>
+        </p:style>
+        <p:txBody>
+          <a:bodyPr rtlCol="0" anchor="ctr"/>
+          <a:lstStyle/>
+          <a:p/>
+        </p:txBody>
+      </p:sp>
+      <p:sp>
+        <p:nvSpPr>
+          <p:cNvPr id="19" name="TextBox 18"/>
+          <p:cNvSpPr txBox="1"/>
+          <p:nvPr/>
+        </p:nvSpPr>
+        <p:spPr>
+          <a:xfrm>
+            <a:off x="786384" y="3291840"/>
+            <a:ext cx="1554480" cy="347472"/>
+          </a:xfrm>
+          <a:prstGeom prst="rect">
+            <a:avLst/>
+          </a:prstGeom>
+          <a:noFill/>
+        </p:spPr>
+        <p:txBody>
+          <a:bodyPr wrap="square" lIns="0" rIns="0" tIns="0" bIns="0" anchor="t">
+            <a:spAutoFit/>
+          </a:bodyPr>
+          <a:lstStyle/>
+          <a:p>
+            <a:pPr algn="l">
+              <a:spcBef>
+                <a:spcPts val="0"/>
+              </a:spcBef>
+              <a:spcAft>
+                <a:spcPts val="0"/>
+              </a:spcAft>
+            </a:pPr>
+            <a:r>
+              <a:rPr sz="1150" b="1" i="0">
+                <a:solidFill>
+                  <a:srgbClr val="1A2435"/>
+                </a:solidFill>
+                <a:latin typeface="맑은 고딕"/>
+                <a:ea typeface="맑은 고딕"/>
+                <a:cs typeface="맑은 고딕"/>
+              </a:rPr>
+              <a:t>관제 → 분석</a:t>
+            </a:r>
+          </a:p>
+        </p:txBody>
+      </p:sp>
+      <p:sp>
+        <p:nvSpPr>
+          <p:cNvPr id="20" name="TextBox 19"/>
+          <p:cNvSpPr txBox="1"/>
+          <p:nvPr/>
+        </p:nvSpPr>
+        <p:spPr>
+          <a:xfrm>
+            <a:off x="2523744" y="3291840"/>
+            <a:ext cx="4023359" cy="347472"/>
+          </a:xfrm>
+          <a:prstGeom prst="rect">
+            <a:avLst/>
+          </a:prstGeom>
+          <a:noFill/>
+        </p:spPr>
+        <p:txBody>
+          <a:bodyPr wrap="square" lIns="0" rIns="0" tIns="0" bIns="0" anchor="t">
+            <a:spAutoFit/>
+          </a:bodyPr>
+          <a:lstStyle/>
+          <a:p>
+            <a:pPr algn="l">
+              <a:spcBef>
+                <a:spcPts val="0"/>
+              </a:spcBef>
+              <a:spcAft>
+                <a:spcPts val="0"/>
+              </a:spcAft>
+            </a:pPr>
+            <a:r>
+              <a:rPr sz="1150" b="0" i="0">
+                <a:solidFill>
+                  <a:srgbClr val="1A2435"/>
+                </a:solidFill>
+                <a:latin typeface="맑은 고딕"/>
+                <a:ea typeface="맑은 고딕"/>
+                <a:cs typeface="맑은 고딕"/>
+              </a:rPr>
+              <a:t>운전 상태 분류표 (웹에서 고친 것)</a:t>
+            </a:r>
+          </a:p>
+        </p:txBody>
+      </p:sp>
+      <p:sp>
+        <p:nvSpPr>
+          <p:cNvPr id="21" name="TextBox 20"/>
+          <p:cNvSpPr txBox="1"/>
+          <p:nvPr/>
+        </p:nvSpPr>
+        <p:spPr>
+          <a:xfrm>
+            <a:off x="6729983" y="3291840"/>
+            <a:ext cx="2194560" cy="347472"/>
+          </a:xfrm>
+          <a:prstGeom prst="rect">
+            <a:avLst/>
+          </a:prstGeom>
+          <a:noFill/>
+        </p:spPr>
+        <p:txBody>
+          <a:bodyPr wrap="square" lIns="0" rIns="0" tIns="0" bIns="0" anchor="t">
+            <a:spAutoFit/>
+          </a:bodyPr>
+          <a:lstStyle/>
+          <a:p>
+            <a:pPr algn="l">
+              <a:spcBef>
+                <a:spcPts val="0"/>
+              </a:spcBef>
+              <a:spcAft>
+                <a:spcPts val="0"/>
+              </a:spcAft>
+            </a:pPr>
+            <a:r>
+              <a:rPr sz="1150" b="0" i="0">
+                <a:solidFill>
+                  <a:srgbClr val="1A2435"/>
+                </a:solidFill>
+                <a:latin typeface="맑은 고딕"/>
+                <a:ea typeface="맑은 고딕"/>
+                <a:cs typeface="맑은 고딕"/>
+              </a:rPr>
+              <a:t>1분마다 확인</a:t>
+            </a:r>
+          </a:p>
+        </p:txBody>
+      </p:sp>
+      <p:sp>
+        <p:nvSpPr>
+          <p:cNvPr id="22" name="TextBox 21"/>
+          <p:cNvSpPr txBox="1"/>
+          <p:nvPr/>
+        </p:nvSpPr>
+        <p:spPr>
+          <a:xfrm>
+            <a:off x="9107424" y="3291840"/>
+            <a:ext cx="2368296" cy="347472"/>
+          </a:xfrm>
+          <a:prstGeom prst="rect">
+            <a:avLst/>
+          </a:prstGeom>
+          <a:noFill/>
+        </p:spPr>
+        <p:txBody>
+          <a:bodyPr wrap="square" lIns="0" rIns="0" tIns="0" bIns="0" anchor="t">
+            <a:spAutoFit/>
+          </a:bodyPr>
+          <a:lstStyle/>
+          <a:p>
+            <a:pPr algn="l">
+              <a:spcBef>
+                <a:spcPts val="0"/>
+              </a:spcBef>
+              <a:spcAft>
+                <a:spcPts val="0"/>
+              </a:spcAft>
+            </a:pPr>
+            <a:r>
+              <a:rPr sz="1150" b="0" i="0">
+                <a:solidFill>
+                  <a:srgbClr val="B7791F"/>
+                </a:solidFill>
+                <a:latin typeface="맑은 고딕"/>
+                <a:ea typeface="맑은 고딕"/>
+                <a:cs typeface="맑은 고딕"/>
+              </a:rPr>
+              <a:t>감시 재시작 후</a:t>
+            </a:r>
+          </a:p>
+        </p:txBody>
+      </p:sp>
+      <p:sp>
+        <p:nvSpPr>
+          <p:cNvPr id="23" name="TextBox 22"/>
+          <p:cNvSpPr txBox="1"/>
+          <p:nvPr/>
+        </p:nvSpPr>
+        <p:spPr>
+          <a:xfrm>
+            <a:off x="786384" y="3785616"/>
+            <a:ext cx="1554480" cy="347472"/>
+          </a:xfrm>
+          <a:prstGeom prst="rect">
+            <a:avLst/>
+          </a:prstGeom>
+          <a:noFill/>
+        </p:spPr>
+        <p:txBody>
+          <a:bodyPr wrap="square" lIns="0" rIns="0" tIns="0" bIns="0" anchor="t">
+            <a:spAutoFit/>
+          </a:bodyPr>
+          <a:lstStyle/>
+          <a:p>
+            <a:pPr algn="l">
+              <a:spcBef>
+                <a:spcPts val="0"/>
+              </a:spcBef>
+              <a:spcAft>
+                <a:spcPts val="0"/>
+              </a:spcAft>
+            </a:pPr>
+            <a:r>
+              <a:rPr sz="1150" b="1" i="0">
+                <a:solidFill>
+                  <a:srgbClr val="1A2435"/>
+                </a:solidFill>
+                <a:latin typeface="맑은 고딕"/>
+                <a:ea typeface="맑은 고딕"/>
+                <a:cs typeface="맑은 고딕"/>
+              </a:rPr>
+              <a:t>분석 → 관제</a:t>
+            </a:r>
+          </a:p>
+        </p:txBody>
+      </p:sp>
+      <p:sp>
+        <p:nvSpPr>
+          <p:cNvPr id="24" name="TextBox 23"/>
+          <p:cNvSpPr txBox="1"/>
+          <p:nvPr/>
+        </p:nvSpPr>
+        <p:spPr>
+          <a:xfrm>
+            <a:off x="2523744" y="3785616"/>
+            <a:ext cx="4023359" cy="347472"/>
+          </a:xfrm>
+          <a:prstGeom prst="rect">
+            <a:avLst/>
+          </a:prstGeom>
+          <a:noFill/>
+        </p:spPr>
+        <p:txBody>
+          <a:bodyPr wrap="square" lIns="0" rIns="0" tIns="0" bIns="0" anchor="t">
+            <a:spAutoFit/>
+          </a:bodyPr>
+          <a:lstStyle/>
+          <a:p>
+            <a:pPr algn="l">
+              <a:spcBef>
+                <a:spcPts val="0"/>
+              </a:spcBef>
+              <a:spcAft>
+                <a:spcPts val="0"/>
+              </a:spcAft>
+            </a:pPr>
+            <a:r>
+              <a:rPr sz="1150" b="0" i="0">
+                <a:solidFill>
+                  <a:srgbClr val="1A2435"/>
+                </a:solidFill>
+                <a:latin typeface="맑은 고딕"/>
+                <a:ea typeface="맑은 고딕"/>
+                <a:cs typeface="맑은 고딕"/>
+              </a:rPr>
+              <a:t>지금 운전 상태 (이름 · 벗어남)</a:t>
+            </a:r>
+          </a:p>
+        </p:txBody>
+      </p:sp>
+      <p:sp>
+        <p:nvSpPr>
+          <p:cNvPr id="25" name="TextBox 24"/>
+          <p:cNvSpPr txBox="1"/>
+          <p:nvPr/>
+        </p:nvSpPr>
+        <p:spPr>
+          <a:xfrm>
+            <a:off x="6729983" y="3785616"/>
+            <a:ext cx="2194560" cy="347472"/>
+          </a:xfrm>
+          <a:prstGeom prst="rect">
+            <a:avLst/>
+          </a:prstGeom>
+          <a:noFill/>
+        </p:spPr>
+        <p:txBody>
+          <a:bodyPr wrap="square" lIns="0" rIns="0" tIns="0" bIns="0" anchor="t">
+            <a:spAutoFit/>
+          </a:bodyPr>
+          <a:lstStyle/>
+          <a:p>
+            <a:pPr algn="l">
+              <a:spcBef>
+                <a:spcPts val="0"/>
+              </a:spcBef>
+              <a:spcAft>
+                <a:spcPts val="0"/>
+              </a:spcAft>
+            </a:pPr>
+            <a:r>
+              <a:rPr sz="1150" b="0" i="0">
+                <a:solidFill>
+                  <a:srgbClr val="1A2435"/>
+                </a:solidFill>
+                <a:latin typeface="맑은 고딕"/>
+                <a:ea typeface="맑은 고딕"/>
+                <a:cs typeface="맑은 고딕"/>
+              </a:rPr>
+              <a:t>1분마다 · 동기화 키</a:t>
+            </a:r>
+          </a:p>
+        </p:txBody>
+      </p:sp>
+      <p:sp>
+        <p:nvSpPr>
+          <p:cNvPr id="26" name="TextBox 25"/>
+          <p:cNvSpPr txBox="1"/>
+          <p:nvPr/>
+        </p:nvSpPr>
+        <p:spPr>
+          <a:xfrm>
+            <a:off x="9107424" y="3785616"/>
+            <a:ext cx="2368296" cy="347472"/>
+          </a:xfrm>
+          <a:prstGeom prst="rect">
+            <a:avLst/>
+          </a:prstGeom>
+          <a:noFill/>
+        </p:spPr>
+        <p:txBody>
+          <a:bodyPr wrap="square" lIns="0" rIns="0" tIns="0" bIns="0" anchor="t">
+            <a:spAutoFit/>
+          </a:bodyPr>
+          <a:lstStyle/>
+          <a:p>
+            <a:pPr algn="l">
+              <a:spcBef>
+                <a:spcPts val="0"/>
+              </a:spcBef>
+              <a:spcAft>
+                <a:spcPts val="0"/>
+              </a:spcAft>
+            </a:pPr>
+            <a:r>
+              <a:rPr sz="1150" b="0" i="0">
+                <a:solidFill>
+                  <a:srgbClr val="B7791F"/>
+                </a:solidFill>
+                <a:latin typeface="맑은 고딕"/>
+                <a:ea typeface="맑은 고딕"/>
+                <a:cs typeface="맑은 고딕"/>
+              </a:rPr>
+              <a:t>키 설정 후</a:t>
+            </a:r>
+          </a:p>
+        </p:txBody>
+      </p:sp>
+      <p:sp>
+        <p:nvSpPr>
+          <p:cNvPr id="27" name="Rounded Rectangle 26"/>
+          <p:cNvSpPr/>
+          <p:nvPr/>
+        </p:nvSpPr>
+        <p:spPr>
+          <a:xfrm>
+            <a:off x="658368" y="4178808"/>
+            <a:ext cx="10872216" cy="457200"/>
+          </a:xfrm>
+          <a:prstGeom prst="roundRect">
+            <a:avLst>
+              <a:gd name="adj" fmla="val 4000"/>
+            </a:avLst>
+          </a:prstGeom>
+          <a:solidFill>
+            <a:srgbClr val="F2F4F7"/>
+          </a:solidFill>
+          <a:ln>
+            <a:noFill/>
+          </a:ln>
+          <a:effectLst/>
+        </p:spPr>
+        <p:style>
+          <a:lnRef idx="1">
+            <a:schemeClr val="accent1"/>
+          </a:lnRef>
+          <a:fillRef idx="3">
+            <a:schemeClr val="accent1"/>
+          </a:fillRef>
+          <a:effectRef idx="2">
+            <a:schemeClr val="accent1"/>
+          </a:effectRef>
+          <a:fontRef idx="minor">
+            <a:schemeClr val="lt1"/>
+          </a:fontRef>
+        </p:style>
+        <p:txBody>
+          <a:bodyPr rtlCol="0" anchor="ctr"/>
+          <a:lstStyle/>
+          <a:p/>
+        </p:txBody>
+      </p:sp>
+      <p:sp>
+        <p:nvSpPr>
+          <p:cNvPr id="28" name="TextBox 27"/>
+          <p:cNvSpPr txBox="1"/>
+          <p:nvPr/>
+        </p:nvSpPr>
+        <p:spPr>
+          <a:xfrm>
+            <a:off x="786384" y="4279392"/>
+            <a:ext cx="1554480" cy="347472"/>
+          </a:xfrm>
+          <a:prstGeom prst="rect">
+            <a:avLst/>
+          </a:prstGeom>
+          <a:noFill/>
+        </p:spPr>
+        <p:txBody>
+          <a:bodyPr wrap="square" lIns="0" rIns="0" tIns="0" bIns="0" anchor="t">
+            <a:spAutoFit/>
+          </a:bodyPr>
+          <a:lstStyle/>
+          <a:p>
+            <a:pPr algn="l">
+              <a:spcBef>
+                <a:spcPts val="0"/>
+              </a:spcBef>
+              <a:spcAft>
+                <a:spcPts val="0"/>
+              </a:spcAft>
+            </a:pPr>
+            <a:r>
+              <a:rPr sz="1150" b="1" i="0">
+                <a:solidFill>
+                  <a:srgbClr val="1A2435"/>
+                </a:solidFill>
+                <a:latin typeface="맑은 고딕"/>
+                <a:ea typeface="맑은 고딕"/>
+                <a:cs typeface="맑은 고딕"/>
+              </a:rPr>
+              <a:t>분석 → 관제</a:t>
+            </a:r>
+          </a:p>
+        </p:txBody>
+      </p:sp>
+      <p:sp>
+        <p:nvSpPr>
+          <p:cNvPr id="29" name="TextBox 28"/>
+          <p:cNvSpPr txBox="1"/>
+          <p:nvPr/>
+        </p:nvSpPr>
+        <p:spPr>
+          <a:xfrm>
+            <a:off x="2523744" y="4279392"/>
+            <a:ext cx="4023359" cy="347472"/>
+          </a:xfrm>
+          <a:prstGeom prst="rect">
+            <a:avLst/>
+          </a:prstGeom>
+          <a:noFill/>
+        </p:spPr>
+        <p:txBody>
+          <a:bodyPr wrap="square" lIns="0" rIns="0" tIns="0" bIns="0" anchor="t">
+            <a:spAutoFit/>
+          </a:bodyPr>
+          <a:lstStyle/>
+          <a:p>
+            <a:pPr algn="l">
+              <a:spcBef>
+                <a:spcPts val="0"/>
+              </a:spcBef>
+              <a:spcAft>
+                <a:spcPts val="0"/>
+              </a:spcAft>
+            </a:pPr>
+            <a:r>
+              <a:rPr sz="1150" b="0" i="0">
+                <a:solidFill>
+                  <a:srgbClr val="1A2435"/>
+                </a:solidFill>
+                <a:latin typeface="맑은 고딕"/>
+                <a:ea typeface="맑은 고딕"/>
+                <a:cs typeface="맑은 고딕"/>
+              </a:rPr>
+              <a:t>운전 상태 분류표 (바뀌면)</a:t>
+            </a:r>
+          </a:p>
+        </p:txBody>
+      </p:sp>
+      <p:sp>
+        <p:nvSpPr>
+          <p:cNvPr id="30" name="TextBox 29"/>
+          <p:cNvSpPr txBox="1"/>
+          <p:nvPr/>
+        </p:nvSpPr>
+        <p:spPr>
+          <a:xfrm>
+            <a:off x="6729983" y="4279392"/>
+            <a:ext cx="2194560" cy="347472"/>
+          </a:xfrm>
+          <a:prstGeom prst="rect">
+            <a:avLst/>
+          </a:prstGeom>
+          <a:noFill/>
+        </p:spPr>
+        <p:txBody>
+          <a:bodyPr wrap="square" lIns="0" rIns="0" tIns="0" bIns="0" anchor="t">
+            <a:spAutoFit/>
+          </a:bodyPr>
+          <a:lstStyle/>
+          <a:p>
+            <a:pPr algn="l">
+              <a:spcBef>
+                <a:spcPts val="0"/>
+              </a:spcBef>
+              <a:spcAft>
+                <a:spcPts val="0"/>
+              </a:spcAft>
+            </a:pPr>
+            <a:r>
+              <a:rPr sz="1150" b="0" i="0">
+                <a:solidFill>
+                  <a:srgbClr val="1A2435"/>
+                </a:solidFill>
+                <a:latin typeface="맑은 고딕"/>
+                <a:ea typeface="맑은 고딕"/>
+                <a:cs typeface="맑은 고딕"/>
+              </a:rPr>
+              <a:t>변경 시 · 동기화 키</a:t>
+            </a:r>
+          </a:p>
+        </p:txBody>
+      </p:sp>
+      <p:sp>
+        <p:nvSpPr>
+          <p:cNvPr id="31" name="TextBox 30"/>
+          <p:cNvSpPr txBox="1"/>
+          <p:nvPr/>
+        </p:nvSpPr>
+        <p:spPr>
+          <a:xfrm>
+            <a:off x="9107424" y="4279392"/>
+            <a:ext cx="2368296" cy="347472"/>
+          </a:xfrm>
+          <a:prstGeom prst="rect">
+            <a:avLst/>
+          </a:prstGeom>
+          <a:noFill/>
+        </p:spPr>
+        <p:txBody>
+          <a:bodyPr wrap="square" lIns="0" rIns="0" tIns="0" bIns="0" anchor="t">
+            <a:spAutoFit/>
+          </a:bodyPr>
+          <a:lstStyle/>
+          <a:p>
+            <a:pPr algn="l">
+              <a:spcBef>
+                <a:spcPts val="0"/>
+              </a:spcBef>
+              <a:spcAft>
+                <a:spcPts val="0"/>
+              </a:spcAft>
+            </a:pPr>
+            <a:r>
+              <a:rPr sz="1150" b="0" i="0">
+                <a:solidFill>
+                  <a:srgbClr val="B7791F"/>
+                </a:solidFill>
+                <a:latin typeface="맑은 고딕"/>
+                <a:ea typeface="맑은 고딕"/>
+                <a:cs typeface="맑은 고딕"/>
+              </a:rPr>
+              <a:t>키 설정 후</a:t>
+            </a:r>
+          </a:p>
+        </p:txBody>
+      </p:sp>
+      <p:sp>
+        <p:nvSpPr>
+          <p:cNvPr id="32" name="TextBox 31"/>
+          <p:cNvSpPr txBox="1"/>
+          <p:nvPr/>
+        </p:nvSpPr>
+        <p:spPr>
+          <a:xfrm>
+            <a:off x="786384" y="4773168"/>
+            <a:ext cx="1554480" cy="347472"/>
+          </a:xfrm>
+          <a:prstGeom prst="rect">
+            <a:avLst/>
+          </a:prstGeom>
+          <a:noFill/>
+        </p:spPr>
+        <p:txBody>
+          <a:bodyPr wrap="square" lIns="0" rIns="0" tIns="0" bIns="0" anchor="t">
+            <a:spAutoFit/>
+          </a:bodyPr>
+          <a:lstStyle/>
+          <a:p>
+            <a:pPr algn="l">
+              <a:spcBef>
+                <a:spcPts val="0"/>
+              </a:spcBef>
+              <a:spcAft>
+                <a:spcPts val="0"/>
+              </a:spcAft>
+            </a:pPr>
+            <a:r>
+              <a:rPr sz="1150" b="1" i="0">
+                <a:solidFill>
+                  <a:srgbClr val="1A2435"/>
+                </a:solidFill>
+                <a:latin typeface="맑은 고딕"/>
+                <a:ea typeface="맑은 고딕"/>
+                <a:cs typeface="맑은 고딕"/>
+              </a:rPr>
+              <a:t>분석 → 관제</a:t>
+            </a:r>
+          </a:p>
+        </p:txBody>
+      </p:sp>
+      <p:sp>
+        <p:nvSpPr>
+          <p:cNvPr id="33" name="TextBox 32"/>
+          <p:cNvSpPr txBox="1"/>
+          <p:nvPr/>
+        </p:nvSpPr>
+        <p:spPr>
+          <a:xfrm>
+            <a:off x="2523744" y="4773168"/>
+            <a:ext cx="4023359" cy="347472"/>
+          </a:xfrm>
+          <a:prstGeom prst="rect">
+            <a:avLst/>
+          </a:prstGeom>
+          <a:noFill/>
+        </p:spPr>
+        <p:txBody>
+          <a:bodyPr wrap="square" lIns="0" rIns="0" tIns="0" bIns="0" anchor="t">
+            <a:spAutoFit/>
+          </a:bodyPr>
+          <a:lstStyle/>
+          <a:p>
+            <a:pPr algn="l">
+              <a:spcBef>
+                <a:spcPts val="0"/>
+              </a:spcBef>
+              <a:spcAft>
+                <a:spcPts val="0"/>
+              </a:spcAft>
+            </a:pPr>
+            <a:r>
+              <a:rPr sz="1150" b="0" i="0">
+                <a:solidFill>
+                  <a:srgbClr val="1A2435"/>
+                </a:solidFill>
+                <a:latin typeface="맑은 고딕"/>
+                <a:ea typeface="맑은 고딕"/>
+                <a:cs typeface="맑은 고딕"/>
+              </a:rPr>
+              <a:t>화재 경보 문자 요청 (smsTxt)</a:t>
+            </a:r>
+          </a:p>
+        </p:txBody>
+      </p:sp>
+      <p:sp>
+        <p:nvSpPr>
+          <p:cNvPr id="34" name="TextBox 33"/>
+          <p:cNvSpPr txBox="1"/>
+          <p:nvPr/>
+        </p:nvSpPr>
+        <p:spPr>
+          <a:xfrm>
+            <a:off x="6729983" y="4773168"/>
+            <a:ext cx="2194560" cy="347472"/>
+          </a:xfrm>
+          <a:prstGeom prst="rect">
+            <a:avLst/>
+          </a:prstGeom>
+          <a:noFill/>
+        </p:spPr>
+        <p:txBody>
+          <a:bodyPr wrap="square" lIns="0" rIns="0" tIns="0" bIns="0" anchor="t">
+            <a:spAutoFit/>
+          </a:bodyPr>
+          <a:lstStyle/>
+          <a:p>
+            <a:pPr algn="l">
+              <a:spcBef>
+                <a:spcPts val="0"/>
+              </a:spcBef>
+              <a:spcAft>
+                <a:spcPts val="0"/>
+              </a:spcAft>
+            </a:pPr>
+            <a:r>
+              <a:rPr sz="1150" b="0" i="0">
+                <a:solidFill>
+                  <a:srgbClr val="1A2435"/>
+                </a:solidFill>
+                <a:latin typeface="맑은 고딕"/>
+                <a:ea typeface="맑은 고딕"/>
+                <a:cs typeface="맑은 고딕"/>
+              </a:rPr>
+              <a:t>화재 감지 시</a:t>
+            </a:r>
+          </a:p>
+        </p:txBody>
+      </p:sp>
+      <p:sp>
+        <p:nvSpPr>
+          <p:cNvPr id="35" name="TextBox 34"/>
+          <p:cNvSpPr txBox="1"/>
+          <p:nvPr/>
+        </p:nvSpPr>
+        <p:spPr>
+          <a:xfrm>
+            <a:off x="9107424" y="4773168"/>
+            <a:ext cx="2368296" cy="347472"/>
+          </a:xfrm>
+          <a:prstGeom prst="rect">
+            <a:avLst/>
+          </a:prstGeom>
+          <a:noFill/>
+        </p:spPr>
+        <p:txBody>
+          <a:bodyPr wrap="square" lIns="0" rIns="0" tIns="0" bIns="0" anchor="t">
+            <a:spAutoFit/>
+          </a:bodyPr>
+          <a:lstStyle/>
+          <a:p>
+            <a:pPr algn="l">
+              <a:spcBef>
+                <a:spcPts val="0"/>
+              </a:spcBef>
+              <a:spcAft>
+                <a:spcPts val="0"/>
+              </a:spcAft>
+            </a:pPr>
+            <a:r>
+              <a:rPr sz="1150" b="0" i="0">
+                <a:solidFill>
+                  <a:srgbClr val="E4572E"/>
+                </a:solidFill>
+                <a:latin typeface="맑은 고딕"/>
+                <a:ea typeface="맑은 고딕"/>
+                <a:cs typeface="맑은 고딕"/>
+              </a:rPr>
+              <a:t>동작 안 함</a:t>
+            </a:r>
+          </a:p>
+        </p:txBody>
+      </p:sp>
+      <p:sp>
+        <p:nvSpPr>
+          <p:cNvPr id="36" name="Rounded Rectangle 35"/>
+          <p:cNvSpPr/>
+          <p:nvPr/>
+        </p:nvSpPr>
+        <p:spPr>
+          <a:xfrm>
+            <a:off x="658368" y="5303520"/>
+            <a:ext cx="10874959" cy="914400"/>
+          </a:xfrm>
+          <a:prstGeom prst="roundRect">
+            <a:avLst>
+              <a:gd name="adj" fmla="val 6000"/>
+            </a:avLst>
+          </a:prstGeom>
+          <a:solidFill>
+            <a:srgbClr val="FDF1EC"/>
+          </a:solidFill>
+          <a:ln>
+            <a:noFill/>
+          </a:ln>
+          <a:effectLst/>
+        </p:spPr>
+        <p:style>
+          <a:lnRef idx="1">
+            <a:schemeClr val="accent1"/>
+          </a:lnRef>
+          <a:fillRef idx="3">
+            <a:schemeClr val="accent1"/>
+          </a:fillRef>
+          <a:effectRef idx="2">
+            <a:schemeClr val="accent1"/>
+          </a:effectRef>
+          <a:fontRef idx="minor">
+            <a:schemeClr val="lt1"/>
+          </a:fontRef>
+        </p:style>
+        <p:txBody>
+          <a:bodyPr rtlCol="0" anchor="ctr"/>
+          <a:lstStyle/>
+          <a:p/>
+        </p:txBody>
+      </p:sp>
+      <p:sp>
+        <p:nvSpPr>
+          <p:cNvPr id="37" name="TextBox 36"/>
+          <p:cNvSpPr txBox="1"/>
+          <p:nvPr/>
+        </p:nvSpPr>
+        <p:spPr>
+          <a:xfrm>
+            <a:off x="932688" y="5449824"/>
+            <a:ext cx="10326319" cy="685800"/>
+          </a:xfrm>
+          <a:prstGeom prst="rect">
+            <a:avLst/>
+          </a:prstGeom>
+          <a:noFill/>
+        </p:spPr>
+        <p:txBody>
+          <a:bodyPr wrap="square" lIns="0" rIns="0" tIns="0" bIns="0" anchor="t">
+            <a:spAutoFit/>
+          </a:bodyPr>
+          <a:lstStyle/>
+          <a:p>
+            <a:pPr algn="l">
+              <a:spcBef>
+                <a:spcPts val="0"/>
+              </a:spcBef>
+              <a:spcAft>
+                <a:spcPts val="400"/>
+              </a:spcAft>
+            </a:pPr>
+            <a:r>
+              <a:rPr sz="1250" b="1" i="0">
+                <a:solidFill>
+                  <a:srgbClr val="E4572E"/>
+                </a:solidFill>
+                <a:latin typeface="맑은 고딕"/>
+                <a:ea typeface="맑은 고딕"/>
+                <a:cs typeface="맑은 고딕"/>
+              </a:rPr>
+              <a:t>화재 경보 문자 요청은 쓰이지 않는 옛 경로</a:t>
+            </a:r>
+          </a:p>
+          <a:p>
+            <a:pPr algn="l">
+              <a:lnSpc>
+                <a:spcPct val="125000"/>
+              </a:lnSpc>
+              <a:spcBef>
+                <a:spcPts val="0"/>
+              </a:spcBef>
+              <a:spcAft>
+                <a:spcPts val="0"/>
+              </a:spcAft>
+            </a:pPr>
+            <a:r>
+              <a:rPr sz="1150" b="0" i="0">
+                <a:solidFill>
+                  <a:srgbClr val="1A2435"/>
+                </a:solidFill>
+                <a:latin typeface="맑은 고딕"/>
+                <a:ea typeface="맑은 고딕"/>
+                <a:cs typeface="맑은 고딕"/>
+              </a:rPr>
+              <a:t>predict_machine.py 의 주소가 kict_samsung_test/assets/send_sms.php (404) · 실패해도 기록이 남지 않음 · 실제 문자는 관제서버 auto_check.php 가 DB 서버 값으로 판단해 보냄 · 점수와 판정 이력은 분석서버 MySQL 에만 쌓임</a:t>
+            </a:r>
+          </a:p>
+        </p:txBody>
+      </p:sp>
+      <p:sp>
+        <p:nvSpPr>
+          <p:cNvPr id="38" name="TextBox 37"/>
+          <p:cNvSpPr txBox="1"/>
+          <p:nvPr/>
+        </p:nvSpPr>
+        <p:spPr>
+          <a:xfrm>
+            <a:off x="10618927" y="6291072"/>
+            <a:ext cx="914400" cy="274320"/>
+          </a:xfrm>
+          <a:prstGeom prst="rect">
+            <a:avLst/>
+          </a:prstGeom>
+          <a:noFill/>
+        </p:spPr>
+        <p:txBody>
+          <a:bodyPr wrap="square" lIns="0" rIns="0" tIns="0" bIns="0" anchor="t">
+            <a:spAutoFit/>
+          </a:bodyPr>
+          <a:lstStyle/>
+          <a:p>
+            <a:pPr algn="r">
+              <a:spcBef>
+                <a:spcPts val="0"/>
+              </a:spcBef>
+              <a:spcAft>
+                <a:spcPts val="0"/>
+              </a:spcAft>
+            </a:pPr>
+            <a:r>
+              <a:rPr sz="1050" b="0" i="0">
+                <a:solidFill>
+                  <a:srgbClr val="667085"/>
+                </a:solidFill>
+                <a:latin typeface="맑은 고딕"/>
+                <a:ea typeface="맑은 고딕"/>
+                <a:cs typeface="맑은 고딕"/>
+              </a:rPr>
+              <a:t>34</a:t>
+            </a:r>
+          </a:p>
+        </p:txBody>
+      </p:sp>
+    </p:spTree>
+  </p:cSld>
+  <p:clrMapOvr>
+    <a:masterClrMapping/>
+  </p:clrMapOvr>
+</p:sld>
+</file>
+
+<file path=ppt/slides/slide36.xml><?xml version="1.0" encoding="utf-8"?>
+<p:sld xmlns:a="http://schemas.openxmlformats.org/drawingml/2006/main" xmlns:p="http://schemas.openxmlformats.org/presentationml/2006/main" xmlns:r="http://schemas.openxmlformats.org/officeDocument/2006/relationships">
+  <p:cSld>
+    <p:bg>
+      <p:bgPr>
+        <a:solidFill>
+          <a:srgbClr val="FFFFFF"/>
+        </a:solidFill>
+        <a:effectLst/>
+      </p:bgPr>
+    </p:bg>
+    <p:spTree>
+      <p:nvGrpSpPr>
+        <p:cNvPr id="1" name=""/>
+        <p:cNvGrpSpPr/>
+        <p:nvPr/>
+      </p:nvGrpSpPr>
+      <p:grpSpPr/>
+      <p:sp>
+        <p:nvSpPr>
+          <p:cNvPr id="2" name="TextBox 1"/>
+          <p:cNvSpPr txBox="1"/>
+          <p:nvPr/>
+        </p:nvSpPr>
+        <p:spPr>
+          <a:xfrm>
+            <a:off x="658368" y="475488"/>
+            <a:ext cx="10874959" cy="310896"/>
+          </a:xfrm>
+          <a:prstGeom prst="rect">
+            <a:avLst/>
+          </a:prstGeom>
+          <a:noFill/>
+        </p:spPr>
+        <p:txBody>
+          <a:bodyPr wrap="square" lIns="0" rIns="0" tIns="0" bIns="0" anchor="t">
+            <a:spAutoFit/>
+          </a:bodyPr>
+          <a:lstStyle/>
+          <a:p>
+            <a:pPr algn="l">
+              <a:spcBef>
+                <a:spcPts val="0"/>
+              </a:spcBef>
+              <a:spcAft>
+                <a:spcPts val="0"/>
+              </a:spcAft>
+            </a:pPr>
+            <a:r>
+              <a:rPr sz="1250" b="1" i="0">
+                <a:solidFill>
+                  <a:srgbClr val="E4572E"/>
+                </a:solidFill>
+                <a:latin typeface="맑은 고딕"/>
+                <a:ea typeface="맑은 고딕"/>
+                <a:cs typeface="맑은 고딕"/>
+              </a:rPr>
+              <a:t>35  DB SERVER API</a:t>
+            </a:r>
+          </a:p>
+        </p:txBody>
+      </p:sp>
+      <p:sp>
+        <p:nvSpPr>
+          <p:cNvPr id="3" name="TextBox 2"/>
+          <p:cNvSpPr txBox="1"/>
+          <p:nvPr/>
+        </p:nvSpPr>
+        <p:spPr>
+          <a:xfrm>
+            <a:off x="658368" y="804672"/>
+            <a:ext cx="10874959" cy="621792"/>
+          </a:xfrm>
+          <a:prstGeom prst="rect">
+            <a:avLst/>
+          </a:prstGeom>
+          <a:noFill/>
+        </p:spPr>
+        <p:txBody>
+          <a:bodyPr wrap="square" lIns="0" rIns="0" tIns="0" bIns="0" anchor="t">
+            <a:spAutoFit/>
+          </a:bodyPr>
+          <a:lstStyle/>
+          <a:p>
+            <a:pPr algn="l">
+              <a:spcBef>
+                <a:spcPts val="0"/>
+              </a:spcBef>
+              <a:spcAft>
+                <a:spcPts val="0"/>
+              </a:spcAft>
+            </a:pPr>
+            <a:r>
+              <a:rPr sz="3000" b="1" i="0">
+                <a:solidFill>
+                  <a:srgbClr val="1A2435"/>
+                </a:solidFill>
+                <a:latin typeface="맑은 고딕"/>
+                <a:ea typeface="맑은 고딕"/>
+                <a:cs typeface="맑은 고딕"/>
+              </a:rPr>
+              <a:t>관제서버가 DB 서버 API 로 가져오는 것</a:t>
+            </a:r>
+          </a:p>
+        </p:txBody>
+      </p:sp>
+      <p:sp>
+        <p:nvSpPr>
+          <p:cNvPr id="4" name="Rounded Rectangle 3"/>
+          <p:cNvSpPr/>
+          <p:nvPr/>
+        </p:nvSpPr>
+        <p:spPr>
+          <a:xfrm>
+            <a:off x="658368" y="1691640"/>
+            <a:ext cx="10872216" cy="457200"/>
+          </a:xfrm>
+          <a:prstGeom prst="roundRect">
+            <a:avLst>
+              <a:gd name="adj" fmla="val 4000"/>
+            </a:avLst>
+          </a:prstGeom>
+          <a:solidFill>
+            <a:srgbClr val="1C2B45"/>
+          </a:solidFill>
+          <a:ln>
+            <a:noFill/>
+          </a:ln>
+          <a:effectLst/>
+        </p:spPr>
+        <p:style>
+          <a:lnRef idx="1">
+            <a:schemeClr val="accent1"/>
+          </a:lnRef>
+          <a:fillRef idx="3">
+            <a:schemeClr val="accent1"/>
+          </a:fillRef>
+          <a:effectRef idx="2">
+            <a:schemeClr val="accent1"/>
+          </a:effectRef>
+          <a:fontRef idx="minor">
+            <a:schemeClr val="lt1"/>
+          </a:fontRef>
+        </p:style>
+        <p:txBody>
+          <a:bodyPr rtlCol="0" anchor="ctr"/>
+          <a:lstStyle/>
+          <a:p/>
+        </p:txBody>
+      </p:sp>
+      <p:sp>
+        <p:nvSpPr>
+          <p:cNvPr id="5" name="TextBox 4"/>
+          <p:cNvSpPr txBox="1"/>
+          <p:nvPr/>
+        </p:nvSpPr>
+        <p:spPr>
+          <a:xfrm>
+            <a:off x="786384" y="1792224"/>
+            <a:ext cx="1965960" cy="347472"/>
+          </a:xfrm>
+          <a:prstGeom prst="rect">
+            <a:avLst/>
+          </a:prstGeom>
+          <a:noFill/>
+        </p:spPr>
+        <p:txBody>
+          <a:bodyPr wrap="square" lIns="0" rIns="0" tIns="0" bIns="0" anchor="t">
+            <a:spAutoFit/>
+          </a:bodyPr>
+          <a:lstStyle/>
+          <a:p>
+            <a:pPr algn="l">
+              <a:spcBef>
+                <a:spcPts val="0"/>
+              </a:spcBef>
+              <a:spcAft>
+                <a:spcPts val="0"/>
+              </a:spcAft>
+            </a:pPr>
+            <a:r>
+              <a:rPr sz="1150" b="1" i="0">
+                <a:solidFill>
+                  <a:srgbClr val="FFFFFF"/>
+                </a:solidFill>
+                <a:latin typeface="맑은 고딕"/>
+                <a:ea typeface="맑은 고딕"/>
+                <a:cs typeface="맑은 고딕"/>
+              </a:rPr>
+              <a:t>API (8833)</a:t>
+            </a:r>
+          </a:p>
+        </p:txBody>
+      </p:sp>
+      <p:sp>
+        <p:nvSpPr>
+          <p:cNvPr id="6" name="TextBox 5"/>
+          <p:cNvSpPr txBox="1"/>
+          <p:nvPr/>
+        </p:nvSpPr>
+        <p:spPr>
+          <a:xfrm>
+            <a:off x="2935224" y="1792224"/>
+            <a:ext cx="2560320" cy="347472"/>
+          </a:xfrm>
+          <a:prstGeom prst="rect">
+            <a:avLst/>
+          </a:prstGeom>
+          <a:noFill/>
+        </p:spPr>
+        <p:txBody>
+          <a:bodyPr wrap="square" lIns="0" rIns="0" tIns="0" bIns="0" anchor="t">
+            <a:spAutoFit/>
+          </a:bodyPr>
+          <a:lstStyle/>
+          <a:p>
+            <a:pPr algn="l">
+              <a:spcBef>
+                <a:spcPts val="0"/>
+              </a:spcBef>
+              <a:spcAft>
+                <a:spcPts val="0"/>
+              </a:spcAft>
+            </a:pPr>
+            <a:r>
+              <a:rPr sz="1150" b="1" i="0">
+                <a:solidFill>
+                  <a:srgbClr val="FFFFFF"/>
+                </a:solidFill>
+                <a:latin typeface="맑은 고딕"/>
+                <a:ea typeface="맑은 고딕"/>
+                <a:cs typeface="맑은 고딕"/>
+              </a:rPr>
+              <a:t>관제서버 파일</a:t>
+            </a:r>
+          </a:p>
+        </p:txBody>
+      </p:sp>
+      <p:sp>
+        <p:nvSpPr>
+          <p:cNvPr id="7" name="TextBox 6"/>
+          <p:cNvSpPr txBox="1"/>
+          <p:nvPr/>
+        </p:nvSpPr>
+        <p:spPr>
+          <a:xfrm>
+            <a:off x="5678424" y="1792224"/>
+            <a:ext cx="3611880" cy="347472"/>
+          </a:xfrm>
+          <a:prstGeom prst="rect">
+            <a:avLst/>
+          </a:prstGeom>
+          <a:noFill/>
+        </p:spPr>
+        <p:txBody>
+          <a:bodyPr wrap="square" lIns="0" rIns="0" tIns="0" bIns="0" anchor="t">
+            <a:spAutoFit/>
+          </a:bodyPr>
+          <a:lstStyle/>
+          <a:p>
+            <a:pPr algn="l">
+              <a:spcBef>
+                <a:spcPts val="0"/>
+              </a:spcBef>
+              <a:spcAft>
+                <a:spcPts val="0"/>
+              </a:spcAft>
+            </a:pPr>
+            <a:r>
+              <a:rPr sz="1150" b="1" i="0">
+                <a:solidFill>
+                  <a:srgbClr val="FFFFFF"/>
+                </a:solidFill>
+                <a:latin typeface="맑은 고딕"/>
+                <a:ea typeface="맑은 고딕"/>
+                <a:cs typeface="맑은 고딕"/>
+              </a:rPr>
+              <a:t>받는 정보</a:t>
+            </a:r>
+          </a:p>
+        </p:txBody>
+      </p:sp>
+      <p:sp>
+        <p:nvSpPr>
+          <p:cNvPr id="8" name="TextBox 7"/>
+          <p:cNvSpPr txBox="1"/>
+          <p:nvPr/>
+        </p:nvSpPr>
+        <p:spPr>
+          <a:xfrm>
+            <a:off x="9473184" y="1792224"/>
+            <a:ext cx="2002536" cy="347472"/>
+          </a:xfrm>
+          <a:prstGeom prst="rect">
+            <a:avLst/>
+          </a:prstGeom>
+          <a:noFill/>
+        </p:spPr>
+        <p:txBody>
+          <a:bodyPr wrap="square" lIns="0" rIns="0" tIns="0" bIns="0" anchor="t">
+            <a:spAutoFit/>
+          </a:bodyPr>
+          <a:lstStyle/>
+          <a:p>
+            <a:pPr algn="l">
+              <a:spcBef>
+                <a:spcPts val="0"/>
+              </a:spcBef>
+              <a:spcAft>
+                <a:spcPts val="0"/>
+              </a:spcAft>
+            </a:pPr>
+            <a:r>
+              <a:rPr sz="1150" b="1" i="0">
+                <a:solidFill>
+                  <a:srgbClr val="FFFFFF"/>
+                </a:solidFill>
+                <a:latin typeface="맑은 고딕"/>
+                <a:ea typeface="맑은 고딕"/>
+                <a:cs typeface="맑은 고딕"/>
+              </a:rPr>
+              <a:t>쓰는 곳</a:t>
+            </a:r>
+          </a:p>
+        </p:txBody>
+      </p:sp>
+      <p:sp>
+        <p:nvSpPr>
+          <p:cNvPr id="9" name="Rounded Rectangle 8"/>
+          <p:cNvSpPr/>
+          <p:nvPr/>
+        </p:nvSpPr>
+        <p:spPr>
+          <a:xfrm>
+            <a:off x="658368" y="2203704"/>
+            <a:ext cx="10872216" cy="713232"/>
+          </a:xfrm>
+          <a:prstGeom prst="roundRect">
+            <a:avLst>
+              <a:gd name="adj" fmla="val 4000"/>
+            </a:avLst>
+          </a:prstGeom>
+          <a:solidFill>
+            <a:srgbClr val="F2F4F7"/>
+          </a:solidFill>
+          <a:ln>
+            <a:noFill/>
+          </a:ln>
+          <a:effectLst/>
+        </p:spPr>
+        <p:style>
+          <a:lnRef idx="1">
+            <a:schemeClr val="accent1"/>
+          </a:lnRef>
+          <a:fillRef idx="3">
+            <a:schemeClr val="accent1"/>
+          </a:fillRef>
+          <a:effectRef idx="2">
+            <a:schemeClr val="accent1"/>
+          </a:effectRef>
+          <a:fontRef idx="minor">
+            <a:schemeClr val="lt1"/>
+          </a:fontRef>
+        </p:style>
+        <p:txBody>
+          <a:bodyPr rtlCol="0" anchor="ctr"/>
+          <a:lstStyle/>
+          <a:p/>
+        </p:txBody>
+      </p:sp>
+      <p:sp>
+        <p:nvSpPr>
+          <p:cNvPr id="10" name="TextBox 9"/>
+          <p:cNvSpPr txBox="1"/>
+          <p:nvPr/>
+        </p:nvSpPr>
+        <p:spPr>
+          <a:xfrm>
+            <a:off x="786384" y="2304288"/>
+            <a:ext cx="1965960" cy="603504"/>
+          </a:xfrm>
+          <a:prstGeom prst="rect">
+            <a:avLst/>
+          </a:prstGeom>
+          <a:noFill/>
+        </p:spPr>
+        <p:txBody>
+          <a:bodyPr wrap="square" lIns="0" rIns="0" tIns="0" bIns="0" anchor="t">
+            <a:spAutoFit/>
+          </a:bodyPr>
+          <a:lstStyle/>
+          <a:p>
+            <a:pPr algn="l">
+              <a:spcBef>
+                <a:spcPts val="0"/>
+              </a:spcBef>
+              <a:spcAft>
+                <a:spcPts val="0"/>
+              </a:spcAft>
+            </a:pPr>
+            <a:r>
+              <a:rPr sz="1150" b="1" i="0">
+                <a:solidFill>
+                  <a:srgbClr val="1A2435"/>
+                </a:solidFill>
+                <a:latin typeface="맑은 고딕"/>
+                <a:ea typeface="맑은 고딕"/>
+                <a:cs typeface="맑은 고딕"/>
+              </a:rPr>
+              <a:t>otg_last_rows.php</a:t>
+            </a:r>
+          </a:p>
+        </p:txBody>
+      </p:sp>
+      <p:sp>
+        <p:nvSpPr>
+          <p:cNvPr id="11" name="TextBox 10"/>
+          <p:cNvSpPr txBox="1"/>
+          <p:nvPr/>
+        </p:nvSpPr>
+        <p:spPr>
+          <a:xfrm>
+            <a:off x="2935224" y="2304288"/>
+            <a:ext cx="2560320" cy="603504"/>
+          </a:xfrm>
+          <a:prstGeom prst="rect">
+            <a:avLst/>
+          </a:prstGeom>
+          <a:noFill/>
+        </p:spPr>
+        <p:txBody>
+          <a:bodyPr wrap="square" lIns="0" rIns="0" tIns="0" bIns="0" anchor="t">
+            <a:spAutoFit/>
+          </a:bodyPr>
+          <a:lstStyle/>
+          <a:p>
+            <a:pPr algn="l">
+              <a:spcBef>
+                <a:spcPts val="0"/>
+              </a:spcBef>
+              <a:spcAft>
+                <a:spcPts val="0"/>
+              </a:spcAft>
+            </a:pPr>
+            <a:r>
+              <a:rPr sz="1150" b="0" i="0">
+                <a:solidFill>
+                  <a:srgbClr val="1A2435"/>
+                </a:solidFill>
+                <a:latin typeface="맑은 고딕"/>
+                <a:ea typeface="맑은 고딕"/>
+                <a:cs typeface="맑은 고딕"/>
+              </a:rPr>
+              <a:t>median_latest.php</a:t>
+            </a:r>
+          </a:p>
+        </p:txBody>
+      </p:sp>
+      <p:sp>
+        <p:nvSpPr>
+          <p:cNvPr id="12" name="TextBox 11"/>
+          <p:cNvSpPr txBox="1"/>
+          <p:nvPr/>
+        </p:nvSpPr>
+        <p:spPr>
+          <a:xfrm>
+            <a:off x="5678424" y="2304288"/>
+            <a:ext cx="3611880" cy="603504"/>
+          </a:xfrm>
+          <a:prstGeom prst="rect">
+            <a:avLst/>
+          </a:prstGeom>
+          <a:noFill/>
+        </p:spPr>
+        <p:txBody>
+          <a:bodyPr wrap="square" lIns="0" rIns="0" tIns="0" bIns="0" anchor="t">
+            <a:spAutoFit/>
+          </a:bodyPr>
+          <a:lstStyle/>
+          <a:p>
+            <a:pPr algn="l">
+              <a:spcBef>
+                <a:spcPts val="0"/>
+              </a:spcBef>
+              <a:spcAft>
+                <a:spcPts val="0"/>
+              </a:spcAft>
+            </a:pPr>
+            <a:r>
+              <a:rPr sz="1150" b="0" i="0">
+                <a:solidFill>
+                  <a:srgbClr val="1A2435"/>
+                </a:solidFill>
+                <a:latin typeface="맑은 고딕"/>
+                <a:ea typeface="맑은 고딕"/>
+                <a:cs typeface="맑은 고딕"/>
+              </a:rPr>
+              <a:t>최신 1건: 64칸 온도 · 분석마스크 · 화재/연기 값 · 인원/낙상 · score · 오류 코드</a:t>
+            </a:r>
+          </a:p>
+        </p:txBody>
+      </p:sp>
+      <p:sp>
+        <p:nvSpPr>
+          <p:cNvPr id="13" name="TextBox 12"/>
+          <p:cNvSpPr txBox="1"/>
+          <p:nvPr/>
+        </p:nvSpPr>
+        <p:spPr>
+          <a:xfrm>
+            <a:off x="9473184" y="2304288"/>
+            <a:ext cx="2002536" cy="603504"/>
+          </a:xfrm>
+          <a:prstGeom prst="rect">
+            <a:avLst/>
+          </a:prstGeom>
+          <a:noFill/>
+        </p:spPr>
+        <p:txBody>
+          <a:bodyPr wrap="square" lIns="0" rIns="0" tIns="0" bIns="0" anchor="t">
+            <a:spAutoFit/>
+          </a:bodyPr>
+          <a:lstStyle/>
+          <a:p>
+            <a:pPr algn="l">
+              <a:spcBef>
+                <a:spcPts val="0"/>
+              </a:spcBef>
+              <a:spcAft>
+                <a:spcPts val="0"/>
+              </a:spcAft>
+            </a:pPr>
+            <a:r>
+              <a:rPr sz="1150" b="0" i="0">
+                <a:solidFill>
+                  <a:srgbClr val="1A2435"/>
+                </a:solidFill>
+                <a:latin typeface="맑은 고딕"/>
+                <a:ea typeface="맑은 고딕"/>
+                <a:cs typeface="맑은 고딕"/>
+              </a:rPr>
+              <a:t>관제 화면 · 문자 판단</a:t>
+            </a:r>
+          </a:p>
+        </p:txBody>
+      </p:sp>
+      <p:sp>
+        <p:nvSpPr>
+          <p:cNvPr id="14" name="TextBox 13"/>
+          <p:cNvSpPr txBox="1"/>
+          <p:nvPr/>
+        </p:nvSpPr>
+        <p:spPr>
+          <a:xfrm>
+            <a:off x="786384" y="3054096"/>
+            <a:ext cx="1965960" cy="603504"/>
+          </a:xfrm>
+          <a:prstGeom prst="rect">
+            <a:avLst/>
+          </a:prstGeom>
+          <a:noFill/>
+        </p:spPr>
+        <p:txBody>
+          <a:bodyPr wrap="square" lIns="0" rIns="0" tIns="0" bIns="0" anchor="t">
+            <a:spAutoFit/>
+          </a:bodyPr>
+          <a:lstStyle/>
+          <a:p>
+            <a:pPr algn="l">
+              <a:spcBef>
+                <a:spcPts val="0"/>
+              </a:spcBef>
+              <a:spcAft>
+                <a:spcPts val="0"/>
+              </a:spcAft>
+            </a:pPr>
+            <a:r>
+              <a:rPr sz="1150" b="1" i="0">
+                <a:solidFill>
+                  <a:srgbClr val="1A2435"/>
+                </a:solidFill>
+                <a:latin typeface="맑은 고딕"/>
+                <a:ea typeface="맑은 고딕"/>
+                <a:cs typeface="맑은 고딕"/>
+              </a:rPr>
+              <a:t>serach_log.php</a:t>
+            </a:r>
+          </a:p>
+        </p:txBody>
+      </p:sp>
+      <p:sp>
+        <p:nvSpPr>
+          <p:cNvPr id="15" name="TextBox 14"/>
+          <p:cNvSpPr txBox="1"/>
+          <p:nvPr/>
+        </p:nvSpPr>
+        <p:spPr>
+          <a:xfrm>
+            <a:off x="2935224" y="3054096"/>
+            <a:ext cx="2560320" cy="603504"/>
+          </a:xfrm>
+          <a:prstGeom prst="rect">
+            <a:avLst/>
+          </a:prstGeom>
+          <a:noFill/>
+        </p:spPr>
+        <p:txBody>
+          <a:bodyPr wrap="square" lIns="0" rIns="0" tIns="0" bIns="0" anchor="t">
+            <a:spAutoFit/>
+          </a:bodyPr>
+          <a:lstStyle/>
+          <a:p>
+            <a:pPr algn="l">
+              <a:spcBef>
+                <a:spcPts val="0"/>
+              </a:spcBef>
+              <a:spcAft>
+                <a:spcPts val="0"/>
+              </a:spcAft>
+            </a:pPr>
+            <a:r>
+              <a:rPr sz="1150" b="0" i="0">
+                <a:solidFill>
+                  <a:srgbClr val="1A2435"/>
+                </a:solidFill>
+                <a:latin typeface="맑은 고딕"/>
+                <a:ea typeface="맑은 고딕"/>
+                <a:cs typeface="맑은 고딕"/>
+              </a:rPr>
+              <a:t>get_log.php</a:t>
+            </a:r>
+          </a:p>
+        </p:txBody>
+      </p:sp>
+      <p:sp>
+        <p:nvSpPr>
+          <p:cNvPr id="16" name="TextBox 15"/>
+          <p:cNvSpPr txBox="1"/>
+          <p:nvPr/>
+        </p:nvSpPr>
+        <p:spPr>
+          <a:xfrm>
+            <a:off x="5678424" y="3054096"/>
+            <a:ext cx="3611880" cy="603504"/>
+          </a:xfrm>
+          <a:prstGeom prst="rect">
+            <a:avLst/>
+          </a:prstGeom>
+          <a:noFill/>
+        </p:spPr>
+        <p:txBody>
+          <a:bodyPr wrap="square" lIns="0" rIns="0" tIns="0" bIns="0" anchor="t">
+            <a:spAutoFit/>
+          </a:bodyPr>
+          <a:lstStyle/>
+          <a:p>
+            <a:pPr algn="l">
+              <a:spcBef>
+                <a:spcPts val="0"/>
+              </a:spcBef>
+              <a:spcAft>
+                <a:spcPts val="0"/>
+              </a:spcAft>
+            </a:pPr>
+            <a:r>
+              <a:rPr sz="1150" b="0" i="0">
+                <a:solidFill>
+                  <a:srgbClr val="1A2435"/>
+                </a:solidFill>
+                <a:latin typeface="맑은 고딕"/>
+                <a:ea typeface="맑은 고딕"/>
+                <a:cs typeface="맑은 고딕"/>
+              </a:rPr>
+              <a:t>날짜별 기록: 시각별 64칸 온도 · 화재/연기 · 인원/낙상</a:t>
+            </a:r>
+          </a:p>
+        </p:txBody>
+      </p:sp>
+      <p:sp>
+        <p:nvSpPr>
+          <p:cNvPr id="17" name="TextBox 16"/>
+          <p:cNvSpPr txBox="1"/>
+          <p:nvPr/>
+        </p:nvSpPr>
+        <p:spPr>
+          <a:xfrm>
+            <a:off x="9473184" y="3054096"/>
+            <a:ext cx="2002536" cy="603504"/>
+          </a:xfrm>
+          <a:prstGeom prst="rect">
+            <a:avLst/>
+          </a:prstGeom>
+          <a:noFill/>
+        </p:spPr>
+        <p:txBody>
+          <a:bodyPr wrap="square" lIns="0" rIns="0" tIns="0" bIns="0" anchor="t">
+            <a:spAutoFit/>
+          </a:bodyPr>
+          <a:lstStyle/>
+          <a:p>
+            <a:pPr algn="l">
+              <a:spcBef>
+                <a:spcPts val="0"/>
+              </a:spcBef>
+              <a:spcAft>
+                <a:spcPts val="0"/>
+              </a:spcAft>
+            </a:pPr>
+            <a:r>
+              <a:rPr sz="1150" b="0" i="0">
+                <a:solidFill>
+                  <a:srgbClr val="1A2435"/>
+                </a:solidFill>
+                <a:latin typeface="맑은 고딕"/>
+                <a:ea typeface="맑은 고딕"/>
+                <a:cs typeface="맑은 고딕"/>
+              </a:rPr>
+              <a:t>이벤트 목록</a:t>
+            </a:r>
+          </a:p>
+        </p:txBody>
+      </p:sp>
+      <p:sp>
+        <p:nvSpPr>
+          <p:cNvPr id="18" name="Rounded Rectangle 17"/>
+          <p:cNvSpPr/>
+          <p:nvPr/>
+        </p:nvSpPr>
+        <p:spPr>
+          <a:xfrm>
+            <a:off x="658368" y="3703320"/>
+            <a:ext cx="10872216" cy="713232"/>
+          </a:xfrm>
+          <a:prstGeom prst="roundRect">
+            <a:avLst>
+              <a:gd name="adj" fmla="val 4000"/>
+            </a:avLst>
+          </a:prstGeom>
+          <a:solidFill>
+            <a:srgbClr val="F2F4F7"/>
+          </a:solidFill>
+          <a:ln>
+            <a:noFill/>
+          </a:ln>
+          <a:effectLst/>
+        </p:spPr>
+        <p:style>
+          <a:lnRef idx="1">
+            <a:schemeClr val="accent1"/>
+          </a:lnRef>
+          <a:fillRef idx="3">
+            <a:schemeClr val="accent1"/>
+          </a:fillRef>
+          <a:effectRef idx="2">
+            <a:schemeClr val="accent1"/>
+          </a:effectRef>
+          <a:fontRef idx="minor">
+            <a:schemeClr val="lt1"/>
+          </a:fontRef>
+        </p:style>
+        <p:txBody>
+          <a:bodyPr rtlCol="0" anchor="ctr"/>
+          <a:lstStyle/>
+          <a:p/>
+        </p:txBody>
+      </p:sp>
+      <p:sp>
+        <p:nvSpPr>
+          <p:cNvPr id="19" name="TextBox 18"/>
+          <p:cNvSpPr txBox="1"/>
+          <p:nvPr/>
+        </p:nvSpPr>
+        <p:spPr>
+          <a:xfrm>
+            <a:off x="786384" y="3803904"/>
+            <a:ext cx="1965960" cy="603504"/>
+          </a:xfrm>
+          <a:prstGeom prst="rect">
+            <a:avLst/>
+          </a:prstGeom>
+          <a:noFill/>
+        </p:spPr>
+        <p:txBody>
+          <a:bodyPr wrap="square" lIns="0" rIns="0" tIns="0" bIns="0" anchor="t">
+            <a:spAutoFit/>
+          </a:bodyPr>
+          <a:lstStyle/>
+          <a:p>
+            <a:pPr algn="l">
+              <a:spcBef>
+                <a:spcPts val="0"/>
+              </a:spcBef>
+              <a:spcAft>
+                <a:spcPts val="0"/>
+              </a:spcAft>
+            </a:pPr>
+            <a:r>
+              <a:rPr sz="1150" b="1" i="0">
+                <a:solidFill>
+                  <a:srgbClr val="1A2435"/>
+                </a:solidFill>
+                <a:latin typeface="맑은 고딕"/>
+                <a:ea typeface="맑은 고딕"/>
+                <a:cs typeface="맑은 고딕"/>
+              </a:rPr>
+              <a:t>playback_hotlist.php</a:t>
+            </a:r>
+          </a:p>
+        </p:txBody>
+      </p:sp>
+      <p:sp>
+        <p:nvSpPr>
+          <p:cNvPr id="20" name="TextBox 19"/>
+          <p:cNvSpPr txBox="1"/>
+          <p:nvPr/>
+        </p:nvSpPr>
+        <p:spPr>
+          <a:xfrm>
+            <a:off x="2935224" y="3803904"/>
+            <a:ext cx="2560320" cy="603504"/>
+          </a:xfrm>
+          <a:prstGeom prst="rect">
+            <a:avLst/>
+          </a:prstGeom>
+          <a:noFill/>
+        </p:spPr>
+        <p:txBody>
+          <a:bodyPr wrap="square" lIns="0" rIns="0" tIns="0" bIns="0" anchor="t">
+            <a:spAutoFit/>
+          </a:bodyPr>
+          <a:lstStyle/>
+          <a:p>
+            <a:pPr algn="l">
+              <a:spcBef>
+                <a:spcPts val="0"/>
+              </a:spcBef>
+              <a:spcAft>
+                <a:spcPts val="0"/>
+              </a:spcAft>
+            </a:pPr>
+            <a:r>
+              <a:rPr sz="1150" b="0" i="0">
+                <a:solidFill>
+                  <a:srgbClr val="1A2435"/>
+                </a:solidFill>
+                <a:latin typeface="맑은 고딕"/>
+                <a:ea typeface="맑은 고딕"/>
+                <a:cs typeface="맑은 고딕"/>
+              </a:rPr>
+              <a:t>get_playback_bundle.php</a:t>
+            </a:r>
+          </a:p>
+        </p:txBody>
+      </p:sp>
+      <p:sp>
+        <p:nvSpPr>
+          <p:cNvPr id="21" name="TextBox 20"/>
+          <p:cNvSpPr txBox="1"/>
+          <p:nvPr/>
+        </p:nvSpPr>
+        <p:spPr>
+          <a:xfrm>
+            <a:off x="5678424" y="3803904"/>
+            <a:ext cx="3611880" cy="603504"/>
+          </a:xfrm>
+          <a:prstGeom prst="rect">
+            <a:avLst/>
+          </a:prstGeom>
+          <a:noFill/>
+        </p:spPr>
+        <p:txBody>
+          <a:bodyPr wrap="square" lIns="0" rIns="0" tIns="0" bIns="0" anchor="t">
+            <a:spAutoFit/>
+          </a:bodyPr>
+          <a:lstStyle/>
+          <a:p>
+            <a:pPr algn="l">
+              <a:spcBef>
+                <a:spcPts val="0"/>
+              </a:spcBef>
+              <a:spcAft>
+                <a:spcPts val="0"/>
+              </a:spcAft>
+            </a:pPr>
+            <a:r>
+              <a:rPr sz="1150" b="0" i="0">
+                <a:solidFill>
+                  <a:srgbClr val="1A2435"/>
+                </a:solidFill>
+                <a:latin typeface="맑은 고딕"/>
+                <a:ea typeface="맑은 고딕"/>
+                <a:cs typeface="맑은 고딕"/>
+              </a:rPr>
+              <a:t>구간별 온도: 시각별 64칸 온도만</a:t>
+            </a:r>
+          </a:p>
+        </p:txBody>
+      </p:sp>
+      <p:sp>
+        <p:nvSpPr>
+          <p:cNvPr id="22" name="TextBox 21"/>
+          <p:cNvSpPr txBox="1"/>
+          <p:nvPr/>
+        </p:nvSpPr>
+        <p:spPr>
+          <a:xfrm>
+            <a:off x="9473184" y="3803904"/>
+            <a:ext cx="2002536" cy="603504"/>
+          </a:xfrm>
+          <a:prstGeom prst="rect">
+            <a:avLst/>
+          </a:prstGeom>
+          <a:noFill/>
+        </p:spPr>
+        <p:txBody>
+          <a:bodyPr wrap="square" lIns="0" rIns="0" tIns="0" bIns="0" anchor="t">
+            <a:spAutoFit/>
+          </a:bodyPr>
+          <a:lstStyle/>
+          <a:p>
+            <a:pPr algn="l">
+              <a:spcBef>
+                <a:spcPts val="0"/>
+              </a:spcBef>
+              <a:spcAft>
+                <a:spcPts val="0"/>
+              </a:spcAft>
+            </a:pPr>
+            <a:r>
+              <a:rPr sz="1150" b="0" i="0">
+                <a:solidFill>
+                  <a:srgbClr val="1A2435"/>
+                </a:solidFill>
+                <a:latin typeface="맑은 고딕"/>
+                <a:ea typeface="맑은 고딕"/>
+                <a:cs typeface="맑은 고딕"/>
+              </a:rPr>
+              <a:t>이벤트 · 리포트 재생</a:t>
+            </a:r>
+          </a:p>
+        </p:txBody>
+      </p:sp>
+      <p:sp>
+        <p:nvSpPr>
+          <p:cNvPr id="23" name="Rounded Rectangle 22"/>
+          <p:cNvSpPr/>
+          <p:nvPr/>
+        </p:nvSpPr>
+        <p:spPr>
+          <a:xfrm>
+            <a:off x="658368" y="4590288"/>
+            <a:ext cx="10874959" cy="914400"/>
+          </a:xfrm>
+          <a:prstGeom prst="roundRect">
+            <a:avLst>
+              <a:gd name="adj" fmla="val 6000"/>
+            </a:avLst>
+          </a:prstGeom>
+          <a:solidFill>
+            <a:srgbClr val="ECF6F4"/>
+          </a:solidFill>
+          <a:ln>
+            <a:noFill/>
+          </a:ln>
+          <a:effectLst/>
+        </p:spPr>
+        <p:style>
+          <a:lnRef idx="1">
+            <a:schemeClr val="accent1"/>
+          </a:lnRef>
+          <a:fillRef idx="3">
+            <a:schemeClr val="accent1"/>
+          </a:fillRef>
+          <a:effectRef idx="2">
+            <a:schemeClr val="accent1"/>
+          </a:effectRef>
+          <a:fontRef idx="minor">
+            <a:schemeClr val="lt1"/>
+          </a:fontRef>
+        </p:style>
+        <p:txBody>
+          <a:bodyPr rtlCol="0" anchor="ctr"/>
+          <a:lstStyle/>
+          <a:p/>
+        </p:txBody>
+      </p:sp>
+      <p:sp>
+        <p:nvSpPr>
+          <p:cNvPr id="24" name="TextBox 23"/>
+          <p:cNvSpPr txBox="1"/>
+          <p:nvPr/>
+        </p:nvSpPr>
+        <p:spPr>
+          <a:xfrm>
+            <a:off x="932688" y="4736592"/>
+            <a:ext cx="10326319" cy="685800"/>
+          </a:xfrm>
+          <a:prstGeom prst="rect">
+            <a:avLst/>
+          </a:prstGeom>
+          <a:noFill/>
+        </p:spPr>
+        <p:txBody>
+          <a:bodyPr wrap="square" lIns="0" rIns="0" tIns="0" bIns="0" anchor="t">
+            <a:spAutoFit/>
+          </a:bodyPr>
+          <a:lstStyle/>
+          <a:p>
+            <a:pPr algn="l">
+              <a:spcBef>
+                <a:spcPts val="0"/>
+              </a:spcBef>
+              <a:spcAft>
+                <a:spcPts val="400"/>
+              </a:spcAft>
+            </a:pPr>
+            <a:r>
+              <a:rPr sz="1250" b="1" i="0">
+                <a:solidFill>
+                  <a:srgbClr val="2A9D8F"/>
+                </a:solidFill>
+                <a:latin typeface="맑은 고딕"/>
+                <a:ea typeface="맑은 고딕"/>
+                <a:cs typeface="맑은 고딕"/>
+              </a:rPr>
+              <a:t>세 가지는 서로 다른 API · 주소는 관제서버 코드에 직접 적혀 있음</a:t>
+            </a:r>
+          </a:p>
+          <a:p>
+            <a:pPr algn="l">
+              <a:lnSpc>
+                <a:spcPct val="125000"/>
+              </a:lnSpc>
+              <a:spcBef>
+                <a:spcPts val="0"/>
+              </a:spcBef>
+              <a:spcAft>
+                <a:spcPts val="0"/>
+              </a:spcAft>
+            </a:pPr>
+            <a:r>
+              <a:rPr sz="1150" b="0" i="0">
+                <a:solidFill>
+                  <a:srgbClr val="1A2435"/>
+                </a:solidFill>
+                <a:latin typeface="맑은 고딕"/>
+                <a:ea typeface="맑은 고딕"/>
+                <a:cs typeface="맑은 고딕"/>
+              </a:rPr>
+              <a:t>median_latest.php:253 · get_log.php:167 (환경변수 KICT_INTERNAL_LOG_API 로 변경 가능) · get_playback_bundle.php:39 · 받는 항목 이름(mscore 등)이 분석서버 current_value 표와 같음 · 세 API 가 같은 DB 표를 읽는지는 미확인</a:t>
+            </a:r>
+          </a:p>
+        </p:txBody>
+      </p:sp>
+      <p:sp>
+        <p:nvSpPr>
+          <p:cNvPr id="25" name="TextBox 24"/>
+          <p:cNvSpPr txBox="1"/>
+          <p:nvPr/>
+        </p:nvSpPr>
+        <p:spPr>
+          <a:xfrm>
+            <a:off x="10618927" y="6291072"/>
+            <a:ext cx="914400" cy="274320"/>
+          </a:xfrm>
+          <a:prstGeom prst="rect">
+            <a:avLst/>
+          </a:prstGeom>
+          <a:noFill/>
+        </p:spPr>
+        <p:txBody>
+          <a:bodyPr wrap="square" lIns="0" rIns="0" tIns="0" bIns="0" anchor="t">
+            <a:spAutoFit/>
+          </a:bodyPr>
+          <a:lstStyle/>
+          <a:p>
+            <a:pPr algn="r">
+              <a:spcBef>
+                <a:spcPts val="0"/>
+              </a:spcBef>
+              <a:spcAft>
+                <a:spcPts val="0"/>
+              </a:spcAft>
+            </a:pPr>
+            <a:r>
+              <a:rPr sz="1050" b="0" i="0">
+                <a:solidFill>
+                  <a:srgbClr val="667085"/>
+                </a:solidFill>
+                <a:latin typeface="맑은 고딕"/>
+                <a:ea typeface="맑은 고딕"/>
+                <a:cs typeface="맑은 고딕"/>
+              </a:rPr>
+              <a:t>35</a:t>
+            </a:r>
+          </a:p>
+        </p:txBody>
+      </p:sp>
+    </p:spTree>
+  </p:cSld>
+  <p:clrMapOvr>
+    <a:masterClrMapping/>
+  </p:clrMapOvr>
+</p:sld>
+</file>
+
+<file path=ppt/slides/slide37.xml><?xml version="1.0" encoding="utf-8"?>
+<p:sld xmlns:a="http://schemas.openxmlformats.org/drawingml/2006/main" xmlns:p="http://schemas.openxmlformats.org/presentationml/2006/main" xmlns:r="http://schemas.openxmlformats.org/officeDocument/2006/relationships">
+  <p:cSld>
+    <p:bg>
+      <p:bgPr>
+        <a:solidFill>
+          <a:srgbClr val="FFFFFF"/>
+        </a:solidFill>
+        <a:effectLst/>
+      </p:bgPr>
+    </p:bg>
+    <p:spTree>
+      <p:nvGrpSpPr>
+        <p:cNvPr id="1" name=""/>
+        <p:cNvGrpSpPr/>
+        <p:nvPr/>
+      </p:nvGrpSpPr>
+      <p:grpSpPr/>
+      <p:sp>
+        <p:nvSpPr>
+          <p:cNvPr id="2" name="TextBox 1"/>
+          <p:cNvSpPr txBox="1"/>
+          <p:nvPr/>
+        </p:nvSpPr>
+        <p:spPr>
+          <a:xfrm>
+            <a:off x="658368" y="475488"/>
+            <a:ext cx="10874959" cy="310896"/>
+          </a:xfrm>
+          <a:prstGeom prst="rect">
+            <a:avLst/>
+          </a:prstGeom>
+          <a:noFill/>
+        </p:spPr>
+        <p:txBody>
+          <a:bodyPr wrap="square" lIns="0" rIns="0" tIns="0" bIns="0" anchor="t">
+            <a:spAutoFit/>
+          </a:bodyPr>
+          <a:lstStyle/>
+          <a:p>
+            <a:pPr algn="l">
+              <a:spcBef>
+                <a:spcPts val="0"/>
+              </a:spcBef>
+              <a:spcAft>
+                <a:spcPts val="0"/>
+              </a:spcAft>
+            </a:pPr>
+            <a:r>
+              <a:rPr sz="1250" b="1" i="0">
+                <a:solidFill>
+                  <a:srgbClr val="E4572E"/>
+                </a:solidFill>
+                <a:latin typeface="맑은 고딕"/>
+                <a:ea typeface="맑은 고딕"/>
+                <a:cs typeface="맑은 고딕"/>
+              </a:rPr>
+              <a:t>36  SMS ALERT</a:t>
+            </a:r>
+          </a:p>
+        </p:txBody>
+      </p:sp>
+      <p:sp>
+        <p:nvSpPr>
+          <p:cNvPr id="3" name="TextBox 2"/>
+          <p:cNvSpPr txBox="1"/>
+          <p:nvPr/>
+        </p:nvSpPr>
+        <p:spPr>
+          <a:xfrm>
+            <a:off x="658368" y="804672"/>
+            <a:ext cx="10874959" cy="621792"/>
+          </a:xfrm>
+          <a:prstGeom prst="rect">
+            <a:avLst/>
+          </a:prstGeom>
+          <a:noFill/>
+        </p:spPr>
+        <p:txBody>
+          <a:bodyPr wrap="square" lIns="0" rIns="0" tIns="0" bIns="0" anchor="t">
+            <a:spAutoFit/>
+          </a:bodyPr>
+          <a:lstStyle/>
+          <a:p>
+            <a:pPr algn="l">
+              <a:spcBef>
+                <a:spcPts val="0"/>
+              </a:spcBef>
+              <a:spcAft>
+                <a:spcPts val="0"/>
+              </a:spcAft>
+            </a:pPr>
+            <a:r>
+              <a:rPr sz="3000" b="1" i="0">
+                <a:solidFill>
+                  <a:srgbClr val="1A2435"/>
+                </a:solidFill>
+                <a:latin typeface="맑은 고딕"/>
+                <a:ea typeface="맑은 고딕"/>
+                <a:cs typeface="맑은 고딕"/>
+              </a:rPr>
+              <a:t>문자 경보는 관제서버가 판단하고 보냄</a:t>
+            </a:r>
+          </a:p>
+        </p:txBody>
+      </p:sp>
+      <p:sp>
+        <p:nvSpPr>
+          <p:cNvPr id="4" name="Rounded Rectangle 3"/>
+          <p:cNvSpPr/>
+          <p:nvPr/>
+        </p:nvSpPr>
+        <p:spPr>
+          <a:xfrm>
+            <a:off x="658368" y="1783080"/>
+            <a:ext cx="2377440" cy="1143000"/>
+          </a:xfrm>
+          <a:prstGeom prst="roundRect">
+            <a:avLst>
+              <a:gd name="adj" fmla="val 6000"/>
+            </a:avLst>
+          </a:prstGeom>
+          <a:solidFill>
+            <a:srgbClr val="F2F4F7"/>
+          </a:solidFill>
+          <a:ln>
+            <a:noFill/>
+          </a:ln>
+          <a:effectLst/>
+        </p:spPr>
+        <p:style>
+          <a:lnRef idx="1">
+            <a:schemeClr val="accent1"/>
+          </a:lnRef>
+          <a:fillRef idx="3">
+            <a:schemeClr val="accent1"/>
+          </a:fillRef>
+          <a:effectRef idx="2">
+            <a:schemeClr val="accent1"/>
+          </a:effectRef>
+          <a:fontRef idx="minor">
+            <a:schemeClr val="lt1"/>
+          </a:fontRef>
+        </p:style>
+        <p:txBody>
+          <a:bodyPr rtlCol="0" anchor="ctr"/>
+          <a:lstStyle/>
+          <a:p/>
+        </p:txBody>
+      </p:sp>
+      <p:sp>
+        <p:nvSpPr>
+          <p:cNvPr id="5" name="TextBox 4"/>
+          <p:cNvSpPr txBox="1"/>
+          <p:nvPr/>
+        </p:nvSpPr>
+        <p:spPr>
+          <a:xfrm>
+            <a:off x="795528" y="1874519"/>
+            <a:ext cx="2103120" cy="292608"/>
+          </a:xfrm>
+          <a:prstGeom prst="rect">
+            <a:avLst/>
+          </a:prstGeom>
+          <a:noFill/>
+        </p:spPr>
+        <p:txBody>
+          <a:bodyPr wrap="square" lIns="0" rIns="0" tIns="0" bIns="0" anchor="t">
+            <a:spAutoFit/>
+          </a:bodyPr>
+          <a:lstStyle/>
+          <a:p>
+            <a:pPr algn="ctr">
+              <a:spcBef>
+                <a:spcPts val="0"/>
+              </a:spcBef>
+              <a:spcAft>
+                <a:spcPts val="0"/>
+              </a:spcAft>
+            </a:pPr>
+            <a:r>
+              <a:rPr sz="1400" b="1" i="0">
+                <a:solidFill>
+                  <a:srgbClr val="1A2435"/>
+                </a:solidFill>
+                <a:latin typeface="맑은 고딕"/>
+                <a:ea typeface="맑은 고딕"/>
+                <a:cs typeface="맑은 고딕"/>
+              </a:rPr>
+              <a:t>DB 서버 API</a:t>
+            </a:r>
+          </a:p>
+        </p:txBody>
+      </p:sp>
+      <p:sp>
+        <p:nvSpPr>
+          <p:cNvPr id="6" name="TextBox 5"/>
+          <p:cNvSpPr txBox="1"/>
+          <p:nvPr/>
+        </p:nvSpPr>
+        <p:spPr>
+          <a:xfrm>
+            <a:off x="795528" y="2212848"/>
+            <a:ext cx="2103120" cy="274320"/>
+          </a:xfrm>
+          <a:prstGeom prst="rect">
+            <a:avLst/>
+          </a:prstGeom>
+          <a:noFill/>
+        </p:spPr>
+        <p:txBody>
+          <a:bodyPr wrap="square" lIns="0" rIns="0" tIns="0" bIns="0" anchor="t">
+            <a:spAutoFit/>
+          </a:bodyPr>
+          <a:lstStyle/>
+          <a:p>
+            <a:pPr algn="ctr">
+              <a:spcBef>
+                <a:spcPts val="0"/>
+              </a:spcBef>
+              <a:spcAft>
+                <a:spcPts val="0"/>
+              </a:spcAft>
+            </a:pPr>
+            <a:r>
+              <a:rPr sz="1000" b="0" i="0">
+                <a:solidFill>
+                  <a:srgbClr val="F4A261"/>
+                </a:solidFill>
+                <a:latin typeface="Consolas"/>
+                <a:ea typeface="Consolas"/>
+                <a:cs typeface="Consolas"/>
+              </a:rPr>
+              <a:t>otg_last_rows.php</a:t>
+            </a:r>
+          </a:p>
+        </p:txBody>
+      </p:sp>
+      <p:sp>
+        <p:nvSpPr>
+          <p:cNvPr id="7" name="TextBox 6"/>
+          <p:cNvSpPr txBox="1"/>
+          <p:nvPr/>
+        </p:nvSpPr>
+        <p:spPr>
+          <a:xfrm>
+            <a:off x="795528" y="2542032"/>
+            <a:ext cx="2103120" cy="274320"/>
+          </a:xfrm>
+          <a:prstGeom prst="rect">
+            <a:avLst/>
+          </a:prstGeom>
+          <a:noFill/>
+        </p:spPr>
+        <p:txBody>
+          <a:bodyPr wrap="square" lIns="0" rIns="0" tIns="0" bIns="0" anchor="t">
+            <a:spAutoFit/>
+          </a:bodyPr>
+          <a:lstStyle/>
+          <a:p>
+            <a:pPr algn="ctr">
+              <a:spcBef>
+                <a:spcPts val="0"/>
+              </a:spcBef>
+              <a:spcAft>
+                <a:spcPts val="0"/>
+              </a:spcAft>
+            </a:pPr>
+            <a:r>
+              <a:rPr sz="1050" b="0" i="0">
+                <a:solidFill>
+                  <a:srgbClr val="667085"/>
+                </a:solidFill>
+                <a:latin typeface="맑은 고딕"/>
+                <a:ea typeface="맑은 고딕"/>
+                <a:cs typeface="맑은 고딕"/>
+              </a:rPr>
+              <a:t>가공된 최신 값</a:t>
+            </a:r>
+          </a:p>
+        </p:txBody>
+      </p:sp>
+      <p:sp>
+        <p:nvSpPr>
+          <p:cNvPr id="8" name="Right Arrow 7"/>
+          <p:cNvSpPr/>
+          <p:nvPr/>
+        </p:nvSpPr>
+        <p:spPr>
+          <a:xfrm>
+            <a:off x="3127248" y="2258568"/>
+            <a:ext cx="256032" cy="201168"/>
+          </a:xfrm>
+          <a:prstGeom prst="rightArrow">
+            <a:avLst/>
+          </a:prstGeom>
+          <a:solidFill>
+            <a:srgbClr val="C3CCD9"/>
+          </a:solidFill>
+          <a:ln>
+            <a:noFill/>
+          </a:ln>
+          <a:effectLst/>
+        </p:spPr>
+        <p:style>
+          <a:lnRef idx="1">
+            <a:schemeClr val="accent1"/>
+          </a:lnRef>
+          <a:fillRef idx="3">
+            <a:schemeClr val="accent1"/>
+          </a:fillRef>
+          <a:effectRef idx="2">
+            <a:schemeClr val="accent1"/>
+          </a:effectRef>
+          <a:fontRef idx="minor">
+            <a:schemeClr val="lt1"/>
+          </a:fontRef>
+        </p:style>
+        <p:txBody>
+          <a:bodyPr rtlCol="0" anchor="ctr"/>
+          <a:lstStyle/>
+          <a:p>
+            <a:pPr algn="ctr"/>
+          </a:p>
+        </p:txBody>
+      </p:sp>
+      <p:sp>
+        <p:nvSpPr>
+          <p:cNvPr id="9" name="Rounded Rectangle 8"/>
+          <p:cNvSpPr/>
+          <p:nvPr/>
+        </p:nvSpPr>
+        <p:spPr>
+          <a:xfrm>
+            <a:off x="3474720" y="1783080"/>
+            <a:ext cx="2377440" cy="1143000"/>
+          </a:xfrm>
+          <a:prstGeom prst="roundRect">
+            <a:avLst>
+              <a:gd name="adj" fmla="val 6000"/>
+            </a:avLst>
+          </a:prstGeom>
+          <a:solidFill>
+            <a:srgbClr val="F2F4F7"/>
+          </a:solidFill>
+          <a:ln>
+            <a:noFill/>
+          </a:ln>
+          <a:effectLst/>
+        </p:spPr>
+        <p:style>
+          <a:lnRef idx="1">
+            <a:schemeClr val="accent1"/>
+          </a:lnRef>
+          <a:fillRef idx="3">
+            <a:schemeClr val="accent1"/>
+          </a:fillRef>
+          <a:effectRef idx="2">
+            <a:schemeClr val="accent1"/>
+          </a:effectRef>
+          <a:fontRef idx="minor">
+            <a:schemeClr val="lt1"/>
+          </a:fontRef>
+        </p:style>
+        <p:txBody>
+          <a:bodyPr rtlCol="0" anchor="ctr"/>
+          <a:lstStyle/>
+          <a:p/>
+        </p:txBody>
+      </p:sp>
+      <p:sp>
+        <p:nvSpPr>
+          <p:cNvPr id="10" name="TextBox 9"/>
+          <p:cNvSpPr txBox="1"/>
+          <p:nvPr/>
+        </p:nvSpPr>
+        <p:spPr>
+          <a:xfrm>
+            <a:off x="3611879" y="1874519"/>
+            <a:ext cx="2103120" cy="292608"/>
+          </a:xfrm>
+          <a:prstGeom prst="rect">
+            <a:avLst/>
+          </a:prstGeom>
+          <a:noFill/>
+        </p:spPr>
+        <p:txBody>
+          <a:bodyPr wrap="square" lIns="0" rIns="0" tIns="0" bIns="0" anchor="t">
+            <a:spAutoFit/>
+          </a:bodyPr>
+          <a:lstStyle/>
+          <a:p>
+            <a:pPr algn="ctr">
+              <a:spcBef>
+                <a:spcPts val="0"/>
+              </a:spcBef>
+              <a:spcAft>
+                <a:spcPts val="0"/>
+              </a:spcAft>
+            </a:pPr>
+            <a:r>
+              <a:rPr sz="1400" b="1" i="0">
+                <a:solidFill>
+                  <a:srgbClr val="1A2435"/>
+                </a:solidFill>
+                <a:latin typeface="맑은 고딕"/>
+                <a:ea typeface="맑은 고딕"/>
+                <a:cs typeface="맑은 고딕"/>
+              </a:rPr>
+              <a:t>판단</a:t>
+            </a:r>
+          </a:p>
+        </p:txBody>
+      </p:sp>
+      <p:sp>
+        <p:nvSpPr>
+          <p:cNvPr id="11" name="TextBox 10"/>
+          <p:cNvSpPr txBox="1"/>
+          <p:nvPr/>
+        </p:nvSpPr>
+        <p:spPr>
+          <a:xfrm>
+            <a:off x="3611879" y="2212848"/>
+            <a:ext cx="2103120" cy="274320"/>
+          </a:xfrm>
+          <a:prstGeom prst="rect">
+            <a:avLst/>
+          </a:prstGeom>
+          <a:noFill/>
+        </p:spPr>
+        <p:txBody>
+          <a:bodyPr wrap="square" lIns="0" rIns="0" tIns="0" bIns="0" anchor="t">
+            <a:spAutoFit/>
+          </a:bodyPr>
+          <a:lstStyle/>
+          <a:p>
+            <a:pPr algn="ctr">
+              <a:spcBef>
+                <a:spcPts val="0"/>
+              </a:spcBef>
+              <a:spcAft>
+                <a:spcPts val="0"/>
+              </a:spcAft>
+            </a:pPr>
+            <a:r>
+              <a:rPr sz="1000" b="0" i="0">
+                <a:solidFill>
+                  <a:srgbClr val="E4572E"/>
+                </a:solidFill>
+                <a:latin typeface="Consolas"/>
+                <a:ea typeface="Consolas"/>
+                <a:cs typeface="Consolas"/>
+              </a:rPr>
+              <a:t>auto_check.php</a:t>
+            </a:r>
+          </a:p>
+        </p:txBody>
+      </p:sp>
+      <p:sp>
+        <p:nvSpPr>
+          <p:cNvPr id="12" name="TextBox 11"/>
+          <p:cNvSpPr txBox="1"/>
+          <p:nvPr/>
+        </p:nvSpPr>
+        <p:spPr>
+          <a:xfrm>
+            <a:off x="3611879" y="2542032"/>
+            <a:ext cx="2103120" cy="274320"/>
+          </a:xfrm>
+          <a:prstGeom prst="rect">
+            <a:avLst/>
+          </a:prstGeom>
+          <a:noFill/>
+        </p:spPr>
+        <p:txBody>
+          <a:bodyPr wrap="square" lIns="0" rIns="0" tIns="0" bIns="0" anchor="t">
+            <a:spAutoFit/>
+          </a:bodyPr>
+          <a:lstStyle/>
+          <a:p>
+            <a:pPr algn="ctr">
+              <a:spcBef>
+                <a:spcPts val="0"/>
+              </a:spcBef>
+              <a:spcAft>
+                <a:spcPts val="0"/>
+              </a:spcAft>
+            </a:pPr>
+            <a:r>
+              <a:rPr sz="1050" b="0" i="0">
+                <a:solidFill>
+                  <a:srgbClr val="667085"/>
+                </a:solidFill>
+                <a:latin typeface="맑은 고딕"/>
+                <a:ea typeface="맑은 고딕"/>
+                <a:cs typeface="맑은 고딕"/>
+              </a:rPr>
+              <a:t>5초마다 · 연속 횟수</a:t>
+            </a:r>
+          </a:p>
+        </p:txBody>
+      </p:sp>
+      <p:sp>
+        <p:nvSpPr>
+          <p:cNvPr id="13" name="Right Arrow 12"/>
+          <p:cNvSpPr/>
+          <p:nvPr/>
+        </p:nvSpPr>
+        <p:spPr>
+          <a:xfrm>
+            <a:off x="5943600" y="2258568"/>
+            <a:ext cx="256032" cy="201168"/>
+          </a:xfrm>
+          <a:prstGeom prst="rightArrow">
+            <a:avLst/>
+          </a:prstGeom>
+          <a:solidFill>
+            <a:srgbClr val="C3CCD9"/>
+          </a:solidFill>
+          <a:ln>
+            <a:noFill/>
+          </a:ln>
+          <a:effectLst/>
+        </p:spPr>
+        <p:style>
+          <a:lnRef idx="1">
+            <a:schemeClr val="accent1"/>
+          </a:lnRef>
+          <a:fillRef idx="3">
+            <a:schemeClr val="accent1"/>
+          </a:fillRef>
+          <a:effectRef idx="2">
+            <a:schemeClr val="accent1"/>
+          </a:effectRef>
+          <a:fontRef idx="minor">
+            <a:schemeClr val="lt1"/>
+          </a:fontRef>
+        </p:style>
+        <p:txBody>
+          <a:bodyPr rtlCol="0" anchor="ctr"/>
+          <a:lstStyle/>
+          <a:p>
+            <a:pPr algn="ctr"/>
+          </a:p>
+        </p:txBody>
+      </p:sp>
+      <p:sp>
+        <p:nvSpPr>
+          <p:cNvPr id="14" name="Rounded Rectangle 13"/>
+          <p:cNvSpPr/>
+          <p:nvPr/>
+        </p:nvSpPr>
+        <p:spPr>
+          <a:xfrm>
+            <a:off x="6291072" y="1783080"/>
+            <a:ext cx="2377440" cy="1143000"/>
+          </a:xfrm>
+          <a:prstGeom prst="roundRect">
+            <a:avLst>
+              <a:gd name="adj" fmla="val 6000"/>
+            </a:avLst>
+          </a:prstGeom>
+          <a:solidFill>
+            <a:srgbClr val="F2F4F7"/>
+          </a:solidFill>
+          <a:ln>
+            <a:noFill/>
+          </a:ln>
+          <a:effectLst/>
+        </p:spPr>
+        <p:style>
+          <a:lnRef idx="1">
+            <a:schemeClr val="accent1"/>
+          </a:lnRef>
+          <a:fillRef idx="3">
+            <a:schemeClr val="accent1"/>
+          </a:fillRef>
+          <a:effectRef idx="2">
+            <a:schemeClr val="accent1"/>
+          </a:effectRef>
+          <a:fontRef idx="minor">
+            <a:schemeClr val="lt1"/>
+          </a:fontRef>
+        </p:style>
+        <p:txBody>
+          <a:bodyPr rtlCol="0" anchor="ctr"/>
+          <a:lstStyle/>
+          <a:p/>
+        </p:txBody>
+      </p:sp>
+      <p:sp>
+        <p:nvSpPr>
+          <p:cNvPr id="15" name="TextBox 14"/>
+          <p:cNvSpPr txBox="1"/>
+          <p:nvPr/>
+        </p:nvSpPr>
+        <p:spPr>
+          <a:xfrm>
+            <a:off x="6428232" y="1874519"/>
+            <a:ext cx="2103120" cy="292608"/>
+          </a:xfrm>
+          <a:prstGeom prst="rect">
+            <a:avLst/>
+          </a:prstGeom>
+          <a:noFill/>
+        </p:spPr>
+        <p:txBody>
+          <a:bodyPr wrap="square" lIns="0" rIns="0" tIns="0" bIns="0" anchor="t">
+            <a:spAutoFit/>
+          </a:bodyPr>
+          <a:lstStyle/>
+          <a:p>
+            <a:pPr algn="ctr">
+              <a:spcBef>
+                <a:spcPts val="0"/>
+              </a:spcBef>
+              <a:spcAft>
+                <a:spcPts val="0"/>
+              </a:spcAft>
+            </a:pPr>
+            <a:r>
+              <a:rPr sz="1400" b="1" i="0">
+                <a:solidFill>
+                  <a:srgbClr val="1A2435"/>
+                </a:solidFill>
+                <a:latin typeface="맑은 고딕"/>
+                <a:ea typeface="맑은 고딕"/>
+                <a:cs typeface="맑은 고딕"/>
+              </a:rPr>
+              <a:t>발송</a:t>
+            </a:r>
+          </a:p>
+        </p:txBody>
+      </p:sp>
+      <p:sp>
+        <p:nvSpPr>
+          <p:cNvPr id="16" name="TextBox 15"/>
+          <p:cNvSpPr txBox="1"/>
+          <p:nvPr/>
+        </p:nvSpPr>
+        <p:spPr>
+          <a:xfrm>
+            <a:off x="6428232" y="2212848"/>
+            <a:ext cx="2103120" cy="274320"/>
+          </a:xfrm>
+          <a:prstGeom prst="rect">
+            <a:avLst/>
+          </a:prstGeom>
+          <a:noFill/>
+        </p:spPr>
+        <p:txBody>
+          <a:bodyPr wrap="square" lIns="0" rIns="0" tIns="0" bIns="0" anchor="t">
+            <a:spAutoFit/>
+          </a:bodyPr>
+          <a:lstStyle/>
+          <a:p>
+            <a:pPr algn="ctr">
+              <a:spcBef>
+                <a:spcPts val="0"/>
+              </a:spcBef>
+              <a:spcAft>
+                <a:spcPts val="0"/>
+              </a:spcAft>
+            </a:pPr>
+            <a:r>
+              <a:rPr sz="1000" b="0" i="0">
+                <a:solidFill>
+                  <a:srgbClr val="E4572E"/>
+                </a:solidFill>
+                <a:latin typeface="Consolas"/>
+                <a:ea typeface="Consolas"/>
+                <a:cs typeface="Consolas"/>
+              </a:rPr>
+              <a:t>send_sms.php</a:t>
+            </a:r>
+          </a:p>
+        </p:txBody>
+      </p:sp>
+      <p:sp>
+        <p:nvSpPr>
+          <p:cNvPr id="17" name="TextBox 16"/>
+          <p:cNvSpPr txBox="1"/>
+          <p:nvPr/>
+        </p:nvSpPr>
+        <p:spPr>
+          <a:xfrm>
+            <a:off x="6428232" y="2542032"/>
+            <a:ext cx="2103120" cy="274320"/>
+          </a:xfrm>
+          <a:prstGeom prst="rect">
+            <a:avLst/>
+          </a:prstGeom>
+          <a:noFill/>
+        </p:spPr>
+        <p:txBody>
+          <a:bodyPr wrap="square" lIns="0" rIns="0" tIns="0" bIns="0" anchor="t">
+            <a:spAutoFit/>
+          </a:bodyPr>
+          <a:lstStyle/>
+          <a:p>
+            <a:pPr algn="ctr">
+              <a:spcBef>
+                <a:spcPts val="0"/>
+              </a:spcBef>
+              <a:spcAft>
+                <a:spcPts val="0"/>
+              </a:spcAft>
+            </a:pPr>
+            <a:r>
+              <a:rPr sz="1050" b="0" i="0">
+                <a:solidFill>
+                  <a:srgbClr val="667085"/>
+                </a:solidFill>
+                <a:latin typeface="맑은 고딕"/>
+                <a:ea typeface="맑은 고딕"/>
+                <a:cs typeface="맑은 고딕"/>
+              </a:rPr>
+              <a:t>문자 업체 API</a:t>
+            </a:r>
+          </a:p>
+        </p:txBody>
+      </p:sp>
+      <p:sp>
+        <p:nvSpPr>
+          <p:cNvPr id="18" name="Right Arrow 17"/>
+          <p:cNvSpPr/>
+          <p:nvPr/>
+        </p:nvSpPr>
+        <p:spPr>
+          <a:xfrm>
+            <a:off x="8759952" y="2258568"/>
+            <a:ext cx="256032" cy="201168"/>
+          </a:xfrm>
+          <a:prstGeom prst="rightArrow">
+            <a:avLst/>
+          </a:prstGeom>
+          <a:solidFill>
+            <a:srgbClr val="C3CCD9"/>
+          </a:solidFill>
+          <a:ln>
+            <a:noFill/>
+          </a:ln>
+          <a:effectLst/>
+        </p:spPr>
+        <p:style>
+          <a:lnRef idx="1">
+            <a:schemeClr val="accent1"/>
+          </a:lnRef>
+          <a:fillRef idx="3">
+            <a:schemeClr val="accent1"/>
+          </a:fillRef>
+          <a:effectRef idx="2">
+            <a:schemeClr val="accent1"/>
+          </a:effectRef>
+          <a:fontRef idx="minor">
+            <a:schemeClr val="lt1"/>
+          </a:fontRef>
+        </p:style>
+        <p:txBody>
+          <a:bodyPr rtlCol="0" anchor="ctr"/>
+          <a:lstStyle/>
+          <a:p>
+            <a:pPr algn="ctr"/>
+          </a:p>
+        </p:txBody>
+      </p:sp>
+      <p:sp>
+        <p:nvSpPr>
+          <p:cNvPr id="19" name="Rounded Rectangle 18"/>
+          <p:cNvSpPr/>
+          <p:nvPr/>
+        </p:nvSpPr>
+        <p:spPr>
+          <a:xfrm>
+            <a:off x="9107424" y="1783080"/>
+            <a:ext cx="2377440" cy="1143000"/>
+          </a:xfrm>
+          <a:prstGeom prst="roundRect">
+            <a:avLst>
+              <a:gd name="adj" fmla="val 6000"/>
+            </a:avLst>
+          </a:prstGeom>
+          <a:solidFill>
+            <a:srgbClr val="F2F4F7"/>
+          </a:solidFill>
+          <a:ln>
+            <a:noFill/>
+          </a:ln>
+          <a:effectLst/>
+        </p:spPr>
+        <p:style>
+          <a:lnRef idx="1">
+            <a:schemeClr val="accent1"/>
+          </a:lnRef>
+          <a:fillRef idx="3">
+            <a:schemeClr val="accent1"/>
+          </a:fillRef>
+          <a:effectRef idx="2">
+            <a:schemeClr val="accent1"/>
+          </a:effectRef>
+          <a:fontRef idx="minor">
+            <a:schemeClr val="lt1"/>
+          </a:fontRef>
+        </p:style>
+        <p:txBody>
+          <a:bodyPr rtlCol="0" anchor="ctr"/>
+          <a:lstStyle/>
+          <a:p/>
+        </p:txBody>
+      </p:sp>
+      <p:sp>
+        <p:nvSpPr>
+          <p:cNvPr id="20" name="TextBox 19"/>
+          <p:cNvSpPr txBox="1"/>
+          <p:nvPr/>
+        </p:nvSpPr>
+        <p:spPr>
+          <a:xfrm>
+            <a:off x="9244584" y="1874519"/>
+            <a:ext cx="2103120" cy="292608"/>
+          </a:xfrm>
+          <a:prstGeom prst="rect">
+            <a:avLst/>
+          </a:prstGeom>
+          <a:noFill/>
+        </p:spPr>
+        <p:txBody>
+          <a:bodyPr wrap="square" lIns="0" rIns="0" tIns="0" bIns="0" anchor="t">
+            <a:spAutoFit/>
+          </a:bodyPr>
+          <a:lstStyle/>
+          <a:p>
+            <a:pPr algn="ctr">
+              <a:spcBef>
+                <a:spcPts val="0"/>
+              </a:spcBef>
+              <a:spcAft>
+                <a:spcPts val="0"/>
+              </a:spcAft>
+            </a:pPr>
+            <a:r>
+              <a:rPr sz="1400" b="1" i="0">
+                <a:solidFill>
+                  <a:srgbClr val="1A2435"/>
+                </a:solidFill>
+                <a:latin typeface="맑은 고딕"/>
+                <a:ea typeface="맑은 고딕"/>
+                <a:cs typeface="맑은 고딕"/>
+              </a:rPr>
+              <a:t>수신자</a:t>
+            </a:r>
+          </a:p>
+        </p:txBody>
+      </p:sp>
+      <p:sp>
+        <p:nvSpPr>
+          <p:cNvPr id="21" name="TextBox 20"/>
+          <p:cNvSpPr txBox="1"/>
+          <p:nvPr/>
+        </p:nvSpPr>
+        <p:spPr>
+          <a:xfrm>
+            <a:off x="9244584" y="2212848"/>
+            <a:ext cx="2103120" cy="274320"/>
+          </a:xfrm>
+          <a:prstGeom prst="rect">
+            <a:avLst/>
+          </a:prstGeom>
+          <a:noFill/>
+        </p:spPr>
+        <p:txBody>
+          <a:bodyPr wrap="square" lIns="0" rIns="0" tIns="0" bIns="0" anchor="t">
+            <a:spAutoFit/>
+          </a:bodyPr>
+          <a:lstStyle/>
+          <a:p>
+            <a:pPr algn="ctr">
+              <a:spcBef>
+                <a:spcPts val="0"/>
+              </a:spcBef>
+              <a:spcAft>
+                <a:spcPts val="0"/>
+              </a:spcAft>
+            </a:pPr>
+            <a:r>
+              <a:rPr sz="1000" b="0" i="0">
+                <a:solidFill>
+                  <a:srgbClr val="888780"/>
+                </a:solidFill>
+                <a:latin typeface="Consolas"/>
+                <a:ea typeface="Consolas"/>
+                <a:cs typeface="Consolas"/>
+              </a:rPr>
+              <a:t>SMS 설정 화면</a:t>
+            </a:r>
+          </a:p>
+        </p:txBody>
+      </p:sp>
+      <p:sp>
+        <p:nvSpPr>
+          <p:cNvPr id="22" name="TextBox 21"/>
+          <p:cNvSpPr txBox="1"/>
+          <p:nvPr/>
+        </p:nvSpPr>
+        <p:spPr>
+          <a:xfrm>
+            <a:off x="9244584" y="2542032"/>
+            <a:ext cx="2103120" cy="274320"/>
+          </a:xfrm>
+          <a:prstGeom prst="rect">
+            <a:avLst/>
+          </a:prstGeom>
+          <a:noFill/>
+        </p:spPr>
+        <p:txBody>
+          <a:bodyPr wrap="square" lIns="0" rIns="0" tIns="0" bIns="0" anchor="t">
+            <a:spAutoFit/>
+          </a:bodyPr>
+          <a:lstStyle/>
+          <a:p>
+            <a:pPr algn="ctr">
+              <a:spcBef>
+                <a:spcPts val="0"/>
+              </a:spcBef>
+              <a:spcAft>
+                <a:spcPts val="0"/>
+              </a:spcAft>
+            </a:pPr>
+            <a:r>
+              <a:rPr sz="1050" b="0" i="0">
+                <a:solidFill>
+                  <a:srgbClr val="667085"/>
+                </a:solidFill>
+                <a:latin typeface="맑은 고딕"/>
+                <a:ea typeface="맑은 고딕"/>
+                <a:cs typeface="맑은 고딕"/>
+              </a:rPr>
+              <a:t>최대 3명</a:t>
+            </a:r>
+          </a:p>
+        </p:txBody>
+      </p:sp>
+      <p:sp>
+        <p:nvSpPr>
+          <p:cNvPr id="23" name="Rounded Rectangle 22"/>
+          <p:cNvSpPr/>
+          <p:nvPr/>
+        </p:nvSpPr>
+        <p:spPr>
+          <a:xfrm>
+            <a:off x="658368" y="3200400"/>
+            <a:ext cx="10872216" cy="457200"/>
+          </a:xfrm>
+          <a:prstGeom prst="roundRect">
+            <a:avLst>
+              <a:gd name="adj" fmla="val 4000"/>
+            </a:avLst>
+          </a:prstGeom>
+          <a:solidFill>
+            <a:srgbClr val="1C2B45"/>
+          </a:solidFill>
+          <a:ln>
+            <a:noFill/>
+          </a:ln>
+          <a:effectLst/>
+        </p:spPr>
+        <p:style>
+          <a:lnRef idx="1">
+            <a:schemeClr val="accent1"/>
+          </a:lnRef>
+          <a:fillRef idx="3">
+            <a:schemeClr val="accent1"/>
+          </a:fillRef>
+          <a:effectRef idx="2">
+            <a:schemeClr val="accent1"/>
+          </a:effectRef>
+          <a:fontRef idx="minor">
+            <a:schemeClr val="lt1"/>
+          </a:fontRef>
+        </p:style>
+        <p:txBody>
+          <a:bodyPr rtlCol="0" anchor="ctr"/>
+          <a:lstStyle/>
+          <a:p/>
+        </p:txBody>
+      </p:sp>
+      <p:sp>
+        <p:nvSpPr>
+          <p:cNvPr id="24" name="TextBox 23"/>
+          <p:cNvSpPr txBox="1"/>
+          <p:nvPr/>
+        </p:nvSpPr>
+        <p:spPr>
+          <a:xfrm>
+            <a:off x="786384" y="3300984"/>
+            <a:ext cx="2743200" cy="347472"/>
+          </a:xfrm>
+          <a:prstGeom prst="rect">
+            <a:avLst/>
+          </a:prstGeom>
+          <a:noFill/>
+        </p:spPr>
+        <p:txBody>
+          <a:bodyPr wrap="square" lIns="0" rIns="0" tIns="0" bIns="0" anchor="t">
+            <a:spAutoFit/>
+          </a:bodyPr>
+          <a:lstStyle/>
+          <a:p>
+            <a:pPr algn="l">
+              <a:spcBef>
+                <a:spcPts val="0"/>
+              </a:spcBef>
+              <a:spcAft>
+                <a:spcPts val="0"/>
+              </a:spcAft>
+            </a:pPr>
+            <a:r>
+              <a:rPr sz="1100" b="1" i="0">
+                <a:solidFill>
+                  <a:srgbClr val="FFFFFF"/>
+                </a:solidFill>
+                <a:latin typeface="맑은 고딕"/>
+                <a:ea typeface="맑은 고딕"/>
+                <a:cs typeface="맑은 고딕"/>
+              </a:rPr>
+              <a:t>보는 값</a:t>
+            </a:r>
+          </a:p>
+        </p:txBody>
+      </p:sp>
+      <p:sp>
+        <p:nvSpPr>
+          <p:cNvPr id="25" name="TextBox 24"/>
+          <p:cNvSpPr txBox="1"/>
+          <p:nvPr/>
+        </p:nvSpPr>
+        <p:spPr>
+          <a:xfrm>
+            <a:off x="3712463" y="3300984"/>
+            <a:ext cx="4572000" cy="347472"/>
+          </a:xfrm>
+          <a:prstGeom prst="rect">
+            <a:avLst/>
+          </a:prstGeom>
+          <a:noFill/>
+        </p:spPr>
+        <p:txBody>
+          <a:bodyPr wrap="square" lIns="0" rIns="0" tIns="0" bIns="0" anchor="t">
+            <a:spAutoFit/>
+          </a:bodyPr>
+          <a:lstStyle/>
+          <a:p>
+            <a:pPr algn="l">
+              <a:spcBef>
+                <a:spcPts val="0"/>
+              </a:spcBef>
+              <a:spcAft>
+                <a:spcPts val="0"/>
+              </a:spcAft>
+            </a:pPr>
+            <a:r>
+              <a:rPr sz="1100" b="1" i="0">
+                <a:solidFill>
+                  <a:srgbClr val="FFFFFF"/>
+                </a:solidFill>
+                <a:latin typeface="맑은 고딕"/>
+                <a:ea typeface="맑은 고딕"/>
+                <a:cs typeface="맑은 고딕"/>
+              </a:rPr>
+              <a:t>판정 기준 (detection_rules.php 기본값)</a:t>
+            </a:r>
+          </a:p>
+        </p:txBody>
+      </p:sp>
+      <p:sp>
+        <p:nvSpPr>
+          <p:cNvPr id="26" name="TextBox 25"/>
+          <p:cNvSpPr txBox="1"/>
+          <p:nvPr/>
+        </p:nvSpPr>
+        <p:spPr>
+          <a:xfrm>
+            <a:off x="8467344" y="3300984"/>
+            <a:ext cx="3008376" cy="347472"/>
+          </a:xfrm>
+          <a:prstGeom prst="rect">
+            <a:avLst/>
+          </a:prstGeom>
+          <a:noFill/>
+        </p:spPr>
+        <p:txBody>
+          <a:bodyPr wrap="square" lIns="0" rIns="0" tIns="0" bIns="0" anchor="t">
+            <a:spAutoFit/>
+          </a:bodyPr>
+          <a:lstStyle/>
+          <a:p>
+            <a:pPr algn="l">
+              <a:spcBef>
+                <a:spcPts val="0"/>
+              </a:spcBef>
+              <a:spcAft>
+                <a:spcPts val="0"/>
+              </a:spcAft>
+            </a:pPr>
+            <a:r>
+              <a:rPr sz="1100" b="1" i="0">
+                <a:solidFill>
+                  <a:srgbClr val="FFFFFF"/>
+                </a:solidFill>
+                <a:latin typeface="맑은 고딕"/>
+                <a:ea typeface="맑은 고딕"/>
+                <a:cs typeface="맑은 고딕"/>
+              </a:rPr>
+              <a:t>연속</a:t>
+            </a:r>
+          </a:p>
+        </p:txBody>
+      </p:sp>
+      <p:sp>
+        <p:nvSpPr>
+          <p:cNvPr id="27" name="Rounded Rectangle 26"/>
+          <p:cNvSpPr/>
+          <p:nvPr/>
+        </p:nvSpPr>
+        <p:spPr>
+          <a:xfrm>
+            <a:off x="658368" y="3712463"/>
+            <a:ext cx="10872216" cy="384048"/>
+          </a:xfrm>
+          <a:prstGeom prst="roundRect">
+            <a:avLst>
+              <a:gd name="adj" fmla="val 4000"/>
+            </a:avLst>
+          </a:prstGeom>
+          <a:solidFill>
+            <a:srgbClr val="F2F4F7"/>
+          </a:solidFill>
+          <a:ln>
+            <a:noFill/>
+          </a:ln>
+          <a:effectLst/>
+        </p:spPr>
+        <p:style>
+          <a:lnRef idx="1">
+            <a:schemeClr val="accent1"/>
+          </a:lnRef>
+          <a:fillRef idx="3">
+            <a:schemeClr val="accent1"/>
+          </a:fillRef>
+          <a:effectRef idx="2">
+            <a:schemeClr val="accent1"/>
+          </a:effectRef>
+          <a:fontRef idx="minor">
+            <a:schemeClr val="lt1"/>
+          </a:fontRef>
+        </p:style>
+        <p:txBody>
+          <a:bodyPr rtlCol="0" anchor="ctr"/>
+          <a:lstStyle/>
+          <a:p/>
+        </p:txBody>
+      </p:sp>
+      <p:sp>
+        <p:nvSpPr>
+          <p:cNvPr id="28" name="TextBox 27"/>
+          <p:cNvSpPr txBox="1"/>
+          <p:nvPr/>
+        </p:nvSpPr>
+        <p:spPr>
+          <a:xfrm>
+            <a:off x="786384" y="3813048"/>
+            <a:ext cx="2743200" cy="274320"/>
+          </a:xfrm>
+          <a:prstGeom prst="rect">
+            <a:avLst/>
+          </a:prstGeom>
+          <a:noFill/>
+        </p:spPr>
+        <p:txBody>
+          <a:bodyPr wrap="square" lIns="0" rIns="0" tIns="0" bIns="0" anchor="t">
+            <a:spAutoFit/>
+          </a:bodyPr>
+          <a:lstStyle/>
+          <a:p>
+            <a:pPr algn="l">
+              <a:spcBef>
+                <a:spcPts val="0"/>
+              </a:spcBef>
+              <a:spcAft>
+                <a:spcPts val="0"/>
+              </a:spcAft>
+            </a:pPr>
+            <a:r>
+              <a:rPr sz="1100" b="1" i="0">
+                <a:solidFill>
+                  <a:srgbClr val="1A2435"/>
+                </a:solidFill>
+                <a:latin typeface="맑은 고딕"/>
+                <a:ea typeface="맑은 고딕"/>
+                <a:cs typeface="맑은 고딕"/>
+              </a:rPr>
+              <a:t>fire_list (화재 검출)</a:t>
+            </a:r>
+          </a:p>
+        </p:txBody>
+      </p:sp>
+      <p:sp>
+        <p:nvSpPr>
+          <p:cNvPr id="29" name="TextBox 28"/>
+          <p:cNvSpPr txBox="1"/>
+          <p:nvPr/>
+        </p:nvSpPr>
+        <p:spPr>
+          <a:xfrm>
+            <a:off x="3712463" y="3813048"/>
+            <a:ext cx="4572000" cy="274320"/>
+          </a:xfrm>
+          <a:prstGeom prst="rect">
+            <a:avLst/>
+          </a:prstGeom>
+          <a:noFill/>
+        </p:spPr>
+        <p:txBody>
+          <a:bodyPr wrap="square" lIns="0" rIns="0" tIns="0" bIns="0" anchor="t">
+            <a:spAutoFit/>
+          </a:bodyPr>
+          <a:lstStyle/>
+          <a:p>
+            <a:pPr algn="l">
+              <a:spcBef>
+                <a:spcPts val="0"/>
+              </a:spcBef>
+              <a:spcAft>
+                <a:spcPts val="0"/>
+              </a:spcAft>
+            </a:pPr>
+            <a:r>
+              <a:rPr sz="1100" b="0" i="0">
+                <a:solidFill>
+                  <a:srgbClr val="1A2435"/>
+                </a:solidFill>
+                <a:latin typeface="맑은 고딕"/>
+                <a:ea typeface="맑은 고딕"/>
+                <a:cs typeface="맑은 고딕"/>
+              </a:rPr>
+              <a:t>하나라도 5.0 이상 → 화재</a:t>
+            </a:r>
+          </a:p>
+        </p:txBody>
+      </p:sp>
+      <p:sp>
+        <p:nvSpPr>
+          <p:cNvPr id="30" name="TextBox 29"/>
+          <p:cNvSpPr txBox="1"/>
+          <p:nvPr/>
+        </p:nvSpPr>
+        <p:spPr>
+          <a:xfrm>
+            <a:off x="8467344" y="3813048"/>
+            <a:ext cx="3008376" cy="274320"/>
+          </a:xfrm>
+          <a:prstGeom prst="rect">
+            <a:avLst/>
+          </a:prstGeom>
+          <a:noFill/>
+        </p:spPr>
+        <p:txBody>
+          <a:bodyPr wrap="square" lIns="0" rIns="0" tIns="0" bIns="0" anchor="t">
+            <a:spAutoFit/>
+          </a:bodyPr>
+          <a:lstStyle/>
+          <a:p>
+            <a:pPr algn="l">
+              <a:spcBef>
+                <a:spcPts val="0"/>
+              </a:spcBef>
+              <a:spcAft>
+                <a:spcPts val="0"/>
+              </a:spcAft>
+            </a:pPr>
+            <a:r>
+              <a:rPr sz="1100" b="0" i="0">
+                <a:solidFill>
+                  <a:srgbClr val="1A2435"/>
+                </a:solidFill>
+                <a:latin typeface="맑은 고딕"/>
+                <a:ea typeface="맑은 고딕"/>
+                <a:cs typeface="맑은 고딕"/>
+              </a:rPr>
+              <a:t>2번</a:t>
+            </a:r>
+          </a:p>
+        </p:txBody>
+      </p:sp>
+      <p:sp>
+        <p:nvSpPr>
+          <p:cNvPr id="31" name="TextBox 30"/>
+          <p:cNvSpPr txBox="1"/>
+          <p:nvPr/>
+        </p:nvSpPr>
+        <p:spPr>
+          <a:xfrm>
+            <a:off x="786384" y="4233672"/>
+            <a:ext cx="2743200" cy="274320"/>
+          </a:xfrm>
+          <a:prstGeom prst="rect">
+            <a:avLst/>
+          </a:prstGeom>
+          <a:noFill/>
+        </p:spPr>
+        <p:txBody>
+          <a:bodyPr wrap="square" lIns="0" rIns="0" tIns="0" bIns="0" anchor="t">
+            <a:spAutoFit/>
+          </a:bodyPr>
+          <a:lstStyle/>
+          <a:p>
+            <a:pPr algn="l">
+              <a:spcBef>
+                <a:spcPts val="0"/>
+              </a:spcBef>
+              <a:spcAft>
+                <a:spcPts val="0"/>
+              </a:spcAft>
+            </a:pPr>
+            <a:r>
+              <a:rPr sz="1100" b="1" i="0">
+                <a:solidFill>
+                  <a:srgbClr val="1A2435"/>
+                </a:solidFill>
+                <a:latin typeface="맑은 고딕"/>
+                <a:ea typeface="맑은 고딕"/>
+                <a:cs typeface="맑은 고딕"/>
+              </a:rPr>
+              <a:t>smoke_list (연기 검출)</a:t>
+            </a:r>
+          </a:p>
+        </p:txBody>
+      </p:sp>
+      <p:sp>
+        <p:nvSpPr>
+          <p:cNvPr id="32" name="TextBox 31"/>
+          <p:cNvSpPr txBox="1"/>
+          <p:nvPr/>
+        </p:nvSpPr>
+        <p:spPr>
+          <a:xfrm>
+            <a:off x="3712463" y="4233672"/>
+            <a:ext cx="4572000" cy="274320"/>
+          </a:xfrm>
+          <a:prstGeom prst="rect">
+            <a:avLst/>
+          </a:prstGeom>
+          <a:noFill/>
+        </p:spPr>
+        <p:txBody>
+          <a:bodyPr wrap="square" lIns="0" rIns="0" tIns="0" bIns="0" anchor="t">
+            <a:spAutoFit/>
+          </a:bodyPr>
+          <a:lstStyle/>
+          <a:p>
+            <a:pPr algn="l">
+              <a:spcBef>
+                <a:spcPts val="0"/>
+              </a:spcBef>
+              <a:spcAft>
+                <a:spcPts val="0"/>
+              </a:spcAft>
+            </a:pPr>
+            <a:r>
+              <a:rPr sz="1100" b="0" i="0">
+                <a:solidFill>
+                  <a:srgbClr val="1A2435"/>
+                </a:solidFill>
+                <a:latin typeface="맑은 고딕"/>
+                <a:ea typeface="맑은 고딕"/>
+                <a:cs typeface="맑은 고딕"/>
+              </a:rPr>
+              <a:t>하나라도 5.0 이상 → 연기</a:t>
+            </a:r>
+          </a:p>
+        </p:txBody>
+      </p:sp>
+      <p:sp>
+        <p:nvSpPr>
+          <p:cNvPr id="33" name="TextBox 32"/>
+          <p:cNvSpPr txBox="1"/>
+          <p:nvPr/>
+        </p:nvSpPr>
+        <p:spPr>
+          <a:xfrm>
+            <a:off x="8467344" y="4233672"/>
+            <a:ext cx="3008376" cy="274320"/>
+          </a:xfrm>
+          <a:prstGeom prst="rect">
+            <a:avLst/>
+          </a:prstGeom>
+          <a:noFill/>
+        </p:spPr>
+        <p:txBody>
+          <a:bodyPr wrap="square" lIns="0" rIns="0" tIns="0" bIns="0" anchor="t">
+            <a:spAutoFit/>
+          </a:bodyPr>
+          <a:lstStyle/>
+          <a:p>
+            <a:pPr algn="l">
+              <a:spcBef>
+                <a:spcPts val="0"/>
+              </a:spcBef>
+              <a:spcAft>
+                <a:spcPts val="0"/>
+              </a:spcAft>
+            </a:pPr>
+            <a:r>
+              <a:rPr sz="1100" b="0" i="0">
+                <a:solidFill>
+                  <a:srgbClr val="1A2435"/>
+                </a:solidFill>
+                <a:latin typeface="맑은 고딕"/>
+                <a:ea typeface="맑은 고딕"/>
+                <a:cs typeface="맑은 고딕"/>
+              </a:rPr>
+              <a:t>2번</a:t>
+            </a:r>
+          </a:p>
+        </p:txBody>
+      </p:sp>
+      <p:sp>
+        <p:nvSpPr>
+          <p:cNvPr id="34" name="Rounded Rectangle 33"/>
+          <p:cNvSpPr/>
+          <p:nvPr/>
+        </p:nvSpPr>
+        <p:spPr>
+          <a:xfrm>
+            <a:off x="658368" y="4553712"/>
+            <a:ext cx="10872216" cy="384048"/>
+          </a:xfrm>
+          <a:prstGeom prst="roundRect">
+            <a:avLst>
+              <a:gd name="adj" fmla="val 4000"/>
+            </a:avLst>
+          </a:prstGeom>
+          <a:solidFill>
+            <a:srgbClr val="F2F4F7"/>
+          </a:solidFill>
+          <a:ln>
+            <a:noFill/>
+          </a:ln>
+          <a:effectLst/>
+        </p:spPr>
+        <p:style>
+          <a:lnRef idx="1">
+            <a:schemeClr val="accent1"/>
+          </a:lnRef>
+          <a:fillRef idx="3">
+            <a:schemeClr val="accent1"/>
+          </a:fillRef>
+          <a:effectRef idx="2">
+            <a:schemeClr val="accent1"/>
+          </a:effectRef>
+          <a:fontRef idx="minor">
+            <a:schemeClr val="lt1"/>
+          </a:fontRef>
+        </p:style>
+        <p:txBody>
+          <a:bodyPr rtlCol="0" anchor="ctr"/>
+          <a:lstStyle/>
+          <a:p/>
+        </p:txBody>
+      </p:sp>
+      <p:sp>
+        <p:nvSpPr>
+          <p:cNvPr id="35" name="TextBox 34"/>
+          <p:cNvSpPr txBox="1"/>
+          <p:nvPr/>
+        </p:nvSpPr>
+        <p:spPr>
+          <a:xfrm>
+            <a:off x="786384" y="4654296"/>
+            <a:ext cx="2743200" cy="274320"/>
+          </a:xfrm>
+          <a:prstGeom prst="rect">
+            <a:avLst/>
+          </a:prstGeom>
+          <a:noFill/>
+        </p:spPr>
+        <p:txBody>
+          <a:bodyPr wrap="square" lIns="0" rIns="0" tIns="0" bIns="0" anchor="t">
+            <a:spAutoFit/>
+          </a:bodyPr>
+          <a:lstStyle/>
+          <a:p>
+            <a:pPr algn="l">
+              <a:spcBef>
+                <a:spcPts val="0"/>
+              </a:spcBef>
+              <a:spcAft>
+                <a:spcPts val="0"/>
+              </a:spcAft>
+            </a:pPr>
+            <a:r>
+              <a:rPr sz="1100" b="1" i="0">
+                <a:solidFill>
+                  <a:srgbClr val="1A2435"/>
+                </a:solidFill>
+                <a:latin typeface="맑은 고딕"/>
+                <a:ea typeface="맑은 고딕"/>
+                <a:cs typeface="맑은 고딕"/>
+              </a:rPr>
+              <a:t>fall_people (낙상 인원)</a:t>
+            </a:r>
+          </a:p>
+        </p:txBody>
+      </p:sp>
+      <p:sp>
+        <p:nvSpPr>
+          <p:cNvPr id="36" name="TextBox 35"/>
+          <p:cNvSpPr txBox="1"/>
+          <p:nvPr/>
+        </p:nvSpPr>
+        <p:spPr>
+          <a:xfrm>
+            <a:off x="3712463" y="4654296"/>
+            <a:ext cx="4572000" cy="274320"/>
+          </a:xfrm>
+          <a:prstGeom prst="rect">
+            <a:avLst/>
+          </a:prstGeom>
+          <a:noFill/>
+        </p:spPr>
+        <p:txBody>
+          <a:bodyPr wrap="square" lIns="0" rIns="0" tIns="0" bIns="0" anchor="t">
+            <a:spAutoFit/>
+          </a:bodyPr>
+          <a:lstStyle/>
+          <a:p>
+            <a:pPr algn="l">
+              <a:spcBef>
+                <a:spcPts val="0"/>
+              </a:spcBef>
+              <a:spcAft>
+                <a:spcPts val="0"/>
+              </a:spcAft>
+            </a:pPr>
+            <a:r>
+              <a:rPr sz="1100" b="0" i="0">
+                <a:solidFill>
+                  <a:srgbClr val="1A2435"/>
+                </a:solidFill>
+                <a:latin typeface="맑은 고딕"/>
+                <a:ea typeface="맑은 고딕"/>
+                <a:cs typeface="맑은 고딕"/>
+              </a:rPr>
+              <a:t>1명 이상 → 낙상</a:t>
+            </a:r>
+          </a:p>
+        </p:txBody>
+      </p:sp>
+      <p:sp>
+        <p:nvSpPr>
+          <p:cNvPr id="37" name="TextBox 36"/>
+          <p:cNvSpPr txBox="1"/>
+          <p:nvPr/>
+        </p:nvSpPr>
+        <p:spPr>
+          <a:xfrm>
+            <a:off x="8467344" y="4654296"/>
+            <a:ext cx="3008376" cy="274320"/>
+          </a:xfrm>
+          <a:prstGeom prst="rect">
+            <a:avLst/>
+          </a:prstGeom>
+          <a:noFill/>
+        </p:spPr>
+        <p:txBody>
+          <a:bodyPr wrap="square" lIns="0" rIns="0" tIns="0" bIns="0" anchor="t">
+            <a:spAutoFit/>
+          </a:bodyPr>
+          <a:lstStyle/>
+          <a:p>
+            <a:pPr algn="l">
+              <a:spcBef>
+                <a:spcPts val="0"/>
+              </a:spcBef>
+              <a:spcAft>
+                <a:spcPts val="0"/>
+              </a:spcAft>
+            </a:pPr>
+            <a:r>
+              <a:rPr sz="1100" b="0" i="0">
+                <a:solidFill>
+                  <a:srgbClr val="1A2435"/>
+                </a:solidFill>
+                <a:latin typeface="맑은 고딕"/>
+                <a:ea typeface="맑은 고딕"/>
+                <a:cs typeface="맑은 고딕"/>
+              </a:rPr>
+              <a:t>6번</a:t>
+            </a:r>
+          </a:p>
+        </p:txBody>
+      </p:sp>
+      <p:sp>
+        <p:nvSpPr>
+          <p:cNvPr id="38" name="TextBox 37"/>
+          <p:cNvSpPr txBox="1"/>
+          <p:nvPr/>
+        </p:nvSpPr>
+        <p:spPr>
+          <a:xfrm>
+            <a:off x="786384" y="5074920"/>
+            <a:ext cx="2743200" cy="274320"/>
+          </a:xfrm>
+          <a:prstGeom prst="rect">
+            <a:avLst/>
+          </a:prstGeom>
+          <a:noFill/>
+        </p:spPr>
+        <p:txBody>
+          <a:bodyPr wrap="square" lIns="0" rIns="0" tIns="0" bIns="0" anchor="t">
+            <a:spAutoFit/>
+          </a:bodyPr>
+          <a:lstStyle/>
+          <a:p>
+            <a:pPr algn="l">
+              <a:spcBef>
+                <a:spcPts val="0"/>
+              </a:spcBef>
+              <a:spcAft>
+                <a:spcPts val="0"/>
+              </a:spcAft>
+            </a:pPr>
+            <a:r>
+              <a:rPr sz="1100" b="1" i="0">
+                <a:solidFill>
+                  <a:srgbClr val="1A2435"/>
+                </a:solidFill>
+                <a:latin typeface="맑은 고딕"/>
+                <a:ea typeface="맑은 고딕"/>
+                <a:cs typeface="맑은 고딕"/>
+              </a:rPr>
+              <a:t>64칸 평균 온도</a:t>
+            </a:r>
+          </a:p>
+        </p:txBody>
+      </p:sp>
+      <p:sp>
+        <p:nvSpPr>
+          <p:cNvPr id="39" name="TextBox 38"/>
+          <p:cNvSpPr txBox="1"/>
+          <p:nvPr/>
+        </p:nvSpPr>
+        <p:spPr>
+          <a:xfrm>
+            <a:off x="3712463" y="5074920"/>
+            <a:ext cx="4572000" cy="274320"/>
+          </a:xfrm>
+          <a:prstGeom prst="rect">
+            <a:avLst/>
+          </a:prstGeom>
+          <a:noFill/>
+        </p:spPr>
+        <p:txBody>
+          <a:bodyPr wrap="square" lIns="0" rIns="0" tIns="0" bIns="0" anchor="t">
+            <a:spAutoFit/>
+          </a:bodyPr>
+          <a:lstStyle/>
+          <a:p>
+            <a:pPr algn="l">
+              <a:spcBef>
+                <a:spcPts val="0"/>
+              </a:spcBef>
+              <a:spcAft>
+                <a:spcPts val="0"/>
+              </a:spcAft>
+            </a:pPr>
+            <a:r>
+              <a:rPr sz="1100" b="0" i="0">
+                <a:solidFill>
+                  <a:srgbClr val="1A2435"/>
+                </a:solidFill>
+                <a:latin typeface="맑은 고딕"/>
+                <a:ea typeface="맑은 고딕"/>
+                <a:cs typeface="맑은 고딕"/>
+              </a:rPr>
+              <a:t>60도 이상 → 온도 상승 · 50~60도 → 초기 (현장 설정으로 켬)</a:t>
+            </a:r>
+          </a:p>
+        </p:txBody>
+      </p:sp>
+      <p:sp>
+        <p:nvSpPr>
+          <p:cNvPr id="40" name="TextBox 39"/>
+          <p:cNvSpPr txBox="1"/>
+          <p:nvPr/>
+        </p:nvSpPr>
+        <p:spPr>
+          <a:xfrm>
+            <a:off x="8467344" y="5074920"/>
+            <a:ext cx="3008376" cy="274320"/>
+          </a:xfrm>
+          <a:prstGeom prst="rect">
+            <a:avLst/>
+          </a:prstGeom>
+          <a:noFill/>
+        </p:spPr>
+        <p:txBody>
+          <a:bodyPr wrap="square" lIns="0" rIns="0" tIns="0" bIns="0" anchor="t">
+            <a:spAutoFit/>
+          </a:bodyPr>
+          <a:lstStyle/>
+          <a:p>
+            <a:pPr algn="l">
+              <a:spcBef>
+                <a:spcPts val="0"/>
+              </a:spcBef>
+              <a:spcAft>
+                <a:spcPts val="0"/>
+              </a:spcAft>
+            </a:pPr>
+            <a:r>
+              <a:rPr sz="1100" b="0" i="0">
+                <a:solidFill>
+                  <a:srgbClr val="1A2435"/>
+                </a:solidFill>
+                <a:latin typeface="맑은 고딕"/>
+                <a:ea typeface="맑은 고딕"/>
+                <a:cs typeface="맑은 고딕"/>
+              </a:rPr>
+              <a:t>2번 / 6번</a:t>
+            </a:r>
+          </a:p>
+        </p:txBody>
+      </p:sp>
+      <p:sp>
+        <p:nvSpPr>
+          <p:cNvPr id="41" name="Rounded Rectangle 40"/>
+          <p:cNvSpPr/>
+          <p:nvPr/>
+        </p:nvSpPr>
+        <p:spPr>
+          <a:xfrm>
+            <a:off x="658368" y="5394959"/>
+            <a:ext cx="10872216" cy="384048"/>
+          </a:xfrm>
+          <a:prstGeom prst="roundRect">
+            <a:avLst>
+              <a:gd name="adj" fmla="val 4000"/>
+            </a:avLst>
+          </a:prstGeom>
+          <a:solidFill>
+            <a:srgbClr val="F2F4F7"/>
+          </a:solidFill>
+          <a:ln>
+            <a:noFill/>
+          </a:ln>
+          <a:effectLst/>
+        </p:spPr>
+        <p:style>
+          <a:lnRef idx="1">
+            <a:schemeClr val="accent1"/>
+          </a:lnRef>
+          <a:fillRef idx="3">
+            <a:schemeClr val="accent1"/>
+          </a:fillRef>
+          <a:effectRef idx="2">
+            <a:schemeClr val="accent1"/>
+          </a:effectRef>
+          <a:fontRef idx="minor">
+            <a:schemeClr val="lt1"/>
+          </a:fontRef>
+        </p:style>
+        <p:txBody>
+          <a:bodyPr rtlCol="0" anchor="ctr"/>
+          <a:lstStyle/>
+          <a:p/>
+        </p:txBody>
+      </p:sp>
+      <p:sp>
+        <p:nvSpPr>
+          <p:cNvPr id="42" name="TextBox 41"/>
+          <p:cNvSpPr txBox="1"/>
+          <p:nvPr/>
+        </p:nvSpPr>
+        <p:spPr>
+          <a:xfrm>
+            <a:off x="786384" y="5495544"/>
+            <a:ext cx="2743200" cy="274320"/>
+          </a:xfrm>
+          <a:prstGeom prst="rect">
+            <a:avLst/>
+          </a:prstGeom>
+          <a:noFill/>
+        </p:spPr>
+        <p:txBody>
+          <a:bodyPr wrap="square" lIns="0" rIns="0" tIns="0" bIns="0" anchor="t">
+            <a:spAutoFit/>
+          </a:bodyPr>
+          <a:lstStyle/>
+          <a:p>
+            <a:pPr algn="l">
+              <a:spcBef>
+                <a:spcPts val="0"/>
+              </a:spcBef>
+              <a:spcAft>
+                <a:spcPts val="0"/>
+              </a:spcAft>
+            </a:pPr>
+            <a:r>
+              <a:rPr sz="1100" b="1" i="0">
+                <a:solidFill>
+                  <a:srgbClr val="1A2435"/>
+                </a:solidFill>
+                <a:latin typeface="맑은 고딕"/>
+                <a:ea typeface="맑은 고딕"/>
+                <a:cs typeface="맑은 고딕"/>
+              </a:rPr>
+              <a:t>error_code</a:t>
+            </a:r>
+          </a:p>
+        </p:txBody>
+      </p:sp>
+      <p:sp>
+        <p:nvSpPr>
+          <p:cNvPr id="43" name="TextBox 42"/>
+          <p:cNvSpPr txBox="1"/>
+          <p:nvPr/>
+        </p:nvSpPr>
+        <p:spPr>
+          <a:xfrm>
+            <a:off x="3712463" y="5495544"/>
+            <a:ext cx="4572000" cy="274320"/>
+          </a:xfrm>
+          <a:prstGeom prst="rect">
+            <a:avLst/>
+          </a:prstGeom>
+          <a:noFill/>
+        </p:spPr>
+        <p:txBody>
+          <a:bodyPr wrap="square" lIns="0" rIns="0" tIns="0" bIns="0" anchor="t">
+            <a:spAutoFit/>
+          </a:bodyPr>
+          <a:lstStyle/>
+          <a:p>
+            <a:pPr algn="l">
+              <a:spcBef>
+                <a:spcPts val="0"/>
+              </a:spcBef>
+              <a:spcAft>
+                <a:spcPts val="0"/>
+              </a:spcAft>
+            </a:pPr>
+            <a:r>
+              <a:rPr sz="1100" b="0" i="0">
+                <a:solidFill>
+                  <a:srgbClr val="1A2435"/>
+                </a:solidFill>
+                <a:latin typeface="맑은 고딕"/>
+                <a:ea typeface="맑은 고딕"/>
+                <a:cs typeface="맑은 고딕"/>
+              </a:rPr>
+              <a:t>0000 이 아니면 → 센서 이상 (카메라 이동 0021 포함 가능)</a:t>
+            </a:r>
+          </a:p>
+        </p:txBody>
+      </p:sp>
+      <p:sp>
+        <p:nvSpPr>
+          <p:cNvPr id="44" name="TextBox 43"/>
+          <p:cNvSpPr txBox="1"/>
+          <p:nvPr/>
+        </p:nvSpPr>
+        <p:spPr>
+          <a:xfrm>
+            <a:off x="8467344" y="5495544"/>
+            <a:ext cx="3008376" cy="274320"/>
+          </a:xfrm>
+          <a:prstGeom prst="rect">
+            <a:avLst/>
+          </a:prstGeom>
+          <a:noFill/>
+        </p:spPr>
+        <p:txBody>
+          <a:bodyPr wrap="square" lIns="0" rIns="0" tIns="0" bIns="0" anchor="t">
+            <a:spAutoFit/>
+          </a:bodyPr>
+          <a:lstStyle/>
+          <a:p>
+            <a:pPr algn="l">
+              <a:spcBef>
+                <a:spcPts val="0"/>
+              </a:spcBef>
+              <a:spcAft>
+                <a:spcPts val="0"/>
+              </a:spcAft>
+            </a:pPr>
+            <a:r>
+              <a:rPr sz="1100" b="0" i="0">
+                <a:solidFill>
+                  <a:srgbClr val="1A2435"/>
+                </a:solidFill>
+                <a:latin typeface="맑은 고딕"/>
+                <a:ea typeface="맑은 고딕"/>
+                <a:cs typeface="맑은 고딕"/>
+              </a:rPr>
+              <a:t>바로</a:t>
+            </a:r>
+          </a:p>
+        </p:txBody>
+      </p:sp>
+      <p:sp>
+        <p:nvSpPr>
+          <p:cNvPr id="45" name="TextBox 44"/>
+          <p:cNvSpPr txBox="1"/>
+          <p:nvPr/>
+        </p:nvSpPr>
+        <p:spPr>
+          <a:xfrm>
+            <a:off x="658368" y="5888736"/>
+            <a:ext cx="10874959" cy="457200"/>
+          </a:xfrm>
+          <a:prstGeom prst="rect">
+            <a:avLst/>
+          </a:prstGeom>
+          <a:noFill/>
+        </p:spPr>
+        <p:txBody>
+          <a:bodyPr wrap="square" lIns="0" rIns="0" tIns="0" bIns="0" anchor="t">
+            <a:spAutoFit/>
+          </a:bodyPr>
+          <a:lstStyle/>
+          <a:p>
+            <a:pPr algn="l">
+              <a:lnSpc>
+                <a:spcPct val="120000"/>
+              </a:lnSpc>
+              <a:spcBef>
+                <a:spcPts val="0"/>
+              </a:spcBef>
+              <a:spcAft>
+                <a:spcPts val="0"/>
+              </a:spcAft>
+            </a:pPr>
+            <a:r>
+              <a:rPr sz="1100" b="0" i="0">
+                <a:solidFill>
+                  <a:srgbClr val="667085"/>
+                </a:solidFill>
+                <a:latin typeface="맑은 고딕"/>
+                <a:ea typeface="맑은 고딕"/>
+                <a:cs typeface="맑은 고딕"/>
+              </a:rPr>
+              <a:t>상태가 바뀔 때만 발송 · 같은 사건 반복은 send_sms.php 가 막음 (resultCode=95) · 주간 · 월간 리포트 링크 문자도 같은 경로 (report_send.php) · score · 운전 상태는 문자 판단에 쓰지 않음</a:t>
+            </a:r>
+          </a:p>
+        </p:txBody>
+      </p:sp>
+      <p:sp>
+        <p:nvSpPr>
+          <p:cNvPr id="46" name="TextBox 45"/>
+          <p:cNvSpPr txBox="1"/>
+          <p:nvPr/>
+        </p:nvSpPr>
+        <p:spPr>
+          <a:xfrm>
+            <a:off x="10618927" y="6291072"/>
+            <a:ext cx="914400" cy="274320"/>
+          </a:xfrm>
+          <a:prstGeom prst="rect">
+            <a:avLst/>
+          </a:prstGeom>
+          <a:noFill/>
+        </p:spPr>
+        <p:txBody>
+          <a:bodyPr wrap="square" lIns="0" rIns="0" tIns="0" bIns="0" anchor="t">
+            <a:spAutoFit/>
+          </a:bodyPr>
+          <a:lstStyle/>
+          <a:p>
+            <a:pPr algn="r">
+              <a:spcBef>
+                <a:spcPts val="0"/>
+              </a:spcBef>
+              <a:spcAft>
+                <a:spcPts val="0"/>
+              </a:spcAft>
+            </a:pPr>
+            <a:r>
+              <a:rPr sz="1050" b="0" i="0">
+                <a:solidFill>
+                  <a:srgbClr val="667085"/>
+                </a:solidFill>
+                <a:latin typeface="맑은 고딕"/>
+                <a:ea typeface="맑은 고딕"/>
+                <a:cs typeface="맑은 고딕"/>
+              </a:rPr>
+              <a:t>36</a:t>
+            </a:r>
+          </a:p>
+        </p:txBody>
+      </p:sp>
+    </p:spTree>
+  </p:cSld>
+  <p:clrMapOvr>
+    <a:masterClrMapping/>
+  </p:clrMapOvr>
+</p:sld>
+</file>
+
+<file path=ppt/slides/slide38.xml><?xml version="1.0" encoding="utf-8"?>
+<p:sld xmlns:a="http://schemas.openxmlformats.org/drawingml/2006/main" xmlns:p="http://schemas.openxmlformats.org/presentationml/2006/main" xmlns:r="http://schemas.openxmlformats.org/officeDocument/2006/relationships">
+  <p:cSld>
+    <p:bg>
+      <p:bgPr>
+        <a:solidFill>
+          <a:srgbClr val="FFFFFF"/>
+        </a:solidFill>
+        <a:effectLst/>
+      </p:bgPr>
+    </p:bg>
+    <p:spTree>
+      <p:nvGrpSpPr>
+        <p:cNvPr id="1" name=""/>
+        <p:cNvGrpSpPr/>
+        <p:nvPr/>
+      </p:nvGrpSpPr>
+      <p:grpSpPr/>
+      <p:sp>
+        <p:nvSpPr>
+          <p:cNvPr id="2" name="TextBox 1"/>
+          <p:cNvSpPr txBox="1"/>
+          <p:nvPr/>
+        </p:nvSpPr>
+        <p:spPr>
+          <a:xfrm>
+            <a:off x="658368" y="475488"/>
+            <a:ext cx="10874959" cy="310896"/>
+          </a:xfrm>
+          <a:prstGeom prst="rect">
+            <a:avLst/>
+          </a:prstGeom>
+          <a:noFill/>
+        </p:spPr>
+        <p:txBody>
+          <a:bodyPr wrap="square" lIns="0" rIns="0" tIns="0" bIns="0" anchor="t">
+            <a:spAutoFit/>
+          </a:bodyPr>
+          <a:lstStyle/>
+          <a:p>
+            <a:pPr algn="l">
+              <a:spcBef>
+                <a:spcPts val="0"/>
+              </a:spcBef>
+              <a:spcAft>
+                <a:spcPts val="0"/>
+              </a:spcAft>
+            </a:pPr>
+            <a:r>
+              <a:rPr sz="1250" b="1" i="0">
+                <a:solidFill>
+                  <a:srgbClr val="E4572E"/>
+                </a:solidFill>
+                <a:latin typeface="맑은 고딕"/>
+                <a:ea typeface="맑은 고딕"/>
+                <a:cs typeface="맑은 고딕"/>
+              </a:rPr>
+              <a:t>37  OP STATE SYNC</a:t>
+            </a:r>
+          </a:p>
+        </p:txBody>
+      </p:sp>
+      <p:sp>
+        <p:nvSpPr>
+          <p:cNvPr id="3" name="TextBox 2"/>
+          <p:cNvSpPr txBox="1"/>
+          <p:nvPr/>
+        </p:nvSpPr>
+        <p:spPr>
+          <a:xfrm>
+            <a:off x="658368" y="804672"/>
+            <a:ext cx="10874959" cy="621792"/>
+          </a:xfrm>
+          <a:prstGeom prst="rect">
+            <a:avLst/>
+          </a:prstGeom>
+          <a:noFill/>
+        </p:spPr>
+        <p:txBody>
+          <a:bodyPr wrap="square" lIns="0" rIns="0" tIns="0" bIns="0" anchor="t">
+            <a:spAutoFit/>
+          </a:bodyPr>
+          <a:lstStyle/>
+          <a:p>
+            <a:pPr algn="l">
+              <a:spcBef>
+                <a:spcPts val="0"/>
+              </a:spcBef>
+              <a:spcAft>
+                <a:spcPts val="0"/>
+              </a:spcAft>
+            </a:pPr>
+            <a:r>
+              <a:rPr sz="3000" b="1" i="0">
+                <a:solidFill>
+                  <a:srgbClr val="1A2435"/>
+                </a:solidFill>
+                <a:latin typeface="맑은 고딕"/>
+                <a:ea typeface="맑은 고딕"/>
+                <a:cs typeface="맑은 고딕"/>
+              </a:rPr>
+              <a:t>운전 상태 동기화 설정</a:t>
+            </a:r>
+          </a:p>
+        </p:txBody>
+      </p:sp>
+      <p:sp>
+        <p:nvSpPr>
+          <p:cNvPr id="4" name="Oval 3"/>
+          <p:cNvSpPr/>
+          <p:nvPr/>
+        </p:nvSpPr>
+        <p:spPr>
+          <a:xfrm>
+            <a:off x="658368" y="1828800"/>
+            <a:ext cx="384048" cy="384048"/>
+          </a:xfrm>
+          <a:prstGeom prst="ellipse">
+            <a:avLst/>
+          </a:prstGeom>
+          <a:solidFill>
+            <a:srgbClr val="2A9D8F"/>
+          </a:solidFill>
+          <a:ln>
+            <a:noFill/>
+          </a:ln>
+          <a:effectLst/>
+        </p:spPr>
+        <p:style>
+          <a:lnRef idx="1">
+            <a:schemeClr val="accent1"/>
+          </a:lnRef>
+          <a:fillRef idx="3">
+            <a:schemeClr val="accent1"/>
+          </a:fillRef>
+          <a:effectRef idx="2">
+            <a:schemeClr val="accent1"/>
+          </a:effectRef>
+          <a:fontRef idx="minor">
+            <a:schemeClr val="lt1"/>
+          </a:fontRef>
+        </p:style>
+        <p:txBody>
+          <a:bodyPr rtlCol="0" anchor="ctr" lIns="0" rIns="0" tIns="0" bIns="0"/>
+          <a:lstStyle/>
+          <a:p>
+            <a:pPr algn="ctr"/>
+            <a:r>
+              <a:rPr sz="1400" b="1" i="0">
+                <a:solidFill>
+                  <a:srgbClr val="FFFFFF"/>
+                </a:solidFill>
+                <a:latin typeface="맑은 고딕"/>
+                <a:ea typeface="맑은 고딕"/>
+                <a:cs typeface="맑은 고딕"/>
+              </a:rPr>
+              <a:t>1</a:t>
+            </a:r>
+          </a:p>
+        </p:txBody>
+      </p:sp>
+      <p:sp>
+        <p:nvSpPr>
+          <p:cNvPr id="5" name="TextBox 4"/>
+          <p:cNvSpPr txBox="1"/>
+          <p:nvPr/>
+        </p:nvSpPr>
+        <p:spPr>
+          <a:xfrm>
+            <a:off x="1252728" y="1783080"/>
+            <a:ext cx="10280599" cy="310896"/>
+          </a:xfrm>
+          <a:prstGeom prst="rect">
+            <a:avLst/>
+          </a:prstGeom>
+          <a:noFill/>
+        </p:spPr>
+        <p:txBody>
+          <a:bodyPr wrap="square" lIns="0" rIns="0" tIns="0" bIns="0" anchor="t">
+            <a:spAutoFit/>
+          </a:bodyPr>
+          <a:lstStyle/>
+          <a:p>
+            <a:pPr algn="l">
+              <a:spcBef>
+                <a:spcPts val="0"/>
+              </a:spcBef>
+              <a:spcAft>
+                <a:spcPts val="0"/>
+              </a:spcAft>
+            </a:pPr>
+            <a:r>
+              <a:rPr sz="1350" b="1" i="0">
+                <a:solidFill>
+                  <a:srgbClr val="1A2435"/>
+                </a:solidFill>
+                <a:latin typeface="맑은 고딕"/>
+                <a:ea typeface="맑은 고딕"/>
+                <a:cs typeface="맑은 고딕"/>
+              </a:rPr>
+              <a:t>관제서버 설정 → [운전 상태] → [키 만들기]</a:t>
+            </a:r>
+          </a:p>
+        </p:txBody>
+      </p:sp>
+      <p:sp>
+        <p:nvSpPr>
+          <p:cNvPr id="6" name="TextBox 5"/>
+          <p:cNvSpPr txBox="1"/>
+          <p:nvPr/>
+        </p:nvSpPr>
+        <p:spPr>
+          <a:xfrm>
+            <a:off x="1252728" y="2130552"/>
+            <a:ext cx="10280599" cy="274320"/>
+          </a:xfrm>
+          <a:prstGeom prst="rect">
+            <a:avLst/>
+          </a:prstGeom>
+          <a:noFill/>
+        </p:spPr>
+        <p:txBody>
+          <a:bodyPr wrap="square" lIns="0" rIns="0" tIns="0" bIns="0" anchor="t">
+            <a:spAutoFit/>
+          </a:bodyPr>
+          <a:lstStyle/>
+          <a:p>
+            <a:pPr algn="l">
+              <a:spcBef>
+                <a:spcPts val="0"/>
+              </a:spcBef>
+              <a:spcAft>
+                <a:spcPts val="0"/>
+              </a:spcAft>
+            </a:pPr>
+            <a:r>
+              <a:rPr sz="1100" b="0" i="0">
+                <a:solidFill>
+                  <a:srgbClr val="667085"/>
+                </a:solidFill>
+                <a:latin typeface="맑은 고딕"/>
+                <a:ea typeface="맑은 고딕"/>
+                <a:cs typeface="맑은 고딕"/>
+              </a:rPr>
+              <a:t>현장마다 · 키 원문은 한 번만 보임 (관제서버엔 해시만 저장)</a:t>
+            </a:r>
+          </a:p>
+        </p:txBody>
+      </p:sp>
+      <p:sp>
+        <p:nvSpPr>
+          <p:cNvPr id="7" name="Oval 6"/>
+          <p:cNvSpPr/>
+          <p:nvPr/>
+        </p:nvSpPr>
+        <p:spPr>
+          <a:xfrm>
+            <a:off x="658368" y="2633472"/>
+            <a:ext cx="384048" cy="384048"/>
+          </a:xfrm>
+          <a:prstGeom prst="ellipse">
+            <a:avLst/>
+          </a:prstGeom>
+          <a:solidFill>
+            <a:srgbClr val="2A9D8F"/>
+          </a:solidFill>
+          <a:ln>
+            <a:noFill/>
+          </a:ln>
+          <a:effectLst/>
+        </p:spPr>
+        <p:style>
+          <a:lnRef idx="1">
+            <a:schemeClr val="accent1"/>
+          </a:lnRef>
+          <a:fillRef idx="3">
+            <a:schemeClr val="accent1"/>
+          </a:fillRef>
+          <a:effectRef idx="2">
+            <a:schemeClr val="accent1"/>
+          </a:effectRef>
+          <a:fontRef idx="minor">
+            <a:schemeClr val="lt1"/>
+          </a:fontRef>
+        </p:style>
+        <p:txBody>
+          <a:bodyPr rtlCol="0" anchor="ctr" lIns="0" rIns="0" tIns="0" bIns="0"/>
+          <a:lstStyle/>
+          <a:p>
+            <a:pPr algn="ctr"/>
+            <a:r>
+              <a:rPr sz="1400" b="1" i="0">
+                <a:solidFill>
+                  <a:srgbClr val="FFFFFF"/>
+                </a:solidFill>
+                <a:latin typeface="맑은 고딕"/>
+                <a:ea typeface="맑은 고딕"/>
+                <a:cs typeface="맑은 고딕"/>
+              </a:rPr>
+              <a:t>2</a:t>
+            </a:r>
+          </a:p>
+        </p:txBody>
+      </p:sp>
+      <p:sp>
+        <p:nvSpPr>
+          <p:cNvPr id="8" name="TextBox 7"/>
+          <p:cNvSpPr txBox="1"/>
+          <p:nvPr/>
+        </p:nvSpPr>
+        <p:spPr>
+          <a:xfrm>
+            <a:off x="1252728" y="2587752"/>
+            <a:ext cx="10280599" cy="310896"/>
+          </a:xfrm>
+          <a:prstGeom prst="rect">
+            <a:avLst/>
+          </a:prstGeom>
+          <a:noFill/>
+        </p:spPr>
+        <p:txBody>
+          <a:bodyPr wrap="square" lIns="0" rIns="0" tIns="0" bIns="0" anchor="t">
+            <a:spAutoFit/>
+          </a:bodyPr>
+          <a:lstStyle/>
+          <a:p>
+            <a:pPr algn="l">
+              <a:spcBef>
+                <a:spcPts val="0"/>
+              </a:spcBef>
+              <a:spcAft>
+                <a:spcPts val="0"/>
+              </a:spcAft>
+            </a:pPr>
+            <a:r>
+              <a:rPr sz="1350" b="1" i="0">
+                <a:solidFill>
+                  <a:srgbClr val="1A2435"/>
+                </a:solidFill>
+                <a:latin typeface="맑은 고딕"/>
+                <a:ea typeface="맑은 고딕"/>
+                <a:cs typeface="맑은 고딕"/>
+              </a:rPr>
+              <a:t>분석서버 users\&lt;현장&gt;\env.ini [NETWORK] 에 OP_SYNC_KEY = 키</a:t>
+            </a:r>
+          </a:p>
+        </p:txBody>
+      </p:sp>
+      <p:sp>
+        <p:nvSpPr>
+          <p:cNvPr id="9" name="TextBox 8"/>
+          <p:cNvSpPr txBox="1"/>
+          <p:nvPr/>
+        </p:nvSpPr>
+        <p:spPr>
+          <a:xfrm>
+            <a:off x="1252728" y="2935224"/>
+            <a:ext cx="10280599" cy="274320"/>
+          </a:xfrm>
+          <a:prstGeom prst="rect">
+            <a:avLst/>
+          </a:prstGeom>
+          <a:noFill/>
+        </p:spPr>
+        <p:txBody>
+          <a:bodyPr wrap="square" lIns="0" rIns="0" tIns="0" bIns="0" anchor="t">
+            <a:spAutoFit/>
+          </a:bodyPr>
+          <a:lstStyle/>
+          <a:p>
+            <a:pPr algn="l">
+              <a:spcBef>
+                <a:spcPts val="0"/>
+              </a:spcBef>
+              <a:spcAft>
+                <a:spcPts val="0"/>
+              </a:spcAft>
+            </a:pPr>
+            <a:r>
+              <a:rPr sz="1100" b="0" i="0">
+                <a:solidFill>
+                  <a:srgbClr val="667085"/>
+                </a:solidFill>
+                <a:latin typeface="맑은 고딕"/>
+                <a:ea typeface="맑은 고딕"/>
+                <a:cs typeface="맑은 고딕"/>
+              </a:rPr>
+              <a:t>관제 주소가 다르면 VIEWER_URL = 주소 (기본: ROOT_URL 의 kict_samsung → kict_viewer)</a:t>
+            </a:r>
+          </a:p>
+        </p:txBody>
+      </p:sp>
+      <p:sp>
+        <p:nvSpPr>
+          <p:cNvPr id="10" name="Oval 9"/>
+          <p:cNvSpPr/>
+          <p:nvPr/>
+        </p:nvSpPr>
+        <p:spPr>
+          <a:xfrm>
+            <a:off x="658368" y="3438144"/>
+            <a:ext cx="384048" cy="384048"/>
+          </a:xfrm>
+          <a:prstGeom prst="ellipse">
+            <a:avLst/>
+          </a:prstGeom>
+          <a:solidFill>
+            <a:srgbClr val="2A9D8F"/>
+          </a:solidFill>
+          <a:ln>
+            <a:noFill/>
+          </a:ln>
+          <a:effectLst/>
+        </p:spPr>
+        <p:style>
+          <a:lnRef idx="1">
+            <a:schemeClr val="accent1"/>
+          </a:lnRef>
+          <a:fillRef idx="3">
+            <a:schemeClr val="accent1"/>
+          </a:fillRef>
+          <a:effectRef idx="2">
+            <a:schemeClr val="accent1"/>
+          </a:effectRef>
+          <a:fontRef idx="minor">
+            <a:schemeClr val="lt1"/>
+          </a:fontRef>
+        </p:style>
+        <p:txBody>
+          <a:bodyPr rtlCol="0" anchor="ctr" lIns="0" rIns="0" tIns="0" bIns="0"/>
+          <a:lstStyle/>
+          <a:p>
+            <a:pPr algn="ctr"/>
+            <a:r>
+              <a:rPr sz="1400" b="1" i="0">
+                <a:solidFill>
+                  <a:srgbClr val="FFFFFF"/>
+                </a:solidFill>
+                <a:latin typeface="맑은 고딕"/>
+                <a:ea typeface="맑은 고딕"/>
+                <a:cs typeface="맑은 고딕"/>
+              </a:rPr>
+              <a:t>3</a:t>
+            </a:r>
+          </a:p>
+        </p:txBody>
+      </p:sp>
+      <p:sp>
+        <p:nvSpPr>
+          <p:cNvPr id="11" name="TextBox 10"/>
+          <p:cNvSpPr txBox="1"/>
+          <p:nvPr/>
+        </p:nvSpPr>
+        <p:spPr>
+          <a:xfrm>
+            <a:off x="1252728" y="3392424"/>
+            <a:ext cx="10280599" cy="310896"/>
+          </a:xfrm>
+          <a:prstGeom prst="rect">
+            <a:avLst/>
+          </a:prstGeom>
+          <a:noFill/>
+        </p:spPr>
+        <p:txBody>
+          <a:bodyPr wrap="square" lIns="0" rIns="0" tIns="0" bIns="0" anchor="t">
+            <a:spAutoFit/>
+          </a:bodyPr>
+          <a:lstStyle/>
+          <a:p>
+            <a:pPr algn="l">
+              <a:spcBef>
+                <a:spcPts val="0"/>
+              </a:spcBef>
+              <a:spcAft>
+                <a:spcPts val="0"/>
+              </a:spcAft>
+            </a:pPr>
+            <a:r>
+              <a:rPr sz="1350" b="1" i="0">
+                <a:solidFill>
+                  <a:srgbClr val="1A2435"/>
+                </a:solidFill>
+                <a:latin typeface="맑은 고딕"/>
+                <a:ea typeface="맑은 고딕"/>
+                <a:cs typeface="맑은 고딕"/>
+              </a:rPr>
+              <a:t>분석서버 감시 다시 시작</a:t>
+            </a:r>
+          </a:p>
+        </p:txBody>
+      </p:sp>
+      <p:sp>
+        <p:nvSpPr>
+          <p:cNvPr id="12" name="TextBox 11"/>
+          <p:cNvSpPr txBox="1"/>
+          <p:nvPr/>
+        </p:nvSpPr>
+        <p:spPr>
+          <a:xfrm>
+            <a:off x="1252728" y="3739896"/>
+            <a:ext cx="10280599" cy="274320"/>
+          </a:xfrm>
+          <a:prstGeom prst="rect">
+            <a:avLst/>
+          </a:prstGeom>
+          <a:noFill/>
+        </p:spPr>
+        <p:txBody>
+          <a:bodyPr wrap="square" lIns="0" rIns="0" tIns="0" bIns="0" anchor="t">
+            <a:spAutoFit/>
+          </a:bodyPr>
+          <a:lstStyle/>
+          <a:p>
+            <a:pPr algn="l">
+              <a:spcBef>
+                <a:spcPts val="0"/>
+              </a:spcBef>
+              <a:spcAft>
+                <a:spcPts val="0"/>
+              </a:spcAft>
+            </a:pPr>
+            <a:r>
+              <a:rPr sz="1100" b="0" i="0">
+                <a:solidFill>
+                  <a:srgbClr val="667085"/>
+                </a:solidFill>
+                <a:latin typeface="맑은 고딕"/>
+                <a:ea typeface="맑은 고딕"/>
+                <a:cs typeface="맑은 고딕"/>
+              </a:rPr>
+              <a:t>op_sync.py 스레드가 1분마다 지금 상태 · 바뀐 분류표를 올림</a:t>
+            </a:r>
+          </a:p>
+        </p:txBody>
+      </p:sp>
+      <p:sp>
+        <p:nvSpPr>
+          <p:cNvPr id="13" name="Oval 12"/>
+          <p:cNvSpPr/>
+          <p:nvPr/>
+        </p:nvSpPr>
+        <p:spPr>
+          <a:xfrm>
+            <a:off x="658368" y="4242816"/>
+            <a:ext cx="384048" cy="384048"/>
+          </a:xfrm>
+          <a:prstGeom prst="ellipse">
+            <a:avLst/>
+          </a:prstGeom>
+          <a:solidFill>
+            <a:srgbClr val="2A9D8F"/>
+          </a:solidFill>
+          <a:ln>
+            <a:noFill/>
+          </a:ln>
+          <a:effectLst/>
+        </p:spPr>
+        <p:style>
+          <a:lnRef idx="1">
+            <a:schemeClr val="accent1"/>
+          </a:lnRef>
+          <a:fillRef idx="3">
+            <a:schemeClr val="accent1"/>
+          </a:fillRef>
+          <a:effectRef idx="2">
+            <a:schemeClr val="accent1"/>
+          </a:effectRef>
+          <a:fontRef idx="minor">
+            <a:schemeClr val="lt1"/>
+          </a:fontRef>
+        </p:style>
+        <p:txBody>
+          <a:bodyPr rtlCol="0" anchor="ctr" lIns="0" rIns="0" tIns="0" bIns="0"/>
+          <a:lstStyle/>
+          <a:p>
+            <a:pPr algn="ctr"/>
+            <a:r>
+              <a:rPr sz="1400" b="1" i="0">
+                <a:solidFill>
+                  <a:srgbClr val="FFFFFF"/>
+                </a:solidFill>
+                <a:latin typeface="맑은 고딕"/>
+                <a:ea typeface="맑은 고딕"/>
+                <a:cs typeface="맑은 고딕"/>
+              </a:rPr>
+              <a:t>4</a:t>
+            </a:r>
+          </a:p>
+        </p:txBody>
+      </p:sp>
+      <p:sp>
+        <p:nvSpPr>
+          <p:cNvPr id="14" name="TextBox 13"/>
+          <p:cNvSpPr txBox="1"/>
+          <p:nvPr/>
+        </p:nvSpPr>
+        <p:spPr>
+          <a:xfrm>
+            <a:off x="1252728" y="4197096"/>
+            <a:ext cx="10280599" cy="310896"/>
+          </a:xfrm>
+          <a:prstGeom prst="rect">
+            <a:avLst/>
+          </a:prstGeom>
+          <a:noFill/>
+        </p:spPr>
+        <p:txBody>
+          <a:bodyPr wrap="square" lIns="0" rIns="0" tIns="0" bIns="0" anchor="t">
+            <a:spAutoFit/>
+          </a:bodyPr>
+          <a:lstStyle/>
+          <a:p>
+            <a:pPr algn="l">
+              <a:spcBef>
+                <a:spcPts val="0"/>
+              </a:spcBef>
+              <a:spcAft>
+                <a:spcPts val="0"/>
+              </a:spcAft>
+            </a:pPr>
+            <a:r>
+              <a:rPr sz="1350" b="1" i="0">
+                <a:solidFill>
+                  <a:srgbClr val="1A2435"/>
+                </a:solidFill>
+                <a:latin typeface="맑은 고딕"/>
+                <a:ea typeface="맑은 고딕"/>
+                <a:cs typeface="맑은 고딕"/>
+              </a:rPr>
+              <a:t>1~2분 뒤 설정 탭에 분류표 표시 · 관제 화면에 '운전 상태' 표시</a:t>
+            </a:r>
+          </a:p>
+        </p:txBody>
+      </p:sp>
+      <p:sp>
+        <p:nvSpPr>
+          <p:cNvPr id="15" name="TextBox 14"/>
+          <p:cNvSpPr txBox="1"/>
+          <p:nvPr/>
+        </p:nvSpPr>
+        <p:spPr>
+          <a:xfrm>
+            <a:off x="1252728" y="4544568"/>
+            <a:ext cx="10280599" cy="274320"/>
+          </a:xfrm>
+          <a:prstGeom prst="rect">
+            <a:avLst/>
+          </a:prstGeom>
+          <a:noFill/>
+        </p:spPr>
+        <p:txBody>
+          <a:bodyPr wrap="square" lIns="0" rIns="0" tIns="0" bIns="0" anchor="t">
+            <a:spAutoFit/>
+          </a:bodyPr>
+          <a:lstStyle/>
+          <a:p>
+            <a:pPr algn="l">
+              <a:spcBef>
+                <a:spcPts val="0"/>
+              </a:spcBef>
+              <a:spcAft>
+                <a:spcPts val="0"/>
+              </a:spcAft>
+            </a:pPr>
+            <a:r>
+              <a:rPr sz="1100" b="0" i="0">
+                <a:solidFill>
+                  <a:srgbClr val="667085"/>
+                </a:solidFill>
+                <a:latin typeface="맑은 고딕"/>
+                <a:ea typeface="맑은 고딕"/>
+                <a:cs typeface="맑은 고딕"/>
+              </a:rPr>
+              <a:t>웹에서 이름 · 칸별 온도 패턴을 고쳐 저장하면 분석서버가 1~2분 안에 받아 적용</a:t>
+            </a:r>
+          </a:p>
+        </p:txBody>
+      </p:sp>
+      <p:sp>
+        <p:nvSpPr>
+          <p:cNvPr id="16" name="Rounded Rectangle 15"/>
+          <p:cNvSpPr/>
+          <p:nvPr/>
+        </p:nvSpPr>
+        <p:spPr>
+          <a:xfrm>
+            <a:off x="658368" y="5093207"/>
+            <a:ext cx="10874959" cy="1005840"/>
+          </a:xfrm>
+          <a:prstGeom prst="roundRect">
+            <a:avLst>
+              <a:gd name="adj" fmla="val 6000"/>
+            </a:avLst>
+          </a:prstGeom>
+          <a:solidFill>
+            <a:srgbClr val="ECF6F4"/>
+          </a:solidFill>
+          <a:ln>
+            <a:noFill/>
+          </a:ln>
+          <a:effectLst/>
+        </p:spPr>
+        <p:style>
+          <a:lnRef idx="1">
+            <a:schemeClr val="accent1"/>
+          </a:lnRef>
+          <a:fillRef idx="3">
+            <a:schemeClr val="accent1"/>
+          </a:fillRef>
+          <a:effectRef idx="2">
+            <a:schemeClr val="accent1"/>
+          </a:effectRef>
+          <a:fontRef idx="minor">
+            <a:schemeClr val="lt1"/>
+          </a:fontRef>
+        </p:style>
+        <p:txBody>
+          <a:bodyPr rtlCol="0" anchor="ctr"/>
+          <a:lstStyle/>
+          <a:p/>
+        </p:txBody>
+      </p:sp>
+      <p:sp>
+        <p:nvSpPr>
+          <p:cNvPr id="17" name="TextBox 16"/>
+          <p:cNvSpPr txBox="1"/>
+          <p:nvPr/>
+        </p:nvSpPr>
+        <p:spPr>
+          <a:xfrm>
+            <a:off x="932688" y="5239512"/>
+            <a:ext cx="10326319" cy="777240"/>
+          </a:xfrm>
+          <a:prstGeom prst="rect">
+            <a:avLst/>
+          </a:prstGeom>
+          <a:noFill/>
+        </p:spPr>
+        <p:txBody>
+          <a:bodyPr wrap="square" lIns="0" rIns="0" tIns="0" bIns="0" anchor="t">
+            <a:spAutoFit/>
+          </a:bodyPr>
+          <a:lstStyle/>
+          <a:p>
+            <a:pPr algn="l">
+              <a:spcBef>
+                <a:spcPts val="0"/>
+              </a:spcBef>
+              <a:spcAft>
+                <a:spcPts val="400"/>
+              </a:spcAft>
+            </a:pPr>
+            <a:r>
+              <a:rPr sz="1250" b="1" i="0">
+                <a:solidFill>
+                  <a:srgbClr val="2A9D8F"/>
+                </a:solidFill>
+                <a:latin typeface="맑은 고딕"/>
+                <a:ea typeface="맑은 고딕"/>
+                <a:cs typeface="맑은 고딕"/>
+              </a:rPr>
+              <a:t>알아 둘 것</a:t>
+            </a:r>
+          </a:p>
+          <a:p>
+            <a:pPr algn="l">
+              <a:lnSpc>
+                <a:spcPct val="125000"/>
+              </a:lnSpc>
+              <a:spcBef>
+                <a:spcPts val="0"/>
+              </a:spcBef>
+              <a:spcAft>
+                <a:spcPts val="0"/>
+              </a:spcAft>
+            </a:pPr>
+            <a:r>
+              <a:rPr sz="1150" b="0" i="0">
+                <a:solidFill>
+                  <a:srgbClr val="1A2435"/>
+                </a:solidFill>
+                <a:latin typeface="맑은 고딕"/>
+                <a:ea typeface="맑은 고딕"/>
+                <a:cs typeface="맑은 고딕"/>
+              </a:rPr>
+              <a:t>양쪽에서 동시에 고치면 웹에서 고친 것이 이김 · 이름에 따옴표(") · 역빗금(\) 불가 · 웹에서 새로 만든 상태는 '낯섦' 기준(평소 벗어남 · 낯선 선)이 없음 (make_op_states.py 로 다시 만들어야 생김) · 운전 상태는 표시용 · 경보와 채점에는 영향 없음</a:t>
+            </a:r>
+          </a:p>
+        </p:txBody>
+      </p:sp>
+      <p:sp>
+        <p:nvSpPr>
+          <p:cNvPr id="18" name="TextBox 17"/>
+          <p:cNvSpPr txBox="1"/>
+          <p:nvPr/>
+        </p:nvSpPr>
+        <p:spPr>
+          <a:xfrm>
+            <a:off x="10618927" y="6291072"/>
+            <a:ext cx="914400" cy="274320"/>
+          </a:xfrm>
+          <a:prstGeom prst="rect">
+            <a:avLst/>
+          </a:prstGeom>
+          <a:noFill/>
+        </p:spPr>
+        <p:txBody>
+          <a:bodyPr wrap="square" lIns="0" rIns="0" tIns="0" bIns="0" anchor="t">
+            <a:spAutoFit/>
+          </a:bodyPr>
+          <a:lstStyle/>
+          <a:p>
+            <a:pPr algn="r">
+              <a:spcBef>
+                <a:spcPts val="0"/>
+              </a:spcBef>
+              <a:spcAft>
+                <a:spcPts val="0"/>
+              </a:spcAft>
+            </a:pPr>
+            <a:r>
+              <a:rPr sz="1050" b="0" i="0">
+                <a:solidFill>
+                  <a:srgbClr val="667085"/>
+                </a:solidFill>
+                <a:latin typeface="맑은 고딕"/>
+                <a:ea typeface="맑은 고딕"/>
+                <a:cs typeface="맑은 고딕"/>
+              </a:rPr>
+              <a:t>37</a:t>
             </a:r>
           </a:p>
         </p:txBody>
@@ -44656,7 +51558,7 @@
                 <a:ea typeface="맑은 고딕"/>
                 <a:cs typeface="맑은 고딕"/>
               </a:rPr>
-              <a:t>모든 경로는 이 폴더를 기준으로 계산됩니다. exe 와 데이터가 같은 폴더에 놓입니다.</a:t>
+              <a:t>모든 경로는 이 폴더를 기준으로 계산됨 · exe 와 데이터가 같은 폴더에 놓임</a:t>
             </a:r>
           </a:p>
         </p:txBody>
@@ -44835,7 +51737,7 @@
                 <a:ea typeface="맑은 고딕"/>
                 <a:cs typeface="맑은 고딕"/>
               </a:rPr>
-              <a:t>현장을 추가하려면 users 아래에 폴더를 만들고 env.ini · continual_learning.ini · db_secrets.ini 를 넣습니다.</a:t>
+              <a:t>현장을 추가하려면 users 아래에 폴더를 만들고 env.ini · continual_learning.ini · db_secrets.ini 를 넣음</a:t>
             </a:r>
           </a:p>
         </p:txBody>
@@ -45014,7 +51916,7 @@
                 <a:ea typeface="맑은 고딕"/>
                 <a:cs typeface="맑은 고딕"/>
               </a:rPr>
-              <a:t>scaler 와 autoencoder 가중치는 재학습 없이 복구할 수 없습니다. 반드시 백업하십시오.</a:t>
+              <a:t>scaler 와 autoencoder 가중치는 재학습 없이 복구할 수 없음 · 반드시 백업할 것</a:t>
             </a:r>
           </a:p>
         </p:txBody>
@@ -45216,7 +52118,7 @@
                 <a:ea typeface="맑은 고딕"/>
                 <a:cs typeface="맑은 고딕"/>
               </a:rPr>
-              <a:t>장비 고유 · 현장 고유 · 운영 중 조정 · 비밀 정보를 나눴습니다. 읽는 순서가 정해져 있습니다.</a:t>
+              <a:t>장비 고유 · 현장 고유 · 운영 중 조정 · 비밀 정보를 나눴음 · 읽는 순서가 정해져 있음</a:t>
             </a:r>
           </a:p>
         </p:txBody>
@@ -45534,7 +52436,7 @@
                 <a:ea typeface="맑은 고딕"/>
                 <a:cs typeface="맑은 고딕"/>
               </a:rPr>
-              <a:t>가장 먼저 읽습니다. ROOT_PATH 가 env.ini 의 위치를 결정하기 때문입니다.</a:t>
+              <a:t>가장 먼저 읽음 · ROOT_PATH 가 env.ini 의 위치를 결정하기 때문임</a:t>
             </a:r>
           </a:p>
         </p:txBody>
@@ -45852,7 +52754,7 @@
                 <a:ea typeface="맑은 고딕"/>
                 <a:cs typeface="맑은 고딕"/>
               </a:rPr>
-              <a:t>한 번 정하면 거의 바꾸지 않는 값입니다.</a:t>
+              <a:t>한 번 정하면 거의 바꾸지 않는 값임</a:t>
             </a:r>
           </a:p>
         </p:txBody>
@@ -46146,7 +53048,7 @@
                 <a:ea typeface="맑은 고딕"/>
                 <a:cs typeface="맑은 고딕"/>
               </a:rPr>
-              <a:t>[설정] 창이 읽고 씁니다. env.ini 뒤에 읽어 같은 열쇠면 이깁니다.</a:t>
+              <a:t>[설정] 창이 읽고 씀 · env.ini 뒤에 읽어 같은 열쇠면 이긺</a:t>
             </a:r>
           </a:p>
         </p:txBody>
@@ -46440,7 +53342,7 @@
                 <a:ea typeface="맑은 고딕"/>
                 <a:cs typeface="맑은 고딕"/>
               </a:rPr>
-              <a:t>git 추적 제외. users\db_secrets.ini.sample 을 복사해 만듭니다.</a:t>
+              <a:t>git 추적 제외. users\db_secrets.ini.sample 을 복사해 만듦</a:t>
             </a:r>
           </a:p>
         </p:txBody>
@@ -46833,8 +53735,8 @@
                 <a:cs typeface="맑은 고딕"/>
               </a:rPr>
               <a:t>C++ 데스크톱 개발 워크로드와
-MFC 구성 요소를 반드시 포함합니다.
-openpifpaf 빌드에도 필요합니다.</a:t>
+MFC 구성 요소를 반드시 포함함
+openpifpaf 빌드에도 필요함</a:t>
             </a:r>
           </a:p>
         </p:txBody>
@@ -47068,9 +53970,9 @@
                 <a:ea typeface="맑은 고딕"/>
                 <a:cs typeface="맑은 고딕"/>
               </a:rPr>
-              <a:t>Server 와 Connector/C 를 설치합니다.
-root 비밀번호를 기억해 두십시오.
-libmysql.dll 경로가 필요합니다.</a:t>
+              <a:t>Server 와 Connector/C 를 설치함
+root 비밀번호를 기억해 둘 것
+libmysql.dll 경로가 필요함</a:t>
             </a:r>
           </a:p>
         </p:txBody>
@@ -47305,7 +54207,7 @@
                 <a:cs typeface="맑은 고딕"/>
               </a:rPr>
               <a:t>conda 명령이 동작하는지
-conda -V 로 확인합니다.</a:t>
+conda -V 로 확인함</a:t>
             </a:r>
           </a:p>
         </p:txBody>
@@ -48192,7 +55094,7 @@
                 <a:ea typeface="맑은 고딕"/>
                 <a:cs typeface="맑은 고딕"/>
               </a:rPr>
-              <a:t>db_utils 를 설치하지 마십시오</a:t>
+              <a:t>db_utils 를 설치하지 말 것</a:t>
             </a:r>
           </a:p>
         </p:txBody>
@@ -48239,7 +55141,7 @@
                 <a:ea typeface="맑은 고딕"/>
                 <a:cs typeface="맑은 고딕"/>
               </a:rPr>
-              <a:t>PyPI 에 같은 이름의 무관한 패키지가 있습니다. 설치하면 프로젝트의 source\db_utils.py 대신 그쪽이 임포트되어 원인을 찾기 어려운 오류가 납니다.</a:t>
+              <a:t>PyPI 에 같은 이름의 무관한 패키지가 있음 · 설치하면 프로젝트의 source\db_utils.py 대신 그쪽이 임포트되어 원인을 찾기 어려운 오류가 남</a:t>
             </a:r>
           </a:p>
         </p:txBody>
@@ -49057,7 +55959,7 @@
                 <a:ea typeface="맑은 고딕"/>
                 <a:cs typeface="맑은 고딕"/>
               </a:rPr>
-              <a:t>현장(user)마다 별도의 데이터베이스를 씁니다. 이름 규칙은 &lt;user_ID&gt;_sensor_data 입니다.</a:t>
+              <a:t>현장(user)마다 별도의 데이터베이스를 씀 · 이름 규칙은 &lt;user_ID&gt;_sensor_data 임</a:t>
             </a:r>
           </a:p>
         </p:txBody>
@@ -49493,7 +56395,7 @@
                 <a:ea typeface="맑은 고딕"/>
                 <a:cs typeface="맑은 고딕"/>
               </a:rPr>
-              <a:t> 를 반복합니다. 이력 테이블은 프로그램이 날짜별로 자동 생성합니다.</a:t>
+              <a:t> 를 반복함 · 이력 테이블은 프로그램이 날짜별로 자동 생성함</a:t>
             </a:r>
           </a:p>
         </p:txBody>
@@ -49797,7 +56699,7 @@
                 <a:ea typeface="맑은 고딕"/>
                 <a:cs typeface="맑은 고딕"/>
               </a:rPr>
-              <a:t>D:\MultiModal_FireCam\ 아래에 source, predict_machine, fall_detection, users 를 둡니다.</a:t>
+              <a:t>D:\MultiModal_FireCam\ 아래에 source, predict_machine, fall_detection, users 를 둠</a:t>
             </a:r>
           </a:p>
         </p:txBody>
@@ -49896,7 +56798,7 @@
                 <a:ea typeface="맑은 고딕"/>
                 <a:cs typeface="맑은 고딕"/>
               </a:rPr>
-              <a:t>DLL 을 함께 둡니다</a:t>
+              <a:t>DLL 을 함께 둠</a:t>
             </a:r>
           </a:p>
         </p:txBody>
@@ -49943,7 +56845,7 @@
                 <a:ea typeface="맑은 고딕"/>
                 <a:cs typeface="맑은 고딕"/>
               </a:rPr>
-              <a:t>libmysql.dll, libcrypto-3-x64.dll, libssl-3-x64.dll 을 exe 와 같은 폴더에 둡니다.</a:t>
+              <a:t>libmysql.dll, libcrypto-3-x64.dll, libssl-3-x64.dll 을 exe 와 같은 폴더에 둠</a:t>
             </a:r>
           </a:p>
         </p:txBody>
@@ -50089,7 +56991,7 @@
                 <a:ea typeface="맑은 고딕"/>
                 <a:cs typeface="맑은 고딕"/>
               </a:rPr>
-              <a:t>exe 와 같은 폴더에 둡니다. 이 파일이 없으면 exe 가 있는 폴더를 기준으로 동작합니다.</a:t>
+              <a:t>exe 와 같은 폴더에 둠 · 이 파일이 없으면 exe 가 있는 폴더를 기준으로 동작함</a:t>
             </a:r>
           </a:p>
         </p:txBody>
@@ -50558,7 +57460,7 @@
                 <a:ea typeface="맑은 고딕"/>
                 <a:cs typeface="맑은 고딕"/>
               </a:rPr>
-              <a:t>ROOT_PATH 를 먼저 정합니다.</a:t>
+              <a:t>ROOT_PATH 를 먼저 정함</a:t>
             </a:r>
           </a:p>
         </p:txBody>
@@ -50704,7 +57606,7 @@
                 <a:ea typeface="맑은 고딕"/>
                 <a:cs typeface="맑은 고딕"/>
               </a:rPr>
-              <a:t>ROOT_PATH 아래에서 찾습니다.</a:t>
+              <a:t>ROOT_PATH 아래에서 찾음</a:t>
             </a:r>
           </a:p>
         </p:txBody>
@@ -50850,7 +57752,7 @@
                 <a:ea typeface="맑은 고딕"/>
                 <a:cs typeface="맑은 고딕"/>
               </a:rPr>
-              <a:t>비밀번호만 따로 읽습니다.</a:t>
+              <a:t>비밀번호만 따로 읽음</a:t>
             </a:r>
           </a:p>
         </p:txBody>
@@ -50897,7 +57799,7 @@
                 <a:ea typeface="맑은 고딕"/>
                 <a:cs typeface="맑은 고딕"/>
               </a:rPr>
-              <a:t>ROOT_PATH 가 잘못되면 env.ini 를 찾지 못했다는 메시지와 함께 프로그램이 즉시 종료됩니다.</a:t>
+              <a:t>ROOT_PATH 가 잘못되면 env.ini 를 찾지 못했다는 메시지와 함께 프로그램이 즉시 종료됨</a:t>
             </a:r>
           </a:p>
         </p:txBody>
